--- a/slides/01-Cardinality.pptx
+++ b/slides/01-Cardinality.pptx
@@ -5,7 +5,7 @@
     <p:sldMasterId id="2147484006" r:id="rId1"/>
   </p:sldMasterIdLst>
   <p:notesMasterIdLst>
-    <p:notesMasterId r:id="rId41"/>
+    <p:notesMasterId r:id="rId40"/>
   </p:notesMasterIdLst>
   <p:sldIdLst>
     <p:sldId id="256" r:id="rId2"/>
@@ -24,29 +24,28 @@
     <p:sldId id="351" r:id="rId15"/>
     <p:sldId id="316" r:id="rId16"/>
     <p:sldId id="368" r:id="rId17"/>
-    <p:sldId id="318" r:id="rId18"/>
-    <p:sldId id="384" r:id="rId19"/>
-    <p:sldId id="354" r:id="rId20"/>
-    <p:sldId id="356" r:id="rId21"/>
-    <p:sldId id="355" r:id="rId22"/>
-    <p:sldId id="370" r:id="rId23"/>
-    <p:sldId id="357" r:id="rId24"/>
-    <p:sldId id="371" r:id="rId25"/>
-    <p:sldId id="314" r:id="rId26"/>
-    <p:sldId id="375" r:id="rId27"/>
-    <p:sldId id="372" r:id="rId28"/>
-    <p:sldId id="382" r:id="rId29"/>
-    <p:sldId id="319" r:id="rId30"/>
-    <p:sldId id="320" r:id="rId31"/>
-    <p:sldId id="373" r:id="rId32"/>
-    <p:sldId id="321" r:id="rId33"/>
-    <p:sldId id="376" r:id="rId34"/>
-    <p:sldId id="325" r:id="rId35"/>
-    <p:sldId id="322" r:id="rId36"/>
-    <p:sldId id="383" r:id="rId37"/>
-    <p:sldId id="327" r:id="rId38"/>
-    <p:sldId id="328" r:id="rId39"/>
-    <p:sldId id="378" r:id="rId40"/>
+    <p:sldId id="384" r:id="rId18"/>
+    <p:sldId id="354" r:id="rId19"/>
+    <p:sldId id="356" r:id="rId20"/>
+    <p:sldId id="355" r:id="rId21"/>
+    <p:sldId id="370" r:id="rId22"/>
+    <p:sldId id="357" r:id="rId23"/>
+    <p:sldId id="371" r:id="rId24"/>
+    <p:sldId id="314" r:id="rId25"/>
+    <p:sldId id="375" r:id="rId26"/>
+    <p:sldId id="372" r:id="rId27"/>
+    <p:sldId id="382" r:id="rId28"/>
+    <p:sldId id="319" r:id="rId29"/>
+    <p:sldId id="320" r:id="rId30"/>
+    <p:sldId id="373" r:id="rId31"/>
+    <p:sldId id="321" r:id="rId32"/>
+    <p:sldId id="376" r:id="rId33"/>
+    <p:sldId id="325" r:id="rId34"/>
+    <p:sldId id="322" r:id="rId35"/>
+    <p:sldId id="383" r:id="rId36"/>
+    <p:sldId id="327" r:id="rId37"/>
+    <p:sldId id="328" r:id="rId38"/>
+    <p:sldId id="378" r:id="rId39"/>
   </p:sldIdLst>
   <p:sldSz cx="12192000" cy="6858000"/>
   <p:notesSz cx="6858000" cy="9144000"/>
@@ -235,7 +234,7 @@
           <a:p>
             <a:fld id="{C5B45307-6ED4-B142-BD64-10F739779302}" type="datetimeFigureOut">
               <a:rPr lang="en-US" smtClean="0"/>
-              <a:t>7/14/26</a:t>
+              <a:t>8/31/26</a:t>
             </a:fld>
             <a:endParaRPr lang="en-US"/>
           </a:p>
@@ -754,7 +753,7 @@
           <a:noFill/>
           <a:extLst>
             <a:ext uri="{909E8E84-426E-40dd-AFC4-6F175D3DCCD1}">
-              <a14:hiddenFill xmlns:a14="http://schemas.microsoft.com/office/drawing/2010/main" xmlns="">
+              <a14:hiddenFill xmlns="" xmlns:a14="http://schemas.microsoft.com/office/drawing/2010/main">
                 <a:solidFill>
                   <a:srgbClr val="FFFFFF"/>
                 </a:solidFill>
@@ -813,7 +812,7 @@
             </a:ln>
             <a:extLst>
               <a:ext uri="{91240B29-F687-4f45-9708-019B960494DF}">
-                <a14:hiddenLine xmlns:a14="http://schemas.microsoft.com/office/drawing/2010/main" xmlns="" w="9525">
+                <a14:hiddenLine xmlns="" xmlns:a14="http://schemas.microsoft.com/office/drawing/2010/main" w="9525">
                   <a:solidFill>
                     <a:srgbClr val="000000"/>
                   </a:solidFill>
@@ -903,7 +902,7 @@
             </a:ln>
             <a:extLst>
               <a:ext uri="{91240B29-F687-4f45-9708-019B960494DF}">
-                <a14:hiddenLine xmlns:a14="http://schemas.microsoft.com/office/drawing/2010/main" xmlns="" w="9525">
+                <a14:hiddenLine xmlns="" xmlns:a14="http://schemas.microsoft.com/office/drawing/2010/main" w="9525">
                   <a:solidFill>
                     <a:srgbClr val="000000"/>
                   </a:solidFill>
@@ -993,7 +992,7 @@
             </a:ln>
             <a:extLst>
               <a:ext uri="{91240B29-F687-4f45-9708-019B960494DF}">
-                <a14:hiddenLine xmlns:a14="http://schemas.microsoft.com/office/drawing/2010/main" xmlns="" w="9525">
+                <a14:hiddenLine xmlns="" xmlns:a14="http://schemas.microsoft.com/office/drawing/2010/main" w="9525">
                   <a:solidFill>
                     <a:srgbClr val="000000"/>
                   </a:solidFill>
@@ -1027,7 +1026,7 @@
             </a:ln>
             <a:extLst>
               <a:ext uri="{91240B29-F687-4f45-9708-019B960494DF}">
-                <a14:hiddenLine xmlns:a14="http://schemas.microsoft.com/office/drawing/2010/main" xmlns="" w="9525">
+                <a14:hiddenLine xmlns="" xmlns:a14="http://schemas.microsoft.com/office/drawing/2010/main" w="9525">
                   <a:solidFill>
                     <a:srgbClr val="000000"/>
                   </a:solidFill>
@@ -1117,7 +1116,7 @@
             </a:ln>
             <a:extLst>
               <a:ext uri="{91240B29-F687-4f45-9708-019B960494DF}">
-                <a14:hiddenLine xmlns:a14="http://schemas.microsoft.com/office/drawing/2010/main" xmlns="" w="9525">
+                <a14:hiddenLine xmlns="" xmlns:a14="http://schemas.microsoft.com/office/drawing/2010/main" w="9525">
                   <a:solidFill>
                     <a:srgbClr val="000000"/>
                   </a:solidFill>
@@ -1179,7 +1178,7 @@
             </a:ln>
             <a:extLst>
               <a:ext uri="{91240B29-F687-4f45-9708-019B960494DF}">
-                <a14:hiddenLine xmlns:a14="http://schemas.microsoft.com/office/drawing/2010/main" xmlns="" w="9525">
+                <a14:hiddenLine xmlns="" xmlns:a14="http://schemas.microsoft.com/office/drawing/2010/main" w="9525">
                   <a:solidFill>
                     <a:srgbClr val="000000"/>
                   </a:solidFill>
@@ -1241,7 +1240,7 @@
             </a:ln>
             <a:extLst>
               <a:ext uri="{91240B29-F687-4f45-9708-019B960494DF}">
-                <a14:hiddenLine xmlns:a14="http://schemas.microsoft.com/office/drawing/2010/main" xmlns="" w="9525">
+                <a14:hiddenLine xmlns="" xmlns:a14="http://schemas.microsoft.com/office/drawing/2010/main" w="9525">
                   <a:solidFill>
                     <a:srgbClr val="000000"/>
                   </a:solidFill>
@@ -1331,7 +1330,7 @@
             </a:ln>
             <a:extLst>
               <a:ext uri="{91240B29-F687-4f45-9708-019B960494DF}">
-                <a14:hiddenLine xmlns:a14="http://schemas.microsoft.com/office/drawing/2010/main" xmlns="" w="9525">
+                <a14:hiddenLine xmlns="" xmlns:a14="http://schemas.microsoft.com/office/drawing/2010/main" w="9525">
                   <a:solidFill>
                     <a:srgbClr val="000000"/>
                   </a:solidFill>
@@ -1393,7 +1392,7 @@
             </a:ln>
             <a:extLst>
               <a:ext uri="{91240B29-F687-4f45-9708-019B960494DF}">
-                <a14:hiddenLine xmlns:a14="http://schemas.microsoft.com/office/drawing/2010/main" xmlns="" w="9525">
+                <a14:hiddenLine xmlns="" xmlns:a14="http://schemas.microsoft.com/office/drawing/2010/main" w="9525">
                   <a:solidFill>
                     <a:srgbClr val="000000"/>
                   </a:solidFill>
@@ -1455,7 +1454,7 @@
             </a:ln>
             <a:extLst>
               <a:ext uri="{91240B29-F687-4f45-9708-019B960494DF}">
-                <a14:hiddenLine xmlns:a14="http://schemas.microsoft.com/office/drawing/2010/main" xmlns="" w="9525">
+                <a14:hiddenLine xmlns="" xmlns:a14="http://schemas.microsoft.com/office/drawing/2010/main" w="9525">
                   <a:solidFill>
                     <a:srgbClr val="000000"/>
                   </a:solidFill>
@@ -1545,7 +1544,7 @@
             </a:ln>
             <a:extLst>
               <a:ext uri="{91240B29-F687-4f45-9708-019B960494DF}">
-                <a14:hiddenLine xmlns:a14="http://schemas.microsoft.com/office/drawing/2010/main" xmlns="" w="9525">
+                <a14:hiddenLine xmlns="" xmlns:a14="http://schemas.microsoft.com/office/drawing/2010/main" w="9525">
                   <a:solidFill>
                     <a:srgbClr val="000000"/>
                   </a:solidFill>
@@ -1635,7 +1634,7 @@
             </a:ln>
             <a:extLst>
               <a:ext uri="{91240B29-F687-4f45-9708-019B960494DF}">
-                <a14:hiddenLine xmlns:a14="http://schemas.microsoft.com/office/drawing/2010/main" xmlns="" w="9525">
+                <a14:hiddenLine xmlns="" xmlns:a14="http://schemas.microsoft.com/office/drawing/2010/main" w="9525">
                   <a:solidFill>
                     <a:srgbClr val="000000"/>
                   </a:solidFill>
@@ -1697,7 +1696,7 @@
             </a:ln>
             <a:extLst>
               <a:ext uri="{91240B29-F687-4f45-9708-019B960494DF}">
-                <a14:hiddenLine xmlns:a14="http://schemas.microsoft.com/office/drawing/2010/main" xmlns="" w="9525">
+                <a14:hiddenLine xmlns="" xmlns:a14="http://schemas.microsoft.com/office/drawing/2010/main" w="9525">
                   <a:solidFill>
                     <a:srgbClr val="000000"/>
                   </a:solidFill>
@@ -1807,7 +1806,7 @@
             </a:ln>
             <a:extLst>
               <a:ext uri="{91240B29-F687-4f45-9708-019B960494DF}">
-                <a14:hiddenLine xmlns:a14="http://schemas.microsoft.com/office/drawing/2010/main" xmlns="" w="9525">
+                <a14:hiddenLine xmlns="" xmlns:a14="http://schemas.microsoft.com/office/drawing/2010/main" w="9525">
                   <a:solidFill>
                     <a:srgbClr val="000000"/>
                   </a:solidFill>
@@ -1869,7 +1868,7 @@
             </a:ln>
             <a:extLst>
               <a:ext uri="{91240B29-F687-4f45-9708-019B960494DF}">
-                <a14:hiddenLine xmlns:a14="http://schemas.microsoft.com/office/drawing/2010/main" xmlns="" w="9525">
+                <a14:hiddenLine xmlns="" xmlns:a14="http://schemas.microsoft.com/office/drawing/2010/main" w="9525">
                   <a:solidFill>
                     <a:srgbClr val="000000"/>
                   </a:solidFill>
@@ -1959,7 +1958,7 @@
             </a:ln>
             <a:extLst>
               <a:ext uri="{91240B29-F687-4f45-9708-019B960494DF}">
-                <a14:hiddenLine xmlns:a14="http://schemas.microsoft.com/office/drawing/2010/main" xmlns="" w="9525">
+                <a14:hiddenLine xmlns="" xmlns:a14="http://schemas.microsoft.com/office/drawing/2010/main" w="9525">
                   <a:solidFill>
                     <a:srgbClr val="000000"/>
                   </a:solidFill>
@@ -2049,7 +2048,7 @@
             </a:ln>
             <a:extLst>
               <a:ext uri="{91240B29-F687-4f45-9708-019B960494DF}">
-                <a14:hiddenLine xmlns:a14="http://schemas.microsoft.com/office/drawing/2010/main" xmlns="" w="9525">
+                <a14:hiddenLine xmlns="" xmlns:a14="http://schemas.microsoft.com/office/drawing/2010/main" w="9525">
                   <a:solidFill>
                     <a:srgbClr val="000000"/>
                   </a:solidFill>
@@ -2111,7 +2110,7 @@
             </a:ln>
             <a:extLst>
               <a:ext uri="{91240B29-F687-4f45-9708-019B960494DF}">
-                <a14:hiddenLine xmlns:a14="http://schemas.microsoft.com/office/drawing/2010/main" xmlns="" w="9525">
+                <a14:hiddenLine xmlns="" xmlns:a14="http://schemas.microsoft.com/office/drawing/2010/main" w="9525">
                   <a:solidFill>
                     <a:srgbClr val="000000"/>
                   </a:solidFill>
@@ -2201,7 +2200,7 @@
             </a:ln>
             <a:extLst>
               <a:ext uri="{91240B29-F687-4f45-9708-019B960494DF}">
-                <a14:hiddenLine xmlns:a14="http://schemas.microsoft.com/office/drawing/2010/main" xmlns="" w="9525">
+                <a14:hiddenLine xmlns="" xmlns:a14="http://schemas.microsoft.com/office/drawing/2010/main" w="9525">
                   <a:solidFill>
                     <a:srgbClr val="000000"/>
                   </a:solidFill>
@@ -2291,7 +2290,7 @@
             </a:ln>
             <a:extLst>
               <a:ext uri="{91240B29-F687-4f45-9708-019B960494DF}">
-                <a14:hiddenLine xmlns:a14="http://schemas.microsoft.com/office/drawing/2010/main" xmlns="" w="9525">
+                <a14:hiddenLine xmlns="" xmlns:a14="http://schemas.microsoft.com/office/drawing/2010/main" w="9525">
                   <a:solidFill>
                     <a:srgbClr val="000000"/>
                   </a:solidFill>
@@ -2347,7 +2346,7 @@
             </a:ln>
             <a:extLst>
               <a:ext uri="{91240B29-F687-4f45-9708-019B960494DF}">
-                <a14:hiddenLine xmlns:a14="http://schemas.microsoft.com/office/drawing/2010/main" xmlns="" w="9525">
+                <a14:hiddenLine xmlns="" xmlns:a14="http://schemas.microsoft.com/office/drawing/2010/main" w="9525">
                   <a:solidFill>
                     <a:srgbClr val="000000"/>
                   </a:solidFill>
@@ -2437,7 +2436,7 @@
             </a:ln>
             <a:extLst>
               <a:ext uri="{91240B29-F687-4f45-9708-019B960494DF}">
-                <a14:hiddenLine xmlns:a14="http://schemas.microsoft.com/office/drawing/2010/main" xmlns="" w="9525">
+                <a14:hiddenLine xmlns="" xmlns:a14="http://schemas.microsoft.com/office/drawing/2010/main" w="9525">
                   <a:solidFill>
                     <a:srgbClr val="000000"/>
                   </a:solidFill>
@@ -2493,7 +2492,7 @@
             </a:ln>
             <a:extLst>
               <a:ext uri="{91240B29-F687-4f45-9708-019B960494DF}">
-                <a14:hiddenLine xmlns:a14="http://schemas.microsoft.com/office/drawing/2010/main" xmlns="" w="9525">
+                <a14:hiddenLine xmlns="" xmlns:a14="http://schemas.microsoft.com/office/drawing/2010/main" w="9525">
                   <a:solidFill>
                     <a:srgbClr val="000000"/>
                   </a:solidFill>
@@ -2583,7 +2582,7 @@
             </a:ln>
             <a:extLst>
               <a:ext uri="{91240B29-F687-4f45-9708-019B960494DF}">
-                <a14:hiddenLine xmlns:a14="http://schemas.microsoft.com/office/drawing/2010/main" xmlns="" w="9525">
+                <a14:hiddenLine xmlns="" xmlns:a14="http://schemas.microsoft.com/office/drawing/2010/main" w="9525">
                   <a:solidFill>
                     <a:srgbClr val="000000"/>
                   </a:solidFill>
@@ -2651,7 +2650,7 @@
             </a:ln>
             <a:extLst>
               <a:ext uri="{91240B29-F687-4f45-9708-019B960494DF}">
-                <a14:hiddenLine xmlns:a14="http://schemas.microsoft.com/office/drawing/2010/main" xmlns="" w="9525">
+                <a14:hiddenLine xmlns="" xmlns:a14="http://schemas.microsoft.com/office/drawing/2010/main" w="9525">
                   <a:solidFill>
                     <a:srgbClr val="000000"/>
                   </a:solidFill>
@@ -2741,7 +2740,7 @@
             </a:ln>
             <a:extLst>
               <a:ext uri="{91240B29-F687-4f45-9708-019B960494DF}">
-                <a14:hiddenLine xmlns:a14="http://schemas.microsoft.com/office/drawing/2010/main" xmlns="" w="9525">
+                <a14:hiddenLine xmlns="" xmlns:a14="http://schemas.microsoft.com/office/drawing/2010/main" w="9525">
                   <a:solidFill>
                     <a:srgbClr val="000000"/>
                   </a:solidFill>
@@ -2809,7 +2808,7 @@
             </a:ln>
             <a:extLst>
               <a:ext uri="{91240B29-F687-4f45-9708-019B960494DF}">
-                <a14:hiddenLine xmlns:a14="http://schemas.microsoft.com/office/drawing/2010/main" xmlns="" w="9525">
+                <a14:hiddenLine xmlns="" xmlns:a14="http://schemas.microsoft.com/office/drawing/2010/main" w="9525">
                   <a:solidFill>
                     <a:srgbClr val="000000"/>
                   </a:solidFill>
@@ -2899,7 +2898,7 @@
             </a:ln>
             <a:extLst>
               <a:ext uri="{91240B29-F687-4f45-9708-019B960494DF}">
-                <a14:hiddenLine xmlns:a14="http://schemas.microsoft.com/office/drawing/2010/main" xmlns="" w="9525">
+                <a14:hiddenLine xmlns="" xmlns:a14="http://schemas.microsoft.com/office/drawing/2010/main" w="9525">
                   <a:solidFill>
                     <a:srgbClr val="000000"/>
                   </a:solidFill>
@@ -2933,7 +2932,7 @@
             </a:ln>
             <a:extLst>
               <a:ext uri="{91240B29-F687-4f45-9708-019B960494DF}">
-                <a14:hiddenLine xmlns:a14="http://schemas.microsoft.com/office/drawing/2010/main" xmlns="" w="9525">
+                <a14:hiddenLine xmlns="" xmlns:a14="http://schemas.microsoft.com/office/drawing/2010/main" w="9525">
                   <a:solidFill>
                     <a:srgbClr val="000000"/>
                   </a:solidFill>
@@ -3023,7 +3022,7 @@
             </a:ln>
             <a:extLst>
               <a:ext uri="{91240B29-F687-4f45-9708-019B960494DF}">
-                <a14:hiddenLine xmlns:a14="http://schemas.microsoft.com/office/drawing/2010/main" xmlns="" w="9525">
+                <a14:hiddenLine xmlns="" xmlns:a14="http://schemas.microsoft.com/office/drawing/2010/main" w="9525">
                   <a:solidFill>
                     <a:srgbClr val="000000"/>
                   </a:solidFill>
@@ -3085,7 +3084,7 @@
             </a:ln>
             <a:extLst>
               <a:ext uri="{91240B29-F687-4f45-9708-019B960494DF}">
-                <a14:hiddenLine xmlns:a14="http://schemas.microsoft.com/office/drawing/2010/main" xmlns="" w="9525">
+                <a14:hiddenLine xmlns="" xmlns:a14="http://schemas.microsoft.com/office/drawing/2010/main" w="9525">
                   <a:solidFill>
                     <a:srgbClr val="000000"/>
                   </a:solidFill>
@@ -3147,7 +3146,7 @@
             </a:ln>
             <a:extLst>
               <a:ext uri="{91240B29-F687-4f45-9708-019B960494DF}">
-                <a14:hiddenLine xmlns:a14="http://schemas.microsoft.com/office/drawing/2010/main" xmlns="" w="9525">
+                <a14:hiddenLine xmlns="" xmlns:a14="http://schemas.microsoft.com/office/drawing/2010/main" w="9525">
                   <a:solidFill>
                     <a:srgbClr val="000000"/>
                   </a:solidFill>
@@ -3237,7 +3236,7 @@
             </a:ln>
             <a:extLst>
               <a:ext uri="{91240B29-F687-4f45-9708-019B960494DF}">
-                <a14:hiddenLine xmlns:a14="http://schemas.microsoft.com/office/drawing/2010/main" xmlns="" w="9525">
+                <a14:hiddenLine xmlns="" xmlns:a14="http://schemas.microsoft.com/office/drawing/2010/main" w="9525">
                   <a:solidFill>
                     <a:srgbClr val="000000"/>
                   </a:solidFill>
@@ -3305,7 +3304,7 @@
             </a:ln>
             <a:extLst>
               <a:ext uri="{91240B29-F687-4f45-9708-019B960494DF}">
-                <a14:hiddenLine xmlns:a14="http://schemas.microsoft.com/office/drawing/2010/main" xmlns="" w="9525">
+                <a14:hiddenLine xmlns="" xmlns:a14="http://schemas.microsoft.com/office/drawing/2010/main" w="9525">
                   <a:solidFill>
                     <a:srgbClr val="000000"/>
                   </a:solidFill>
@@ -3367,7 +3366,7 @@
             </a:ln>
             <a:extLst>
               <a:ext uri="{91240B29-F687-4f45-9708-019B960494DF}">
-                <a14:hiddenLine xmlns:a14="http://schemas.microsoft.com/office/drawing/2010/main" xmlns="" w="9525">
+                <a14:hiddenLine xmlns="" xmlns:a14="http://schemas.microsoft.com/office/drawing/2010/main" w="9525">
                   <a:solidFill>
                     <a:srgbClr val="000000"/>
                   </a:solidFill>
@@ -3457,7 +3456,7 @@
             </a:ln>
             <a:extLst>
               <a:ext uri="{91240B29-F687-4f45-9708-019B960494DF}">
-                <a14:hiddenLine xmlns:a14="http://schemas.microsoft.com/office/drawing/2010/main" xmlns="" w="9525">
+                <a14:hiddenLine xmlns="" xmlns:a14="http://schemas.microsoft.com/office/drawing/2010/main" w="9525">
                   <a:solidFill>
                     <a:srgbClr val="000000"/>
                   </a:solidFill>
@@ -3519,7 +3518,7 @@
             </a:ln>
             <a:extLst>
               <a:ext uri="{91240B29-F687-4f45-9708-019B960494DF}">
-                <a14:hiddenLine xmlns:a14="http://schemas.microsoft.com/office/drawing/2010/main" xmlns="" w="9525">
+                <a14:hiddenLine xmlns="" xmlns:a14="http://schemas.microsoft.com/office/drawing/2010/main" w="9525">
                   <a:solidFill>
                     <a:srgbClr val="000000"/>
                   </a:solidFill>
@@ -3609,7 +3608,7 @@
             </a:ln>
             <a:extLst>
               <a:ext uri="{91240B29-F687-4f45-9708-019B960494DF}">
-                <a14:hiddenLine xmlns:a14="http://schemas.microsoft.com/office/drawing/2010/main" xmlns="" w="9525">
+                <a14:hiddenLine xmlns="" xmlns:a14="http://schemas.microsoft.com/office/drawing/2010/main" w="9525">
                   <a:solidFill>
                     <a:srgbClr val="000000"/>
                   </a:solidFill>
@@ -3671,7 +3670,7 @@
             </a:ln>
             <a:extLst>
               <a:ext uri="{91240B29-F687-4f45-9708-019B960494DF}">
-                <a14:hiddenLine xmlns:a14="http://schemas.microsoft.com/office/drawing/2010/main" xmlns="" w="9525">
+                <a14:hiddenLine xmlns="" xmlns:a14="http://schemas.microsoft.com/office/drawing/2010/main" w="9525">
                   <a:solidFill>
                     <a:srgbClr val="000000"/>
                   </a:solidFill>
@@ -3761,7 +3760,7 @@
             </a:ln>
             <a:extLst>
               <a:ext uri="{91240B29-F687-4f45-9708-019B960494DF}">
-                <a14:hiddenLine xmlns:a14="http://schemas.microsoft.com/office/drawing/2010/main" xmlns="" w="9525">
+                <a14:hiddenLine xmlns="" xmlns:a14="http://schemas.microsoft.com/office/drawing/2010/main" w="9525">
                   <a:solidFill>
                     <a:srgbClr val="000000"/>
                   </a:solidFill>
@@ -3795,7 +3794,7 @@
             </a:ln>
             <a:extLst>
               <a:ext uri="{91240B29-F687-4f45-9708-019B960494DF}">
-                <a14:hiddenLine xmlns:a14="http://schemas.microsoft.com/office/drawing/2010/main" xmlns="" w="9525">
+                <a14:hiddenLine xmlns="" xmlns:a14="http://schemas.microsoft.com/office/drawing/2010/main" w="9525">
                   <a:solidFill>
                     <a:srgbClr val="000000"/>
                   </a:solidFill>
@@ -3860,7 +3859,7 @@
             </a:ln>
             <a:extLst>
               <a:ext uri="{91240B29-F687-4f45-9708-019B960494DF}">
-                <a14:hiddenLine xmlns:a14="http://schemas.microsoft.com/office/drawing/2010/main" xmlns="" w="9525">
+                <a14:hiddenLine xmlns="" xmlns:a14="http://schemas.microsoft.com/office/drawing/2010/main" w="9525">
                   <a:solidFill>
                     <a:srgbClr val="000000"/>
                   </a:solidFill>
@@ -3950,7 +3949,7 @@
             </a:ln>
             <a:extLst>
               <a:ext uri="{91240B29-F687-4f45-9708-019B960494DF}">
-                <a14:hiddenLine xmlns:a14="http://schemas.microsoft.com/office/drawing/2010/main" xmlns="" w="9525">
+                <a14:hiddenLine xmlns="" xmlns:a14="http://schemas.microsoft.com/office/drawing/2010/main" w="9525">
                   <a:solidFill>
                     <a:srgbClr val="000000"/>
                   </a:solidFill>
@@ -4012,7 +4011,7 @@
             </a:ln>
             <a:extLst>
               <a:ext uri="{91240B29-F687-4f45-9708-019B960494DF}">
-                <a14:hiddenLine xmlns:a14="http://schemas.microsoft.com/office/drawing/2010/main" xmlns="" w="9525">
+                <a14:hiddenLine xmlns="" xmlns:a14="http://schemas.microsoft.com/office/drawing/2010/main" w="9525">
                   <a:solidFill>
                     <a:srgbClr val="000000"/>
                   </a:solidFill>
@@ -4102,7 +4101,7 @@
             </a:ln>
             <a:extLst>
               <a:ext uri="{91240B29-F687-4f45-9708-019B960494DF}">
-                <a14:hiddenLine xmlns:a14="http://schemas.microsoft.com/office/drawing/2010/main" xmlns="" w="9525">
+                <a14:hiddenLine xmlns="" xmlns:a14="http://schemas.microsoft.com/office/drawing/2010/main" w="9525">
                   <a:solidFill>
                     <a:srgbClr val="000000"/>
                   </a:solidFill>
@@ -4192,7 +4191,7 @@
             </a:ln>
             <a:extLst>
               <a:ext uri="{91240B29-F687-4f45-9708-019B960494DF}">
-                <a14:hiddenLine xmlns:a14="http://schemas.microsoft.com/office/drawing/2010/main" xmlns="" w="9525">
+                <a14:hiddenLine xmlns="" xmlns:a14="http://schemas.microsoft.com/office/drawing/2010/main" w="9525">
                   <a:solidFill>
                     <a:srgbClr val="000000"/>
                   </a:solidFill>
@@ -4257,7 +4256,7 @@
             </a:ln>
             <a:extLst>
               <a:ext uri="{91240B29-F687-4f45-9708-019B960494DF}">
-                <a14:hiddenLine xmlns:a14="http://schemas.microsoft.com/office/drawing/2010/main" xmlns="" w="9525">
+                <a14:hiddenLine xmlns="" xmlns:a14="http://schemas.microsoft.com/office/drawing/2010/main" w="9525">
                   <a:solidFill>
                     <a:srgbClr val="000000"/>
                   </a:solidFill>
@@ -4319,7 +4318,7 @@
             </a:ln>
             <a:extLst>
               <a:ext uri="{91240B29-F687-4f45-9708-019B960494DF}">
-                <a14:hiddenLine xmlns:a14="http://schemas.microsoft.com/office/drawing/2010/main" xmlns="" w="9525">
+                <a14:hiddenLine xmlns="" xmlns:a14="http://schemas.microsoft.com/office/drawing/2010/main" w="9525">
                   <a:solidFill>
                     <a:srgbClr val="000000"/>
                   </a:solidFill>
@@ -4409,7 +4408,7 @@
             </a:ln>
             <a:extLst>
               <a:ext uri="{91240B29-F687-4f45-9708-019B960494DF}">
-                <a14:hiddenLine xmlns:a14="http://schemas.microsoft.com/office/drawing/2010/main" xmlns="" w="9525">
+                <a14:hiddenLine xmlns="" xmlns:a14="http://schemas.microsoft.com/office/drawing/2010/main" w="9525">
                   <a:solidFill>
                     <a:srgbClr val="000000"/>
                   </a:solidFill>
@@ -4499,7 +4498,7 @@
             </a:ln>
             <a:extLst>
               <a:ext uri="{91240B29-F687-4f45-9708-019B960494DF}">
-                <a14:hiddenLine xmlns:a14="http://schemas.microsoft.com/office/drawing/2010/main" xmlns="" w="9525">
+                <a14:hiddenLine xmlns="" xmlns:a14="http://schemas.microsoft.com/office/drawing/2010/main" w="9525">
                   <a:solidFill>
                     <a:srgbClr val="000000"/>
                   </a:solidFill>
@@ -4561,7 +4560,7 @@
             </a:ln>
             <a:extLst>
               <a:ext uri="{91240B29-F687-4f45-9708-019B960494DF}">
-                <a14:hiddenLine xmlns:a14="http://schemas.microsoft.com/office/drawing/2010/main" xmlns="" w="9525">
+                <a14:hiddenLine xmlns="" xmlns:a14="http://schemas.microsoft.com/office/drawing/2010/main" w="9525">
                   <a:solidFill>
                     <a:srgbClr val="000000"/>
                   </a:solidFill>
@@ -4681,7 +4680,7 @@
             </a:ln>
             <a:extLst>
               <a:ext uri="{91240B29-F687-4f45-9708-019B960494DF}">
-                <a14:hiddenLine xmlns:a14="http://schemas.microsoft.com/office/drawing/2010/main" xmlns="" w="9525">
+                <a14:hiddenLine xmlns="" xmlns:a14="http://schemas.microsoft.com/office/drawing/2010/main" w="9525">
                   <a:solidFill>
                     <a:srgbClr val="000000"/>
                   </a:solidFill>
@@ -4749,7 +4748,7 @@
             </a:ln>
             <a:extLst>
               <a:ext uri="{91240B29-F687-4f45-9708-019B960494DF}">
-                <a14:hiddenLine xmlns:a14="http://schemas.microsoft.com/office/drawing/2010/main" xmlns="" w="9525">
+                <a14:hiddenLine xmlns="" xmlns:a14="http://schemas.microsoft.com/office/drawing/2010/main" w="9525">
                   <a:solidFill>
                     <a:srgbClr val="000000"/>
                   </a:solidFill>
@@ -4839,7 +4838,7 @@
             </a:ln>
             <a:extLst>
               <a:ext uri="{91240B29-F687-4f45-9708-019B960494DF}">
-                <a14:hiddenLine xmlns:a14="http://schemas.microsoft.com/office/drawing/2010/main" xmlns="" w="9525">
+                <a14:hiddenLine xmlns="" xmlns:a14="http://schemas.microsoft.com/office/drawing/2010/main" w="9525">
                   <a:solidFill>
                     <a:srgbClr val="000000"/>
                   </a:solidFill>
@@ -4979,7 +4978,7 @@
           <a:p>
             <a:fld id="{EC4347D3-4C9A-C240-8F14-750059DFEEB0}" type="datetimeFigureOut">
               <a:rPr lang="en-US" smtClean="0"/>
-              <a:t>7/14/26</a:t>
+              <a:t>8/31/26</a:t>
             </a:fld>
             <a:endParaRPr lang="en-US"/>
           </a:p>
@@ -5246,7 +5245,7 @@
           <a:p>
             <a:fld id="{EC4347D3-4C9A-C240-8F14-750059DFEEB0}" type="datetimeFigureOut">
               <a:rPr lang="en-US" smtClean="0"/>
-              <a:t>7/14/26</a:t>
+              <a:t>8/31/26</a:t>
             </a:fld>
             <a:endParaRPr lang="en-US"/>
           </a:p>
@@ -5442,7 +5441,7 @@
           <a:p>
             <a:fld id="{EC4347D3-4C9A-C240-8F14-750059DFEEB0}" type="datetimeFigureOut">
               <a:rPr lang="en-US" smtClean="0"/>
-              <a:t>7/14/26</a:t>
+              <a:t>8/31/26</a:t>
             </a:fld>
             <a:endParaRPr lang="en-US"/>
           </a:p>
@@ -5705,7 +5704,7 @@
           <a:p>
             <a:fld id="{EC4347D3-4C9A-C240-8F14-750059DFEEB0}" type="datetimeFigureOut">
               <a:rPr lang="en-US" smtClean="0"/>
-              <a:t>7/14/26</a:t>
+              <a:t>8/31/26</a:t>
             </a:fld>
             <a:endParaRPr lang="en-US"/>
           </a:p>
@@ -6139,7 +6138,7 @@
           <a:p>
             <a:fld id="{EC4347D3-4C9A-C240-8F14-750059DFEEB0}" type="datetimeFigureOut">
               <a:rPr lang="en-US" smtClean="0"/>
-              <a:t>7/14/26</a:t>
+              <a:t>8/31/26</a:t>
             </a:fld>
             <a:endParaRPr lang="en-US"/>
           </a:p>
@@ -6685,7 +6684,7 @@
           <a:p>
             <a:fld id="{EC4347D3-4C9A-C240-8F14-750059DFEEB0}" type="datetimeFigureOut">
               <a:rPr lang="en-US" smtClean="0"/>
-              <a:t>7/14/26</a:t>
+              <a:t>8/31/26</a:t>
             </a:fld>
             <a:endParaRPr lang="en-US"/>
           </a:p>
@@ -7405,7 +7404,7 @@
           <a:p>
             <a:fld id="{EC4347D3-4C9A-C240-8F14-750059DFEEB0}" type="datetimeFigureOut">
               <a:rPr lang="en-US" smtClean="0"/>
-              <a:t>7/14/26</a:t>
+              <a:t>8/31/26</a:t>
             </a:fld>
             <a:endParaRPr lang="en-US"/>
           </a:p>
@@ -7575,7 +7574,7 @@
           <a:p>
             <a:fld id="{EC4347D3-4C9A-C240-8F14-750059DFEEB0}" type="datetimeFigureOut">
               <a:rPr lang="en-US" smtClean="0"/>
-              <a:t>7/14/26</a:t>
+              <a:t>8/31/26</a:t>
             </a:fld>
             <a:endParaRPr lang="en-US"/>
           </a:p>
@@ -7755,7 +7754,7 @@
           <a:p>
             <a:fld id="{EC4347D3-4C9A-C240-8F14-750059DFEEB0}" type="datetimeFigureOut">
               <a:rPr lang="en-US" smtClean="0"/>
-              <a:t>7/14/26</a:t>
+              <a:t>8/31/26</a:t>
             </a:fld>
             <a:endParaRPr lang="en-US"/>
           </a:p>
@@ -7925,7 +7924,7 @@
           <a:p>
             <a:fld id="{EC4347D3-4C9A-C240-8F14-750059DFEEB0}" type="datetimeFigureOut">
               <a:rPr lang="en-US" smtClean="0"/>
-              <a:t>7/14/26</a:t>
+              <a:t>8/31/26</a:t>
             </a:fld>
             <a:endParaRPr lang="en-US"/>
           </a:p>
@@ -8175,7 +8174,7 @@
           <a:p>
             <a:fld id="{EC4347D3-4C9A-C240-8F14-750059DFEEB0}" type="datetimeFigureOut">
               <a:rPr lang="en-US" smtClean="0"/>
-              <a:t>7/14/26</a:t>
+              <a:t>8/31/26</a:t>
             </a:fld>
             <a:endParaRPr lang="en-US"/>
           </a:p>
@@ -8407,7 +8406,7 @@
           <a:p>
             <a:fld id="{EC4347D3-4C9A-C240-8F14-750059DFEEB0}" type="datetimeFigureOut">
               <a:rPr lang="en-US" smtClean="0"/>
-              <a:t>7/14/26</a:t>
+              <a:t>8/31/26</a:t>
             </a:fld>
             <a:endParaRPr lang="en-US"/>
           </a:p>
@@ -8793,7 +8792,7 @@
           <a:p>
             <a:fld id="{EC4347D3-4C9A-C240-8F14-750059DFEEB0}" type="datetimeFigureOut">
               <a:rPr lang="en-US" smtClean="0"/>
-              <a:t>7/14/26</a:t>
+              <a:t>8/31/26</a:t>
             </a:fld>
             <a:endParaRPr lang="en-US"/>
           </a:p>
@@ -8916,7 +8915,7 @@
           <a:p>
             <a:fld id="{EC4347D3-4C9A-C240-8F14-750059DFEEB0}" type="datetimeFigureOut">
               <a:rPr lang="en-US" smtClean="0"/>
-              <a:t>7/14/26</a:t>
+              <a:t>8/31/26</a:t>
             </a:fld>
             <a:endParaRPr lang="en-US"/>
           </a:p>
@@ -9011,7 +9010,7 @@
           <a:p>
             <a:fld id="{EC4347D3-4C9A-C240-8F14-750059DFEEB0}" type="datetimeFigureOut">
               <a:rPr lang="en-US" smtClean="0"/>
-              <a:t>7/14/26</a:t>
+              <a:t>8/31/26</a:t>
             </a:fld>
             <a:endParaRPr lang="en-US"/>
           </a:p>
@@ -9260,7 +9259,7 @@
           <a:p>
             <a:fld id="{EC4347D3-4C9A-C240-8F14-750059DFEEB0}" type="datetimeFigureOut">
               <a:rPr lang="en-US" smtClean="0"/>
-              <a:t>7/14/26</a:t>
+              <a:t>8/31/26</a:t>
             </a:fld>
             <a:endParaRPr lang="en-US"/>
           </a:p>
@@ -9545,7 +9544,7 @@
           <a:p>
             <a:fld id="{EC4347D3-4C9A-C240-8F14-750059DFEEB0}" type="datetimeFigureOut">
               <a:rPr lang="en-US" smtClean="0"/>
-              <a:t>7/14/26</a:t>
+              <a:t>8/31/26</a:t>
             </a:fld>
             <a:endParaRPr lang="en-US"/>
           </a:p>
@@ -9668,7 +9667,7 @@
           <a:noFill/>
           <a:extLst>
             <a:ext uri="{909E8E84-426E-40dd-AFC4-6F175D3DCCD1}">
-              <a14:hiddenFill xmlns:a14="http://schemas.microsoft.com/office/drawing/2010/main" xmlns="">
+              <a14:hiddenFill xmlns="" xmlns:a14="http://schemas.microsoft.com/office/drawing/2010/main">
                 <a:solidFill>
                   <a:srgbClr val="FFFFFF"/>
                 </a:solidFill>
@@ -9742,7 +9741,7 @@
               </a:ln>
               <a:extLst>
                 <a:ext uri="{91240B29-F687-4f45-9708-019B960494DF}">
-                  <a14:hiddenLine xmlns:a14="http://schemas.microsoft.com/office/drawing/2010/main" xmlns="" w="9525">
+                  <a14:hiddenLine xmlns="" xmlns:a14="http://schemas.microsoft.com/office/drawing/2010/main" w="9525">
                     <a:solidFill>
                       <a:srgbClr val="000000"/>
                     </a:solidFill>
@@ -9832,7 +9831,7 @@
               </a:ln>
               <a:extLst>
                 <a:ext uri="{91240B29-F687-4f45-9708-019B960494DF}">
-                  <a14:hiddenLine xmlns:a14="http://schemas.microsoft.com/office/drawing/2010/main" xmlns="" w="9525">
+                  <a14:hiddenLine xmlns="" xmlns:a14="http://schemas.microsoft.com/office/drawing/2010/main" w="9525">
                     <a:solidFill>
                       <a:srgbClr val="000000"/>
                     </a:solidFill>
@@ -9922,7 +9921,7 @@
               </a:ln>
               <a:extLst>
                 <a:ext uri="{91240B29-F687-4f45-9708-019B960494DF}">
-                  <a14:hiddenLine xmlns:a14="http://schemas.microsoft.com/office/drawing/2010/main" xmlns="" w="9525">
+                  <a14:hiddenLine xmlns="" xmlns:a14="http://schemas.microsoft.com/office/drawing/2010/main" w="9525">
                     <a:solidFill>
                       <a:srgbClr val="000000"/>
                     </a:solidFill>
@@ -9984,7 +9983,7 @@
               </a:ln>
               <a:extLst>
                 <a:ext uri="{91240B29-F687-4f45-9708-019B960494DF}">
-                  <a14:hiddenLine xmlns:a14="http://schemas.microsoft.com/office/drawing/2010/main" xmlns="" w="9525">
+                  <a14:hiddenLine xmlns="" xmlns:a14="http://schemas.microsoft.com/office/drawing/2010/main" w="9525">
                     <a:solidFill>
                       <a:srgbClr val="000000"/>
                     </a:solidFill>
@@ -10074,7 +10073,7 @@
               </a:ln>
               <a:extLst>
                 <a:ext uri="{91240B29-F687-4f45-9708-019B960494DF}">
-                  <a14:hiddenLine xmlns:a14="http://schemas.microsoft.com/office/drawing/2010/main" xmlns="" w="9525">
+                  <a14:hiddenLine xmlns="" xmlns:a14="http://schemas.microsoft.com/office/drawing/2010/main" w="9525">
                     <a:solidFill>
                       <a:srgbClr val="000000"/>
                     </a:solidFill>
@@ -10136,7 +10135,7 @@
               </a:ln>
               <a:extLst>
                 <a:ext uri="{91240B29-F687-4f45-9708-019B960494DF}">
-                  <a14:hiddenLine xmlns:a14="http://schemas.microsoft.com/office/drawing/2010/main" xmlns="" w="9525">
+                  <a14:hiddenLine xmlns="" xmlns:a14="http://schemas.microsoft.com/office/drawing/2010/main" w="9525">
                     <a:solidFill>
                       <a:srgbClr val="000000"/>
                     </a:solidFill>
@@ -10198,7 +10197,7 @@
               </a:ln>
               <a:extLst>
                 <a:ext uri="{91240B29-F687-4f45-9708-019B960494DF}">
-                  <a14:hiddenLine xmlns:a14="http://schemas.microsoft.com/office/drawing/2010/main" xmlns="" w="9525">
+                  <a14:hiddenLine xmlns="" xmlns:a14="http://schemas.microsoft.com/office/drawing/2010/main" w="9525">
                     <a:solidFill>
                       <a:srgbClr val="000000"/>
                     </a:solidFill>
@@ -10288,7 +10287,7 @@
               </a:ln>
               <a:extLst>
                 <a:ext uri="{91240B29-F687-4f45-9708-019B960494DF}">
-                  <a14:hiddenLine xmlns:a14="http://schemas.microsoft.com/office/drawing/2010/main" xmlns="" w="9525">
+                  <a14:hiddenLine xmlns="" xmlns:a14="http://schemas.microsoft.com/office/drawing/2010/main" w="9525">
                     <a:solidFill>
                       <a:srgbClr val="000000"/>
                     </a:solidFill>
@@ -10378,7 +10377,7 @@
               </a:ln>
               <a:extLst>
                 <a:ext uri="{91240B29-F687-4f45-9708-019B960494DF}">
-                  <a14:hiddenLine xmlns:a14="http://schemas.microsoft.com/office/drawing/2010/main" xmlns="" w="9525">
+                  <a14:hiddenLine xmlns="" xmlns:a14="http://schemas.microsoft.com/office/drawing/2010/main" w="9525">
                     <a:solidFill>
                       <a:srgbClr val="000000"/>
                     </a:solidFill>
@@ -10440,7 +10439,7 @@
               </a:ln>
               <a:extLst>
                 <a:ext uri="{91240B29-F687-4f45-9708-019B960494DF}">
-                  <a14:hiddenLine xmlns:a14="http://schemas.microsoft.com/office/drawing/2010/main" xmlns="" w="9525">
+                  <a14:hiddenLine xmlns="" xmlns:a14="http://schemas.microsoft.com/office/drawing/2010/main" w="9525">
                     <a:solidFill>
                       <a:srgbClr val="000000"/>
                     </a:solidFill>
@@ -10550,7 +10549,7 @@
               </a:ln>
               <a:extLst>
                 <a:ext uri="{91240B29-F687-4f45-9708-019B960494DF}">
-                  <a14:hiddenLine xmlns:a14="http://schemas.microsoft.com/office/drawing/2010/main" xmlns="" w="9525">
+                  <a14:hiddenLine xmlns="" xmlns:a14="http://schemas.microsoft.com/office/drawing/2010/main" w="9525">
                     <a:solidFill>
                       <a:srgbClr val="000000"/>
                     </a:solidFill>
@@ -10634,7 +10633,7 @@
               </a:ln>
               <a:extLst>
                 <a:ext uri="{91240B29-F687-4f45-9708-019B960494DF}">
-                  <a14:hiddenLine xmlns:a14="http://schemas.microsoft.com/office/drawing/2010/main" xmlns="" w="9525">
+                  <a14:hiddenLine xmlns="" xmlns:a14="http://schemas.microsoft.com/office/drawing/2010/main" w="9525">
                     <a:solidFill>
                       <a:srgbClr val="000000"/>
                     </a:solidFill>
@@ -10696,7 +10695,7 @@
               </a:ln>
               <a:extLst>
                 <a:ext uri="{91240B29-F687-4f45-9708-019B960494DF}">
-                  <a14:hiddenLine xmlns:a14="http://schemas.microsoft.com/office/drawing/2010/main" xmlns="" w="9525">
+                  <a14:hiddenLine xmlns="" xmlns:a14="http://schemas.microsoft.com/office/drawing/2010/main" w="9525">
                     <a:solidFill>
                       <a:srgbClr val="000000"/>
                     </a:solidFill>
@@ -10758,7 +10757,7 @@
               </a:ln>
               <a:extLst>
                 <a:ext uri="{91240B29-F687-4f45-9708-019B960494DF}">
-                  <a14:hiddenLine xmlns:a14="http://schemas.microsoft.com/office/drawing/2010/main" xmlns="" w="9525">
+                  <a14:hiddenLine xmlns="" xmlns:a14="http://schemas.microsoft.com/office/drawing/2010/main" w="9525">
                     <a:solidFill>
                       <a:srgbClr val="000000"/>
                     </a:solidFill>
@@ -10848,7 +10847,7 @@
               </a:ln>
               <a:extLst>
                 <a:ext uri="{91240B29-F687-4f45-9708-019B960494DF}">
-                  <a14:hiddenLine xmlns:a14="http://schemas.microsoft.com/office/drawing/2010/main" xmlns="" w="9525">
+                  <a14:hiddenLine xmlns="" xmlns:a14="http://schemas.microsoft.com/office/drawing/2010/main" w="9525">
                     <a:solidFill>
                       <a:srgbClr val="000000"/>
                     </a:solidFill>
@@ -10882,7 +10881,7 @@
               </a:ln>
               <a:extLst>
                 <a:ext uri="{91240B29-F687-4f45-9708-019B960494DF}">
-                  <a14:hiddenLine xmlns:a14="http://schemas.microsoft.com/office/drawing/2010/main" xmlns="" w="9525">
+                  <a14:hiddenLine xmlns="" xmlns:a14="http://schemas.microsoft.com/office/drawing/2010/main" w="9525">
                     <a:solidFill>
                       <a:srgbClr val="000000"/>
                     </a:solidFill>
@@ -10947,7 +10946,7 @@
               </a:ln>
               <a:extLst>
                 <a:ext uri="{91240B29-F687-4f45-9708-019B960494DF}">
-                  <a14:hiddenLine xmlns:a14="http://schemas.microsoft.com/office/drawing/2010/main" xmlns="" w="9525">
+                  <a14:hiddenLine xmlns="" xmlns:a14="http://schemas.microsoft.com/office/drawing/2010/main" w="9525">
                     <a:solidFill>
                       <a:srgbClr val="000000"/>
                     </a:solidFill>
@@ -11037,7 +11036,7 @@
               </a:ln>
               <a:extLst>
                 <a:ext uri="{91240B29-F687-4f45-9708-019B960494DF}">
-                  <a14:hiddenLine xmlns:a14="http://schemas.microsoft.com/office/drawing/2010/main" xmlns="" w="9525">
+                  <a14:hiddenLine xmlns="" xmlns:a14="http://schemas.microsoft.com/office/drawing/2010/main" w="9525">
                     <a:solidFill>
                       <a:srgbClr val="000000"/>
                     </a:solidFill>
@@ -11099,7 +11098,7 @@
               </a:ln>
               <a:extLst>
                 <a:ext uri="{91240B29-F687-4f45-9708-019B960494DF}">
-                  <a14:hiddenLine xmlns:a14="http://schemas.microsoft.com/office/drawing/2010/main" xmlns="" w="9525">
+                  <a14:hiddenLine xmlns="" xmlns:a14="http://schemas.microsoft.com/office/drawing/2010/main" w="9525">
                     <a:solidFill>
                       <a:srgbClr val="000000"/>
                     </a:solidFill>
@@ -11189,7 +11188,7 @@
               </a:ln>
               <a:extLst>
                 <a:ext uri="{91240B29-F687-4f45-9708-019B960494DF}">
-                  <a14:hiddenLine xmlns:a14="http://schemas.microsoft.com/office/drawing/2010/main" xmlns="" w="9525">
+                  <a14:hiddenLine xmlns="" xmlns:a14="http://schemas.microsoft.com/office/drawing/2010/main" w="9525">
                     <a:solidFill>
                       <a:srgbClr val="000000"/>
                     </a:solidFill>
@@ -11254,7 +11253,7 @@
               </a:ln>
               <a:extLst>
                 <a:ext uri="{91240B29-F687-4f45-9708-019B960494DF}">
-                  <a14:hiddenLine xmlns:a14="http://schemas.microsoft.com/office/drawing/2010/main" xmlns="" w="9525">
+                  <a14:hiddenLine xmlns="" xmlns:a14="http://schemas.microsoft.com/office/drawing/2010/main" w="9525">
                     <a:solidFill>
                       <a:srgbClr val="000000"/>
                     </a:solidFill>
@@ -11316,7 +11315,7 @@
               </a:ln>
               <a:extLst>
                 <a:ext uri="{91240B29-F687-4f45-9708-019B960494DF}">
-                  <a14:hiddenLine xmlns:a14="http://schemas.microsoft.com/office/drawing/2010/main" xmlns="" w="9525">
+                  <a14:hiddenLine xmlns="" xmlns:a14="http://schemas.microsoft.com/office/drawing/2010/main" w="9525">
                     <a:solidFill>
                       <a:srgbClr val="000000"/>
                     </a:solidFill>
@@ -11406,7 +11405,7 @@
               </a:ln>
               <a:extLst>
                 <a:ext uri="{91240B29-F687-4f45-9708-019B960494DF}">
-                  <a14:hiddenLine xmlns:a14="http://schemas.microsoft.com/office/drawing/2010/main" xmlns="" w="9525">
+                  <a14:hiddenLine xmlns="" xmlns:a14="http://schemas.microsoft.com/office/drawing/2010/main" w="9525">
                     <a:solidFill>
                       <a:srgbClr val="000000"/>
                     </a:solidFill>
@@ -11496,7 +11495,7 @@
               </a:ln>
               <a:extLst>
                 <a:ext uri="{91240B29-F687-4f45-9708-019B960494DF}">
-                  <a14:hiddenLine xmlns:a14="http://schemas.microsoft.com/office/drawing/2010/main" xmlns="" w="9525">
+                  <a14:hiddenLine xmlns="" xmlns:a14="http://schemas.microsoft.com/office/drawing/2010/main" w="9525">
                     <a:solidFill>
                       <a:srgbClr val="000000"/>
                     </a:solidFill>
@@ -11561,7 +11560,7 @@
               </a:ln>
               <a:extLst>
                 <a:ext uri="{91240B29-F687-4f45-9708-019B960494DF}">
-                  <a14:hiddenLine xmlns:a14="http://schemas.microsoft.com/office/drawing/2010/main" xmlns="" w="9525">
+                  <a14:hiddenLine xmlns="" xmlns:a14="http://schemas.microsoft.com/office/drawing/2010/main" w="9525">
                     <a:solidFill>
                       <a:srgbClr val="000000"/>
                     </a:solidFill>
@@ -11681,7 +11680,7 @@
               </a:ln>
               <a:extLst>
                 <a:ext uri="{91240B29-F687-4f45-9708-019B960494DF}">
-                  <a14:hiddenLine xmlns:a14="http://schemas.microsoft.com/office/drawing/2010/main" xmlns="" w="9525">
+                  <a14:hiddenLine xmlns="" xmlns:a14="http://schemas.microsoft.com/office/drawing/2010/main" w="9525">
                     <a:solidFill>
                       <a:srgbClr val="000000"/>
                     </a:solidFill>
@@ -11762,7 +11761,7 @@
               </a:ln>
               <a:extLst>
                 <a:ext uri="{91240B29-F687-4f45-9708-019B960494DF}">
-                  <a14:hiddenLine xmlns:a14="http://schemas.microsoft.com/office/drawing/2010/main" xmlns="" w="9525">
+                  <a14:hiddenLine xmlns="" xmlns:a14="http://schemas.microsoft.com/office/drawing/2010/main" w="9525">
                     <a:solidFill>
                       <a:srgbClr val="000000"/>
                     </a:solidFill>
@@ -11877,7 +11876,7 @@
               </a:ln>
               <a:extLst>
                 <a:ext uri="{91240B29-F687-4f45-9708-019B960494DF}">
-                  <a14:hiddenLine xmlns:a14="http://schemas.microsoft.com/office/drawing/2010/main" xmlns="" w="9525">
+                  <a14:hiddenLine xmlns="" xmlns:a14="http://schemas.microsoft.com/office/drawing/2010/main" w="9525">
                     <a:solidFill>
                       <a:srgbClr val="000000"/>
                     </a:solidFill>
@@ -11967,7 +11966,7 @@
               </a:ln>
               <a:extLst>
                 <a:ext uri="{91240B29-F687-4f45-9708-019B960494DF}">
-                  <a14:hiddenLine xmlns:a14="http://schemas.microsoft.com/office/drawing/2010/main" xmlns="" w="9525">
+                  <a14:hiddenLine xmlns="" xmlns:a14="http://schemas.microsoft.com/office/drawing/2010/main" w="9525">
                     <a:solidFill>
                       <a:srgbClr val="000000"/>
                     </a:solidFill>
@@ -12032,7 +12031,7 @@
               </a:ln>
               <a:extLst>
                 <a:ext uri="{91240B29-F687-4f45-9708-019B960494DF}">
-                  <a14:hiddenLine xmlns:a14="http://schemas.microsoft.com/office/drawing/2010/main" xmlns="" w="9525">
+                  <a14:hiddenLine xmlns="" xmlns:a14="http://schemas.microsoft.com/office/drawing/2010/main" w="9525">
                     <a:solidFill>
                       <a:srgbClr val="000000"/>
                     </a:solidFill>
@@ -12122,7 +12121,7 @@
               </a:ln>
               <a:extLst>
                 <a:ext uri="{91240B29-F687-4f45-9708-019B960494DF}">
-                  <a14:hiddenLine xmlns:a14="http://schemas.microsoft.com/office/drawing/2010/main" xmlns="" w="9525">
+                  <a14:hiddenLine xmlns="" xmlns:a14="http://schemas.microsoft.com/office/drawing/2010/main" w="9525">
                     <a:solidFill>
                       <a:srgbClr val="000000"/>
                     </a:solidFill>
@@ -12190,7 +12189,7 @@
               </a:ln>
               <a:extLst>
                 <a:ext uri="{91240B29-F687-4f45-9708-019B960494DF}">
-                  <a14:hiddenLine xmlns:a14="http://schemas.microsoft.com/office/drawing/2010/main" xmlns="" w="9525">
+                  <a14:hiddenLine xmlns="" xmlns:a14="http://schemas.microsoft.com/office/drawing/2010/main" w="9525">
                     <a:solidFill>
                       <a:srgbClr val="000000"/>
                     </a:solidFill>
@@ -12280,7 +12279,7 @@
               </a:ln>
               <a:extLst>
                 <a:ext uri="{91240B29-F687-4f45-9708-019B960494DF}">
-                  <a14:hiddenLine xmlns:a14="http://schemas.microsoft.com/office/drawing/2010/main" xmlns="" w="9525">
+                  <a14:hiddenLine xmlns="" xmlns:a14="http://schemas.microsoft.com/office/drawing/2010/main" w="9525">
                     <a:solidFill>
                       <a:srgbClr val="000000"/>
                     </a:solidFill>
@@ -12348,7 +12347,7 @@
               </a:ln>
               <a:extLst>
                 <a:ext uri="{91240B29-F687-4f45-9708-019B960494DF}">
-                  <a14:hiddenLine xmlns:a14="http://schemas.microsoft.com/office/drawing/2010/main" xmlns="" w="9525">
+                  <a14:hiddenLine xmlns="" xmlns:a14="http://schemas.microsoft.com/office/drawing/2010/main" w="9525">
                     <a:solidFill>
                       <a:srgbClr val="000000"/>
                     </a:solidFill>
@@ -12438,7 +12437,7 @@
               </a:ln>
               <a:extLst>
                 <a:ext uri="{91240B29-F687-4f45-9708-019B960494DF}">
-                  <a14:hiddenLine xmlns:a14="http://schemas.microsoft.com/office/drawing/2010/main" xmlns="" w="9525">
+                  <a14:hiddenLine xmlns="" xmlns:a14="http://schemas.microsoft.com/office/drawing/2010/main" w="9525">
                     <a:solidFill>
                       <a:srgbClr val="000000"/>
                     </a:solidFill>
@@ -12472,7 +12471,7 @@
               </a:ln>
               <a:extLst>
                 <a:ext uri="{91240B29-F687-4f45-9708-019B960494DF}">
-                  <a14:hiddenLine xmlns:a14="http://schemas.microsoft.com/office/drawing/2010/main" xmlns="" w="9525">
+                  <a14:hiddenLine xmlns="" xmlns:a14="http://schemas.microsoft.com/office/drawing/2010/main" w="9525">
                     <a:solidFill>
                       <a:srgbClr val="000000"/>
                     </a:solidFill>
@@ -12612,7 +12611,7 @@
           <a:p>
             <a:fld id="{EC4347D3-4C9A-C240-8F14-750059DFEEB0}" type="datetimeFigureOut">
               <a:rPr lang="en-US" smtClean="0"/>
-              <a:t>7/14/26</a:t>
+              <a:t>8/31/26</a:t>
             </a:fld>
             <a:endParaRPr lang="en-US"/>
           </a:p>
@@ -15436,3774 +15435,6 @@
             </p:nvSpPr>
             <p:spPr>
               <a:xfrm>
-                <a:off x="785133" y="1600202"/>
-                <a:ext cx="6453909" cy="4525963"/>
-              </a:xfrm>
-            </p:spPr>
-            <p:txBody>
-              <a:bodyPr>
-                <a:normAutofit/>
-              </a:bodyPr>
-              <a:lstStyle/>
-              <a:p>
-                <a14:m>
-                  <m:oMath xmlns:m="http://schemas.openxmlformats.org/officeDocument/2006/math">
-                    <m:sSup>
-                      <m:sSupPr>
-                        <m:ctrlPr>
-                          <a:rPr lang="en-US" b="0" i="1" smtClean="0">
-                            <a:latin typeface="Cambria Math" panose="02040503050406030204" pitchFamily="18" charset="0"/>
-                          </a:rPr>
-                        </m:ctrlPr>
-                      </m:sSupPr>
-                      <m:e>
-                        <m:d>
-                          <m:dPr>
-                            <m:begChr m:val="{"/>
-                            <m:endChr m:val="}"/>
-                            <m:ctrlPr>
-                              <a:rPr lang="en-US" b="0" i="1" smtClean="0">
-                                <a:latin typeface="Cambria Math" panose="02040503050406030204" pitchFamily="18" charset="0"/>
-                              </a:rPr>
-                            </m:ctrlPr>
-                          </m:dPr>
-                          <m:e>
-                            <m:r>
-                              <a:rPr lang="en-US" b="0" i="1" smtClean="0">
-                                <a:latin typeface="Cambria Math"/>
-                              </a:rPr>
-                              <m:t>0,1</m:t>
-                            </m:r>
-                          </m:e>
-                        </m:d>
-                      </m:e>
-                      <m:sup>
-                        <m:r>
-                          <a:rPr lang="en-US" b="0" i="1" smtClean="0">
-                            <a:latin typeface="Cambria Math"/>
-                          </a:rPr>
-                          <m:t>0</m:t>
-                        </m:r>
-                      </m:sup>
-                    </m:sSup>
-                    <m:r>
-                      <a:rPr lang="en-US" b="0" i="1" smtClean="0">
-                        <a:latin typeface="Cambria Math"/>
-                      </a:rPr>
-                      <m:t>=</m:t>
-                    </m:r>
-                    <m:d>
-                      <m:dPr>
-                        <m:begChr m:val="{"/>
-                        <m:endChr m:val="}"/>
-                        <m:ctrlPr>
-                          <a:rPr lang="en-US" b="0" i="1" smtClean="0">
-                            <a:latin typeface="Cambria Math" panose="02040503050406030204" pitchFamily="18" charset="0"/>
-                          </a:rPr>
-                        </m:ctrlPr>
-                      </m:dPr>
-                      <m:e>
-                        <m:r>
-                          <a:rPr lang="en-US" b="0" i="1" smtClean="0">
-                            <a:latin typeface="Cambria Math"/>
-                          </a:rPr>
-                          <m:t>""</m:t>
-                        </m:r>
-                      </m:e>
-                    </m:d>
-                  </m:oMath>
-                </a14:m>
-                <a:endParaRPr lang="en-US" dirty="0"/>
-              </a:p>
-              <a:p>
-                <a:endParaRPr lang="en-US" dirty="0"/>
-              </a:p>
-              <a:p>
-                <a14:m>
-                  <m:oMath xmlns:m="http://schemas.openxmlformats.org/officeDocument/2006/math">
-                    <m:sSup>
-                      <m:sSupPr>
-                        <m:ctrlPr>
-                          <a:rPr lang="en-US" b="0" i="1" smtClean="0">
-                            <a:latin typeface="Cambria Math" panose="02040503050406030204" pitchFamily="18" charset="0"/>
-                          </a:rPr>
-                        </m:ctrlPr>
-                      </m:sSupPr>
-                      <m:e>
-                        <m:d>
-                          <m:dPr>
-                            <m:begChr m:val="{"/>
-                            <m:endChr m:val="}"/>
-                            <m:ctrlPr>
-                              <a:rPr lang="en-US" b="0" i="1" smtClean="0">
-                                <a:latin typeface="Cambria Math" panose="02040503050406030204" pitchFamily="18" charset="0"/>
-                              </a:rPr>
-                            </m:ctrlPr>
-                          </m:dPr>
-                          <m:e>
-                            <m:r>
-                              <a:rPr lang="en-US" b="0" i="1" smtClean="0">
-                                <a:latin typeface="Cambria Math"/>
-                              </a:rPr>
-                              <m:t>0,1</m:t>
-                            </m:r>
-                          </m:e>
-                        </m:d>
-                      </m:e>
-                      <m:sup>
-                        <m:r>
-                          <a:rPr lang="en-US" b="0" i="1" smtClean="0">
-                            <a:latin typeface="Cambria Math"/>
-                          </a:rPr>
-                          <m:t>1</m:t>
-                        </m:r>
-                      </m:sup>
-                    </m:sSup>
-                    <m:r>
-                      <a:rPr lang="en-US" b="0" i="1" smtClean="0">
-                        <a:latin typeface="Cambria Math"/>
-                      </a:rPr>
-                      <m:t>=</m:t>
-                    </m:r>
-                    <m:d>
-                      <m:dPr>
-                        <m:begChr m:val="{"/>
-                        <m:endChr m:val="}"/>
-                        <m:ctrlPr>
-                          <a:rPr lang="en-US" b="0" i="1" smtClean="0">
-                            <a:latin typeface="Cambria Math" panose="02040503050406030204" pitchFamily="18" charset="0"/>
-                          </a:rPr>
-                        </m:ctrlPr>
-                      </m:dPr>
-                      <m:e>
-                        <m:r>
-                          <a:rPr lang="en-US" b="0" i="1" smtClean="0">
-                            <a:latin typeface="Cambria Math"/>
-                          </a:rPr>
-                          <m:t>0,1</m:t>
-                        </m:r>
-                      </m:e>
-                    </m:d>
-                  </m:oMath>
-                </a14:m>
-                <a:endParaRPr lang="en-US" b="0" dirty="0"/>
-              </a:p>
-              <a:p>
-                <a:endParaRPr lang="en-US" dirty="0"/>
-              </a:p>
-              <a:p>
-                <a14:m>
-                  <m:oMath xmlns:m="http://schemas.openxmlformats.org/officeDocument/2006/math">
-                    <m:sSup>
-                      <m:sSupPr>
-                        <m:ctrlPr>
-                          <a:rPr lang="en-US" b="0" i="1" smtClean="0">
-                            <a:latin typeface="Cambria Math" panose="02040503050406030204" pitchFamily="18" charset="0"/>
-                          </a:rPr>
-                        </m:ctrlPr>
-                      </m:sSupPr>
-                      <m:e>
-                        <m:d>
-                          <m:dPr>
-                            <m:begChr m:val="{"/>
-                            <m:endChr m:val="}"/>
-                            <m:ctrlPr>
-                              <a:rPr lang="en-US" b="0" i="1" smtClean="0">
-                                <a:latin typeface="Cambria Math" panose="02040503050406030204" pitchFamily="18" charset="0"/>
-                              </a:rPr>
-                            </m:ctrlPr>
-                          </m:dPr>
-                          <m:e>
-                            <m:r>
-                              <a:rPr lang="en-US" b="0" i="1" smtClean="0">
-                                <a:latin typeface="Cambria Math"/>
-                              </a:rPr>
-                              <m:t>0,1</m:t>
-                            </m:r>
-                          </m:e>
-                        </m:d>
-                      </m:e>
-                      <m:sup>
-                        <m:r>
-                          <a:rPr lang="en-US" b="0" i="1" smtClean="0">
-                            <a:latin typeface="Cambria Math"/>
-                          </a:rPr>
-                          <m:t>2</m:t>
-                        </m:r>
-                      </m:sup>
-                    </m:sSup>
-                    <m:r>
-                      <a:rPr lang="en-US" b="0" i="1" smtClean="0">
-                        <a:latin typeface="Cambria Math"/>
-                      </a:rPr>
-                      <m:t>=</m:t>
-                    </m:r>
-                    <m:d>
-                      <m:dPr>
-                        <m:begChr m:val="{"/>
-                        <m:endChr m:val="}"/>
-                        <m:ctrlPr>
-                          <a:rPr lang="en-US" b="0" i="1" smtClean="0">
-                            <a:latin typeface="Cambria Math" panose="02040503050406030204" pitchFamily="18" charset="0"/>
-                          </a:rPr>
-                        </m:ctrlPr>
-                      </m:dPr>
-                      <m:e>
-                        <m:r>
-                          <a:rPr lang="en-US" b="0" i="1" smtClean="0">
-                            <a:latin typeface="Cambria Math"/>
-                          </a:rPr>
-                          <m:t>00,01,10,11</m:t>
-                        </m:r>
-                      </m:e>
-                    </m:d>
-                  </m:oMath>
-                </a14:m>
-                <a:endParaRPr lang="en-US" b="0" dirty="0"/>
-              </a:p>
-              <a:p>
-                <a:endParaRPr lang="en-US" b="0" dirty="0"/>
-              </a:p>
-              <a:p>
-                <a14:m>
-                  <m:oMath xmlns:m="http://schemas.openxmlformats.org/officeDocument/2006/math">
-                    <m:sSup>
-                      <m:sSupPr>
-                        <m:ctrlPr>
-                          <a:rPr lang="en-US" b="0" i="1" smtClean="0">
-                            <a:latin typeface="Cambria Math" panose="02040503050406030204" pitchFamily="18" charset="0"/>
-                          </a:rPr>
-                        </m:ctrlPr>
-                      </m:sSupPr>
-                      <m:e>
-                        <m:d>
-                          <m:dPr>
-                            <m:begChr m:val="{"/>
-                            <m:endChr m:val="}"/>
-                            <m:ctrlPr>
-                              <a:rPr lang="en-US" b="0" i="1" smtClean="0">
-                                <a:latin typeface="Cambria Math" panose="02040503050406030204" pitchFamily="18" charset="0"/>
-                              </a:rPr>
-                            </m:ctrlPr>
-                          </m:dPr>
-                          <m:e>
-                            <m:r>
-                              <a:rPr lang="en-US" b="0" i="1" smtClean="0">
-                                <a:latin typeface="Cambria Math"/>
-                              </a:rPr>
-                              <m:t>0,1</m:t>
-                            </m:r>
-                          </m:e>
-                        </m:d>
-                      </m:e>
-                      <m:sup>
-                        <m:r>
-                          <a:rPr lang="en-US" b="0" i="1" smtClean="0">
-                            <a:latin typeface="Cambria Math"/>
-                          </a:rPr>
-                          <m:t>3</m:t>
-                        </m:r>
-                      </m:sup>
-                    </m:sSup>
-                    <m:r>
-                      <a:rPr lang="en-US" b="0" i="1" smtClean="0">
-                        <a:latin typeface="Cambria Math"/>
-                      </a:rPr>
-                      <m:t>={000,001,010,011,100,101,110,111}</m:t>
-                    </m:r>
-                  </m:oMath>
-                </a14:m>
-                <a:endParaRPr lang="en-US" dirty="0"/>
-              </a:p>
-            </p:txBody>
-          </p:sp>
-        </mc:Choice>
-        <mc:Fallback xmlns="">
-          <p:sp>
-            <p:nvSpPr>
-              <p:cNvPr id="3" name="Content Placeholder 2"/>
-              <p:cNvSpPr>
-                <a:spLocks noGrp="1" noRot="1" noChangeAspect="1" noMove="1" noResize="1" noEditPoints="1" noAdjustHandles="1" noChangeArrowheads="1" noChangeShapeType="1" noTextEdit="1"/>
-              </p:cNvSpPr>
-              <p:nvPr>
-                <p:ph idx="1"/>
-              </p:nvPr>
-            </p:nvSpPr>
-            <p:spPr>
-              <a:xfrm>
-                <a:off x="785133" y="1600202"/>
-                <a:ext cx="6453909" cy="4525963"/>
-              </a:xfrm>
-              <a:blipFill>
-                <a:blip r:embed="rId2"/>
-                <a:stretch>
-                  <a:fillRect l="-1965" t="-1401"/>
-                </a:stretch>
-              </a:blipFill>
-            </p:spPr>
-            <p:txBody>
-              <a:bodyPr/>
-              <a:lstStyle/>
-              <a:p>
-                <a:r>
-                  <a:rPr lang="en-US">
-                    <a:noFill/>
-                  </a:rPr>
-                  <a:t> </a:t>
-                </a:r>
-              </a:p>
-            </p:txBody>
-          </p:sp>
-        </mc:Fallback>
-      </mc:AlternateContent>
-      <p:sp>
-        <p:nvSpPr>
-          <p:cNvPr id="4" name="Slide Number Placeholder 3"/>
-          <p:cNvSpPr>
-            <a:spLocks noGrp="1"/>
-          </p:cNvSpPr>
-          <p:nvPr>
-            <p:ph type="sldNum" sz="quarter" idx="12"/>
-          </p:nvPr>
-        </p:nvSpPr>
-        <p:spPr>
-          <a:xfrm>
-            <a:off x="10559662" y="5889761"/>
-            <a:ext cx="771089" cy="365125"/>
-          </a:xfrm>
-        </p:spPr>
-        <p:txBody>
-          <a:bodyPr/>
-          <a:lstStyle/>
-          <a:p>
-            <a:fld id="{9BB9F8D7-E2A3-4222-BD86-A63794DF33E7}" type="slidenum">
-              <a:rPr lang="en-US" smtClean="0"/>
-              <a:t>17</a:t>
-            </a:fld>
-            <a:endParaRPr lang="en-US"/>
-          </a:p>
-        </p:txBody>
-      </p:sp>
-      <p:sp>
-        <p:nvSpPr>
-          <p:cNvPr id="5" name="TextBox 4"/>
-          <p:cNvSpPr txBox="1"/>
-          <p:nvPr/>
-        </p:nvSpPr>
-        <p:spPr>
-          <a:xfrm>
-            <a:off x="2316861" y="1249839"/>
-            <a:ext cx="381000" cy="584775"/>
-          </a:xfrm>
-          <a:prstGeom prst="rect">
-            <a:avLst/>
-          </a:prstGeom>
-          <a:noFill/>
-        </p:spPr>
-        <p:txBody>
-          <a:bodyPr wrap="square" rtlCol="0">
-            <a:spAutoFit/>
-          </a:bodyPr>
-          <a:lstStyle/>
-          <a:p>
-            <a:r>
-              <a:rPr lang="en-US" sz="3200" dirty="0">
-                <a:solidFill>
-                  <a:schemeClr val="accent5">
-                    <a:lumMod val="60000"/>
-                    <a:lumOff val="40000"/>
-                  </a:schemeClr>
-                </a:solidFill>
-              </a:rPr>
-              <a:t>0</a:t>
-            </a:r>
-          </a:p>
-        </p:txBody>
-      </p:sp>
-      <p:sp>
-        <p:nvSpPr>
-          <p:cNvPr id="6" name="TextBox 5"/>
-          <p:cNvSpPr txBox="1"/>
-          <p:nvPr/>
-        </p:nvSpPr>
-        <p:spPr>
-          <a:xfrm>
-            <a:off x="2277449" y="2407633"/>
-            <a:ext cx="381000" cy="584775"/>
-          </a:xfrm>
-          <a:prstGeom prst="rect">
-            <a:avLst/>
-          </a:prstGeom>
-          <a:noFill/>
-        </p:spPr>
-        <p:txBody>
-          <a:bodyPr wrap="square" rtlCol="0">
-            <a:spAutoFit/>
-          </a:bodyPr>
-          <a:lstStyle/>
-          <a:p>
-            <a:r>
-              <a:rPr lang="en-US" sz="3200" dirty="0">
-                <a:solidFill>
-                  <a:schemeClr val="accent5">
-                    <a:lumMod val="60000"/>
-                    <a:lumOff val="40000"/>
-                  </a:schemeClr>
-                </a:solidFill>
-              </a:rPr>
-              <a:t>1</a:t>
-            </a:r>
-          </a:p>
-        </p:txBody>
-      </p:sp>
-      <p:sp>
-        <p:nvSpPr>
-          <p:cNvPr id="7" name="TextBox 6"/>
-          <p:cNvSpPr txBox="1"/>
-          <p:nvPr/>
-        </p:nvSpPr>
-        <p:spPr>
-          <a:xfrm>
-            <a:off x="2501652" y="2407633"/>
-            <a:ext cx="381000" cy="584775"/>
-          </a:xfrm>
-          <a:prstGeom prst="rect">
-            <a:avLst/>
-          </a:prstGeom>
-          <a:noFill/>
-        </p:spPr>
-        <p:txBody>
-          <a:bodyPr wrap="square" rtlCol="0">
-            <a:spAutoFit/>
-          </a:bodyPr>
-          <a:lstStyle/>
-          <a:p>
-            <a:r>
-              <a:rPr lang="en-US" sz="3200" dirty="0">
-                <a:solidFill>
-                  <a:schemeClr val="accent5">
-                    <a:lumMod val="60000"/>
-                    <a:lumOff val="40000"/>
-                  </a:schemeClr>
-                </a:solidFill>
-              </a:rPr>
-              <a:t>2</a:t>
-            </a:r>
-          </a:p>
-        </p:txBody>
-      </p:sp>
-      <p:sp>
-        <p:nvSpPr>
-          <p:cNvPr id="8" name="TextBox 7"/>
-          <p:cNvSpPr txBox="1"/>
-          <p:nvPr/>
-        </p:nvSpPr>
-        <p:spPr>
-          <a:xfrm>
-            <a:off x="2366082" y="3529212"/>
-            <a:ext cx="381000" cy="584775"/>
-          </a:xfrm>
-          <a:prstGeom prst="rect">
-            <a:avLst/>
-          </a:prstGeom>
-          <a:noFill/>
-        </p:spPr>
-        <p:txBody>
-          <a:bodyPr wrap="square" rtlCol="0">
-            <a:spAutoFit/>
-          </a:bodyPr>
-          <a:lstStyle/>
-          <a:p>
-            <a:r>
-              <a:rPr lang="en-US" sz="3200" dirty="0">
-                <a:solidFill>
-                  <a:schemeClr val="accent5">
-                    <a:lumMod val="60000"/>
-                    <a:lumOff val="40000"/>
-                  </a:schemeClr>
-                </a:solidFill>
-              </a:rPr>
-              <a:t>3</a:t>
-            </a:r>
-          </a:p>
-        </p:txBody>
-      </p:sp>
-      <p:sp>
-        <p:nvSpPr>
-          <p:cNvPr id="9" name="TextBox 8"/>
-          <p:cNvSpPr txBox="1"/>
-          <p:nvPr/>
-        </p:nvSpPr>
-        <p:spPr>
-          <a:xfrm>
-            <a:off x="2735526" y="3529212"/>
-            <a:ext cx="381000" cy="584775"/>
-          </a:xfrm>
-          <a:prstGeom prst="rect">
-            <a:avLst/>
-          </a:prstGeom>
-          <a:noFill/>
-        </p:spPr>
-        <p:txBody>
-          <a:bodyPr wrap="square" rtlCol="0">
-            <a:spAutoFit/>
-          </a:bodyPr>
-          <a:lstStyle/>
-          <a:p>
-            <a:r>
-              <a:rPr lang="en-US" sz="3200" dirty="0">
-                <a:solidFill>
-                  <a:schemeClr val="accent5">
-                    <a:lumMod val="60000"/>
-                    <a:lumOff val="40000"/>
-                  </a:schemeClr>
-                </a:solidFill>
-              </a:rPr>
-              <a:t>4</a:t>
-            </a:r>
-          </a:p>
-        </p:txBody>
-      </p:sp>
-      <p:sp>
-        <p:nvSpPr>
-          <p:cNvPr id="10" name="TextBox 9"/>
-          <p:cNvSpPr txBox="1"/>
-          <p:nvPr/>
-        </p:nvSpPr>
-        <p:spPr>
-          <a:xfrm>
-            <a:off x="3146670" y="3529211"/>
-            <a:ext cx="381000" cy="584775"/>
-          </a:xfrm>
-          <a:prstGeom prst="rect">
-            <a:avLst/>
-          </a:prstGeom>
-          <a:noFill/>
-        </p:spPr>
-        <p:txBody>
-          <a:bodyPr wrap="square" rtlCol="0">
-            <a:spAutoFit/>
-          </a:bodyPr>
-          <a:lstStyle/>
-          <a:p>
-            <a:r>
-              <a:rPr lang="en-US" sz="3200" dirty="0">
-                <a:solidFill>
-                  <a:schemeClr val="accent5">
-                    <a:lumMod val="60000"/>
-                    <a:lumOff val="40000"/>
-                  </a:schemeClr>
-                </a:solidFill>
-              </a:rPr>
-              <a:t>5</a:t>
-            </a:r>
-          </a:p>
-        </p:txBody>
-      </p:sp>
-      <p:sp>
-        <p:nvSpPr>
-          <p:cNvPr id="11" name="TextBox 10"/>
-          <p:cNvSpPr txBox="1"/>
-          <p:nvPr/>
-        </p:nvSpPr>
-        <p:spPr>
-          <a:xfrm>
-            <a:off x="3551816" y="3529212"/>
-            <a:ext cx="381000" cy="584775"/>
-          </a:xfrm>
-          <a:prstGeom prst="rect">
-            <a:avLst/>
-          </a:prstGeom>
-          <a:noFill/>
-        </p:spPr>
-        <p:txBody>
-          <a:bodyPr wrap="square" rtlCol="0">
-            <a:spAutoFit/>
-          </a:bodyPr>
-          <a:lstStyle/>
-          <a:p>
-            <a:r>
-              <a:rPr lang="en-US" sz="3200" dirty="0">
-                <a:solidFill>
-                  <a:schemeClr val="accent5">
-                    <a:lumMod val="60000"/>
-                    <a:lumOff val="40000"/>
-                  </a:schemeClr>
-                </a:solidFill>
-              </a:rPr>
-              <a:t>6</a:t>
-            </a:r>
-          </a:p>
-        </p:txBody>
-      </p:sp>
-      <p:sp>
-        <p:nvSpPr>
-          <p:cNvPr id="12" name="TextBox 11"/>
-          <p:cNvSpPr txBox="1"/>
-          <p:nvPr/>
-        </p:nvSpPr>
-        <p:spPr>
-          <a:xfrm>
-            <a:off x="2448020" y="4635374"/>
-            <a:ext cx="381000" cy="584775"/>
-          </a:xfrm>
-          <a:prstGeom prst="rect">
-            <a:avLst/>
-          </a:prstGeom>
-          <a:noFill/>
-        </p:spPr>
-        <p:txBody>
-          <a:bodyPr wrap="square" rtlCol="0">
-            <a:spAutoFit/>
-          </a:bodyPr>
-          <a:lstStyle/>
-          <a:p>
-            <a:r>
-              <a:rPr lang="en-US" sz="3200" dirty="0">
-                <a:solidFill>
-                  <a:schemeClr val="accent5">
-                    <a:lumMod val="60000"/>
-                    <a:lumOff val="40000"/>
-                  </a:schemeClr>
-                </a:solidFill>
-              </a:rPr>
-              <a:t>7</a:t>
-            </a:r>
-          </a:p>
-        </p:txBody>
-      </p:sp>
-      <p:sp>
-        <p:nvSpPr>
-          <p:cNvPr id="13" name="TextBox 12"/>
-          <p:cNvSpPr txBox="1"/>
-          <p:nvPr/>
-        </p:nvSpPr>
-        <p:spPr>
-          <a:xfrm>
-            <a:off x="3016290" y="4637229"/>
-            <a:ext cx="381000" cy="584775"/>
-          </a:xfrm>
-          <a:prstGeom prst="rect">
-            <a:avLst/>
-          </a:prstGeom>
-          <a:noFill/>
-        </p:spPr>
-        <p:txBody>
-          <a:bodyPr wrap="square" rtlCol="0">
-            <a:spAutoFit/>
-          </a:bodyPr>
-          <a:lstStyle/>
-          <a:p>
-            <a:r>
-              <a:rPr lang="en-US" sz="3200" dirty="0">
-                <a:solidFill>
-                  <a:schemeClr val="accent5">
-                    <a:lumMod val="60000"/>
-                    <a:lumOff val="40000"/>
-                  </a:schemeClr>
-                </a:solidFill>
-              </a:rPr>
-              <a:t>8</a:t>
-            </a:r>
-          </a:p>
-        </p:txBody>
-      </p:sp>
-      <p:sp>
-        <p:nvSpPr>
-          <p:cNvPr id="14" name="TextBox 13"/>
-          <p:cNvSpPr txBox="1"/>
-          <p:nvPr/>
-        </p:nvSpPr>
-        <p:spPr>
-          <a:xfrm>
-            <a:off x="3566155" y="4631045"/>
-            <a:ext cx="381000" cy="584775"/>
-          </a:xfrm>
-          <a:prstGeom prst="rect">
-            <a:avLst/>
-          </a:prstGeom>
-          <a:noFill/>
-        </p:spPr>
-        <p:txBody>
-          <a:bodyPr wrap="square" rtlCol="0">
-            <a:spAutoFit/>
-          </a:bodyPr>
-          <a:lstStyle/>
-          <a:p>
-            <a:r>
-              <a:rPr lang="en-US" sz="3200">
-                <a:solidFill>
-                  <a:schemeClr val="accent5">
-                    <a:lumMod val="60000"/>
-                    <a:lumOff val="40000"/>
-                  </a:schemeClr>
-                </a:solidFill>
-              </a:rPr>
-              <a:t>9</a:t>
-            </a:r>
-          </a:p>
-        </p:txBody>
-      </p:sp>
-      <p:sp>
-        <p:nvSpPr>
-          <p:cNvPr id="15" name="TextBox 14"/>
-          <p:cNvSpPr txBox="1"/>
-          <p:nvPr/>
-        </p:nvSpPr>
-        <p:spPr>
-          <a:xfrm>
-            <a:off x="3977436" y="4610749"/>
-            <a:ext cx="685800" cy="584775"/>
-          </a:xfrm>
-          <a:prstGeom prst="rect">
-            <a:avLst/>
-          </a:prstGeom>
-          <a:noFill/>
-        </p:spPr>
-        <p:txBody>
-          <a:bodyPr wrap="square" rtlCol="0">
-            <a:spAutoFit/>
-          </a:bodyPr>
-          <a:lstStyle/>
-          <a:p>
-            <a:r>
-              <a:rPr lang="en-US" sz="3200" dirty="0">
-                <a:solidFill>
-                  <a:schemeClr val="accent5">
-                    <a:lumMod val="60000"/>
-                    <a:lumOff val="40000"/>
-                  </a:schemeClr>
-                </a:solidFill>
-              </a:rPr>
-              <a:t>10</a:t>
-            </a:r>
-          </a:p>
-        </p:txBody>
-      </p:sp>
-      <p:sp>
-        <p:nvSpPr>
-          <p:cNvPr id="16" name="TextBox 15"/>
-          <p:cNvSpPr txBox="1"/>
-          <p:nvPr/>
-        </p:nvSpPr>
-        <p:spPr>
-          <a:xfrm>
-            <a:off x="4560630" y="4610748"/>
-            <a:ext cx="685800" cy="584775"/>
-          </a:xfrm>
-          <a:prstGeom prst="rect">
-            <a:avLst/>
-          </a:prstGeom>
-          <a:noFill/>
-        </p:spPr>
-        <p:txBody>
-          <a:bodyPr wrap="square" rtlCol="0">
-            <a:spAutoFit/>
-          </a:bodyPr>
-          <a:lstStyle/>
-          <a:p>
-            <a:r>
-              <a:rPr lang="en-US" sz="3200" dirty="0">
-                <a:solidFill>
-                  <a:schemeClr val="accent5">
-                    <a:lumMod val="60000"/>
-                    <a:lumOff val="40000"/>
-                  </a:schemeClr>
-                </a:solidFill>
-              </a:rPr>
-              <a:t>11</a:t>
-            </a:r>
-          </a:p>
-        </p:txBody>
-      </p:sp>
-      <p:sp>
-        <p:nvSpPr>
-          <p:cNvPr id="17" name="TextBox 16"/>
-          <p:cNvSpPr txBox="1"/>
-          <p:nvPr/>
-        </p:nvSpPr>
-        <p:spPr>
-          <a:xfrm>
-            <a:off x="5150746" y="4610747"/>
-            <a:ext cx="685800" cy="584775"/>
-          </a:xfrm>
-          <a:prstGeom prst="rect">
-            <a:avLst/>
-          </a:prstGeom>
-          <a:noFill/>
-        </p:spPr>
-        <p:txBody>
-          <a:bodyPr wrap="square" rtlCol="0">
-            <a:spAutoFit/>
-          </a:bodyPr>
-          <a:lstStyle/>
-          <a:p>
-            <a:r>
-              <a:rPr lang="en-US" sz="3200" dirty="0">
-                <a:solidFill>
-                  <a:schemeClr val="accent5">
-                    <a:lumMod val="60000"/>
-                    <a:lumOff val="40000"/>
-                  </a:schemeClr>
-                </a:solidFill>
-              </a:rPr>
-              <a:t>12</a:t>
-            </a:r>
-          </a:p>
-        </p:txBody>
-      </p:sp>
-      <p:sp>
-        <p:nvSpPr>
-          <p:cNvPr id="18" name="TextBox 17"/>
-          <p:cNvSpPr txBox="1"/>
-          <p:nvPr/>
-        </p:nvSpPr>
-        <p:spPr>
-          <a:xfrm>
-            <a:off x="5708291" y="4610746"/>
-            <a:ext cx="685800" cy="584775"/>
-          </a:xfrm>
-          <a:prstGeom prst="rect">
-            <a:avLst/>
-          </a:prstGeom>
-          <a:noFill/>
-        </p:spPr>
-        <p:txBody>
-          <a:bodyPr wrap="square" rtlCol="0">
-            <a:spAutoFit/>
-          </a:bodyPr>
-          <a:lstStyle/>
-          <a:p>
-            <a:r>
-              <a:rPr lang="en-US" sz="3200">
-                <a:solidFill>
-                  <a:schemeClr val="accent5">
-                    <a:lumMod val="60000"/>
-                    <a:lumOff val="40000"/>
-                  </a:schemeClr>
-                </a:solidFill>
-              </a:rPr>
-              <a:t>13</a:t>
-            </a:r>
-          </a:p>
-        </p:txBody>
-      </p:sp>
-      <p:sp>
-        <p:nvSpPr>
-          <p:cNvPr id="19" name="TextBox 18"/>
-          <p:cNvSpPr txBox="1"/>
-          <p:nvPr/>
-        </p:nvSpPr>
-        <p:spPr>
-          <a:xfrm>
-            <a:off x="6274891" y="4603886"/>
-            <a:ext cx="685800" cy="584775"/>
-          </a:xfrm>
-          <a:prstGeom prst="rect">
-            <a:avLst/>
-          </a:prstGeom>
-          <a:noFill/>
-        </p:spPr>
-        <p:txBody>
-          <a:bodyPr wrap="square" rtlCol="0">
-            <a:spAutoFit/>
-          </a:bodyPr>
-          <a:lstStyle/>
-          <a:p>
-            <a:r>
-              <a:rPr lang="en-US" sz="3200" dirty="0">
-                <a:solidFill>
-                  <a:schemeClr val="accent5">
-                    <a:lumMod val="60000"/>
-                    <a:lumOff val="40000"/>
-                  </a:schemeClr>
-                </a:solidFill>
-              </a:rPr>
-              <a:t>14</a:t>
-            </a:r>
-          </a:p>
-        </p:txBody>
-      </p:sp>
-      <p:grpSp>
-        <p:nvGrpSpPr>
-          <p:cNvPr id="92" name="Group 91">
-            <a:extLst>
-              <a:ext uri="{FF2B5EF4-FFF2-40B4-BE49-F238E27FC236}">
-                <a16:creationId xmlns:a16="http://schemas.microsoft.com/office/drawing/2014/main" id="{F3E69217-8FDE-E845-9271-94E44C4B0F9D}"/>
-              </a:ext>
-            </a:extLst>
-          </p:cNvPr>
-          <p:cNvGrpSpPr/>
-          <p:nvPr/>
-        </p:nvGrpSpPr>
-        <p:grpSpPr>
-          <a:xfrm>
-            <a:off x="5238750" y="1040575"/>
-            <a:ext cx="6686549" cy="3427963"/>
-            <a:chOff x="5238750" y="1040575"/>
-            <a:chExt cx="6686549" cy="3427963"/>
-          </a:xfrm>
-        </p:grpSpPr>
-        <p:sp>
-          <p:nvSpPr>
-            <p:cNvPr id="22" name="Rectangle 21">
-              <a:extLst>
-                <a:ext uri="{FF2B5EF4-FFF2-40B4-BE49-F238E27FC236}">
-                  <a16:creationId xmlns:a16="http://schemas.microsoft.com/office/drawing/2014/main" id="{1056EF2C-D309-0743-A429-46AEE55E0F9C}"/>
-                </a:ext>
-              </a:extLst>
-            </p:cNvPr>
-            <p:cNvSpPr/>
-            <p:nvPr/>
-          </p:nvSpPr>
-          <p:spPr>
-            <a:xfrm>
-              <a:off x="5238750" y="1040575"/>
-              <a:ext cx="6686549" cy="3417125"/>
-            </a:xfrm>
-            <a:prstGeom prst="rect">
-              <a:avLst/>
-            </a:prstGeom>
-            <a:solidFill>
-              <a:schemeClr val="tx1">
-                <a:lumMod val="95000"/>
-              </a:schemeClr>
-            </a:solidFill>
-          </p:spPr>
-          <p:style>
-            <a:lnRef idx="2">
-              <a:schemeClr val="accent1">
-                <a:shade val="50000"/>
-              </a:schemeClr>
-            </a:lnRef>
-            <a:fillRef idx="1">
-              <a:schemeClr val="accent1"/>
-            </a:fillRef>
-            <a:effectRef idx="0">
-              <a:schemeClr val="accent1"/>
-            </a:effectRef>
-            <a:fontRef idx="minor">
-              <a:schemeClr val="lt1"/>
-            </a:fontRef>
-          </p:style>
-          <p:txBody>
-            <a:bodyPr rtlCol="0" anchor="ctr"/>
-            <a:lstStyle/>
-            <a:p>
-              <a:pPr algn="ctr"/>
-              <a:endParaRPr lang="en-US" dirty="0">
-                <a:solidFill>
-                  <a:sysClr val="windowText" lastClr="000000"/>
-                </a:solidFill>
-              </a:endParaRPr>
-            </a:p>
-          </p:txBody>
-        </p:sp>
-        <p:sp>
-          <p:nvSpPr>
-            <p:cNvPr id="20" name="Rectangle 19">
-              <a:extLst>
-                <a:ext uri="{FF2B5EF4-FFF2-40B4-BE49-F238E27FC236}">
-                  <a16:creationId xmlns:a16="http://schemas.microsoft.com/office/drawing/2014/main" id="{C7E8294C-F7CA-154F-80AE-2CFCB918578E}"/>
-                </a:ext>
-              </a:extLst>
-            </p:cNvPr>
-            <p:cNvSpPr/>
-            <p:nvPr/>
-          </p:nvSpPr>
-          <p:spPr>
-            <a:xfrm>
-              <a:off x="7886700" y="1209675"/>
-              <a:ext cx="933450" cy="514939"/>
-            </a:xfrm>
-            <a:prstGeom prst="rect">
-              <a:avLst/>
-            </a:prstGeom>
-          </p:spPr>
-          <p:style>
-            <a:lnRef idx="2">
-              <a:schemeClr val="accent1">
-                <a:shade val="50000"/>
-              </a:schemeClr>
-            </a:lnRef>
-            <a:fillRef idx="1">
-              <a:schemeClr val="accent1"/>
-            </a:fillRef>
-            <a:effectRef idx="0">
-              <a:schemeClr val="accent1"/>
-            </a:effectRef>
-            <a:fontRef idx="minor">
-              <a:schemeClr val="lt1"/>
-            </a:fontRef>
-          </p:style>
-          <p:txBody>
-            <a:bodyPr rtlCol="0" anchor="ctr"/>
-            <a:lstStyle/>
-            <a:p>
-              <a:pPr algn="ctr"/>
-              <a:r>
-                <a:rPr lang="en-US" dirty="0">
-                  <a:solidFill>
-                    <a:sysClr val="windowText" lastClr="000000"/>
-                  </a:solidFill>
-                </a:rPr>
-                <a:t>“”</a:t>
-              </a:r>
-            </a:p>
-          </p:txBody>
-        </p:sp>
-        <p:sp>
-          <p:nvSpPr>
-            <p:cNvPr id="23" name="Rectangle 22">
-              <a:extLst>
-                <a:ext uri="{FF2B5EF4-FFF2-40B4-BE49-F238E27FC236}">
-                  <a16:creationId xmlns:a16="http://schemas.microsoft.com/office/drawing/2014/main" id="{D8A98082-FA3C-C041-9496-FF59D04E1C88}"/>
-                </a:ext>
-              </a:extLst>
-            </p:cNvPr>
-            <p:cNvSpPr/>
-            <p:nvPr/>
-          </p:nvSpPr>
-          <p:spPr>
-            <a:xfrm>
-              <a:off x="6473793" y="1982378"/>
-              <a:ext cx="933450" cy="514939"/>
-            </a:xfrm>
-            <a:prstGeom prst="rect">
-              <a:avLst/>
-            </a:prstGeom>
-          </p:spPr>
-          <p:style>
-            <a:lnRef idx="2">
-              <a:schemeClr val="accent1">
-                <a:shade val="50000"/>
-              </a:schemeClr>
-            </a:lnRef>
-            <a:fillRef idx="1">
-              <a:schemeClr val="accent1"/>
-            </a:fillRef>
-            <a:effectRef idx="0">
-              <a:schemeClr val="accent1"/>
-            </a:effectRef>
-            <a:fontRef idx="minor">
-              <a:schemeClr val="lt1"/>
-            </a:fontRef>
-          </p:style>
-          <p:txBody>
-            <a:bodyPr rtlCol="0" anchor="ctr"/>
-            <a:lstStyle/>
-            <a:p>
-              <a:pPr algn="ctr"/>
-              <a:r>
-                <a:rPr lang="en-US" dirty="0">
-                  <a:solidFill>
-                    <a:sysClr val="windowText" lastClr="000000"/>
-                  </a:solidFill>
-                </a:rPr>
-                <a:t>0</a:t>
-              </a:r>
-            </a:p>
-          </p:txBody>
-        </p:sp>
-        <p:sp>
-          <p:nvSpPr>
-            <p:cNvPr id="24" name="Rectangle 23">
-              <a:extLst>
-                <a:ext uri="{FF2B5EF4-FFF2-40B4-BE49-F238E27FC236}">
-                  <a16:creationId xmlns:a16="http://schemas.microsoft.com/office/drawing/2014/main" id="{C89B5DA0-B55F-EE40-A87E-51934CA01FDF}"/>
-                </a:ext>
-              </a:extLst>
-            </p:cNvPr>
-            <p:cNvSpPr/>
-            <p:nvPr/>
-          </p:nvSpPr>
-          <p:spPr>
-            <a:xfrm>
-              <a:off x="9524254" y="1982378"/>
-              <a:ext cx="933450" cy="514939"/>
-            </a:xfrm>
-            <a:prstGeom prst="rect">
-              <a:avLst/>
-            </a:prstGeom>
-          </p:spPr>
-          <p:style>
-            <a:lnRef idx="2">
-              <a:schemeClr val="accent1">
-                <a:shade val="50000"/>
-              </a:schemeClr>
-            </a:lnRef>
-            <a:fillRef idx="1">
-              <a:schemeClr val="accent1"/>
-            </a:fillRef>
-            <a:effectRef idx="0">
-              <a:schemeClr val="accent1"/>
-            </a:effectRef>
-            <a:fontRef idx="minor">
-              <a:schemeClr val="lt1"/>
-            </a:fontRef>
-          </p:style>
-          <p:txBody>
-            <a:bodyPr rtlCol="0" anchor="ctr"/>
-            <a:lstStyle/>
-            <a:p>
-              <a:pPr algn="ctr"/>
-              <a:r>
-                <a:rPr lang="en-US" dirty="0">
-                  <a:solidFill>
-                    <a:sysClr val="windowText" lastClr="000000"/>
-                  </a:solidFill>
-                </a:rPr>
-                <a:t>1</a:t>
-              </a:r>
-            </a:p>
-          </p:txBody>
-        </p:sp>
-        <p:sp>
-          <p:nvSpPr>
-            <p:cNvPr id="25" name="Rectangle 24">
-              <a:extLst>
-                <a:ext uri="{FF2B5EF4-FFF2-40B4-BE49-F238E27FC236}">
-                  <a16:creationId xmlns:a16="http://schemas.microsoft.com/office/drawing/2014/main" id="{3721E0A8-0DA2-BB4A-872C-E5BC6919D2D9}"/>
-                </a:ext>
-              </a:extLst>
-            </p:cNvPr>
-            <p:cNvSpPr/>
-            <p:nvPr/>
-          </p:nvSpPr>
-          <p:spPr>
-            <a:xfrm>
-              <a:off x="5711793" y="2834811"/>
-              <a:ext cx="933450" cy="514939"/>
-            </a:xfrm>
-            <a:prstGeom prst="rect">
-              <a:avLst/>
-            </a:prstGeom>
-          </p:spPr>
-          <p:style>
-            <a:lnRef idx="2">
-              <a:schemeClr val="accent1">
-                <a:shade val="50000"/>
-              </a:schemeClr>
-            </a:lnRef>
-            <a:fillRef idx="1">
-              <a:schemeClr val="accent1"/>
-            </a:fillRef>
-            <a:effectRef idx="0">
-              <a:schemeClr val="accent1"/>
-            </a:effectRef>
-            <a:fontRef idx="minor">
-              <a:schemeClr val="lt1"/>
-            </a:fontRef>
-          </p:style>
-          <p:txBody>
-            <a:bodyPr rtlCol="0" anchor="ctr"/>
-            <a:lstStyle/>
-            <a:p>
-              <a:pPr algn="ctr"/>
-              <a:r>
-                <a:rPr lang="en-US" dirty="0">
-                  <a:solidFill>
-                    <a:sysClr val="windowText" lastClr="000000"/>
-                  </a:solidFill>
-                </a:rPr>
-                <a:t>00</a:t>
-              </a:r>
-            </a:p>
-          </p:txBody>
-        </p:sp>
-        <p:sp>
-          <p:nvSpPr>
-            <p:cNvPr id="26" name="Rectangle 25">
-              <a:extLst>
-                <a:ext uri="{FF2B5EF4-FFF2-40B4-BE49-F238E27FC236}">
-                  <a16:creationId xmlns:a16="http://schemas.microsoft.com/office/drawing/2014/main" id="{B56BB038-633F-7441-BBC0-CCA03C8C7DBE}"/>
-                </a:ext>
-              </a:extLst>
-            </p:cNvPr>
-            <p:cNvSpPr/>
-            <p:nvPr/>
-          </p:nvSpPr>
-          <p:spPr>
-            <a:xfrm>
-              <a:off x="7130230" y="2834810"/>
-              <a:ext cx="933450" cy="514939"/>
-            </a:xfrm>
-            <a:prstGeom prst="rect">
-              <a:avLst/>
-            </a:prstGeom>
-          </p:spPr>
-          <p:style>
-            <a:lnRef idx="2">
-              <a:schemeClr val="accent1">
-                <a:shade val="50000"/>
-              </a:schemeClr>
-            </a:lnRef>
-            <a:fillRef idx="1">
-              <a:schemeClr val="accent1"/>
-            </a:fillRef>
-            <a:effectRef idx="0">
-              <a:schemeClr val="accent1"/>
-            </a:effectRef>
-            <a:fontRef idx="minor">
-              <a:schemeClr val="lt1"/>
-            </a:fontRef>
-          </p:style>
-          <p:txBody>
-            <a:bodyPr rtlCol="0" anchor="ctr"/>
-            <a:lstStyle/>
-            <a:p>
-              <a:pPr algn="ctr"/>
-              <a:r>
-                <a:rPr lang="en-US" dirty="0">
-                  <a:solidFill>
-                    <a:sysClr val="windowText" lastClr="000000"/>
-                  </a:solidFill>
-                </a:rPr>
-                <a:t>01</a:t>
-              </a:r>
-            </a:p>
-          </p:txBody>
-        </p:sp>
-        <p:sp>
-          <p:nvSpPr>
-            <p:cNvPr id="27" name="Rectangle 26">
-              <a:extLst>
-                <a:ext uri="{FF2B5EF4-FFF2-40B4-BE49-F238E27FC236}">
-                  <a16:creationId xmlns:a16="http://schemas.microsoft.com/office/drawing/2014/main" id="{2BEBCCE4-7A5B-CC4D-9F7E-7EE4390E415D}"/>
-                </a:ext>
-              </a:extLst>
-            </p:cNvPr>
-            <p:cNvSpPr/>
-            <p:nvPr/>
-          </p:nvSpPr>
-          <p:spPr>
-            <a:xfrm>
-              <a:off x="9104715" y="2834809"/>
-              <a:ext cx="933450" cy="514939"/>
-            </a:xfrm>
-            <a:prstGeom prst="rect">
-              <a:avLst/>
-            </a:prstGeom>
-          </p:spPr>
-          <p:style>
-            <a:lnRef idx="2">
-              <a:schemeClr val="accent1">
-                <a:shade val="50000"/>
-              </a:schemeClr>
-            </a:lnRef>
-            <a:fillRef idx="1">
-              <a:schemeClr val="accent1"/>
-            </a:fillRef>
-            <a:effectRef idx="0">
-              <a:schemeClr val="accent1"/>
-            </a:effectRef>
-            <a:fontRef idx="minor">
-              <a:schemeClr val="lt1"/>
-            </a:fontRef>
-          </p:style>
-          <p:txBody>
-            <a:bodyPr rtlCol="0" anchor="ctr"/>
-            <a:lstStyle/>
-            <a:p>
-              <a:pPr algn="ctr"/>
-              <a:r>
-                <a:rPr lang="en-US" dirty="0">
-                  <a:solidFill>
-                    <a:sysClr val="windowText" lastClr="000000"/>
-                  </a:solidFill>
-                </a:rPr>
-                <a:t>10</a:t>
-              </a:r>
-            </a:p>
-          </p:txBody>
-        </p:sp>
-        <p:sp>
-          <p:nvSpPr>
-            <p:cNvPr id="28" name="Rectangle 27">
-              <a:extLst>
-                <a:ext uri="{FF2B5EF4-FFF2-40B4-BE49-F238E27FC236}">
-                  <a16:creationId xmlns:a16="http://schemas.microsoft.com/office/drawing/2014/main" id="{BFD75277-CE77-9149-A686-F06DE9C91D86}"/>
-                </a:ext>
-              </a:extLst>
-            </p:cNvPr>
-            <p:cNvSpPr/>
-            <p:nvPr/>
-          </p:nvSpPr>
-          <p:spPr>
-            <a:xfrm>
-              <a:off x="10324507" y="2834809"/>
-              <a:ext cx="933450" cy="514939"/>
-            </a:xfrm>
-            <a:prstGeom prst="rect">
-              <a:avLst/>
-            </a:prstGeom>
-          </p:spPr>
-          <p:style>
-            <a:lnRef idx="2">
-              <a:schemeClr val="accent1">
-                <a:shade val="50000"/>
-              </a:schemeClr>
-            </a:lnRef>
-            <a:fillRef idx="1">
-              <a:schemeClr val="accent1"/>
-            </a:fillRef>
-            <a:effectRef idx="0">
-              <a:schemeClr val="accent1"/>
-            </a:effectRef>
-            <a:fontRef idx="minor">
-              <a:schemeClr val="lt1"/>
-            </a:fontRef>
-          </p:style>
-          <p:txBody>
-            <a:bodyPr rtlCol="0" anchor="ctr"/>
-            <a:lstStyle/>
-            <a:p>
-              <a:pPr algn="ctr"/>
-              <a:r>
-                <a:rPr lang="en-US" dirty="0">
-                  <a:solidFill>
-                    <a:sysClr val="windowText" lastClr="000000"/>
-                  </a:solidFill>
-                </a:rPr>
-                <a:t>11</a:t>
-              </a:r>
-            </a:p>
-          </p:txBody>
-        </p:sp>
-        <p:sp>
-          <p:nvSpPr>
-            <p:cNvPr id="29" name="Rectangle 28">
-              <a:extLst>
-                <a:ext uri="{FF2B5EF4-FFF2-40B4-BE49-F238E27FC236}">
-                  <a16:creationId xmlns:a16="http://schemas.microsoft.com/office/drawing/2014/main" id="{EBF4B1CE-D158-2F4C-B554-57C739B907E0}"/>
-                </a:ext>
-              </a:extLst>
-            </p:cNvPr>
-            <p:cNvSpPr/>
-            <p:nvPr/>
-          </p:nvSpPr>
-          <p:spPr>
-            <a:xfrm>
-              <a:off x="5492718" y="3568988"/>
-              <a:ext cx="647700" cy="514939"/>
-            </a:xfrm>
-            <a:prstGeom prst="rect">
-              <a:avLst/>
-            </a:prstGeom>
-          </p:spPr>
-          <p:style>
-            <a:lnRef idx="2">
-              <a:schemeClr val="accent1">
-                <a:shade val="50000"/>
-              </a:schemeClr>
-            </a:lnRef>
-            <a:fillRef idx="1">
-              <a:schemeClr val="accent1"/>
-            </a:fillRef>
-            <a:effectRef idx="0">
-              <a:schemeClr val="accent1"/>
-            </a:effectRef>
-            <a:fontRef idx="minor">
-              <a:schemeClr val="lt1"/>
-            </a:fontRef>
-          </p:style>
-          <p:txBody>
-            <a:bodyPr rtlCol="0" anchor="ctr"/>
-            <a:lstStyle/>
-            <a:p>
-              <a:pPr algn="ctr"/>
-              <a:r>
-                <a:rPr lang="en-US" dirty="0">
-                  <a:solidFill>
-                    <a:sysClr val="windowText" lastClr="000000"/>
-                  </a:solidFill>
-                </a:rPr>
-                <a:t>000</a:t>
-              </a:r>
-            </a:p>
-          </p:txBody>
-        </p:sp>
-        <p:sp>
-          <p:nvSpPr>
-            <p:cNvPr id="30" name="Rectangle 29">
-              <a:extLst>
-                <a:ext uri="{FF2B5EF4-FFF2-40B4-BE49-F238E27FC236}">
-                  <a16:creationId xmlns:a16="http://schemas.microsoft.com/office/drawing/2014/main" id="{314E7369-25CE-974F-A063-B7735FD4DDB4}"/>
-                </a:ext>
-              </a:extLst>
-            </p:cNvPr>
-            <p:cNvSpPr/>
-            <p:nvPr/>
-          </p:nvSpPr>
-          <p:spPr>
-            <a:xfrm>
-              <a:off x="6200817" y="3568988"/>
-              <a:ext cx="647700" cy="514939"/>
-            </a:xfrm>
-            <a:prstGeom prst="rect">
-              <a:avLst/>
-            </a:prstGeom>
-          </p:spPr>
-          <p:style>
-            <a:lnRef idx="2">
-              <a:schemeClr val="accent1">
-                <a:shade val="50000"/>
-              </a:schemeClr>
-            </a:lnRef>
-            <a:fillRef idx="1">
-              <a:schemeClr val="accent1"/>
-            </a:fillRef>
-            <a:effectRef idx="0">
-              <a:schemeClr val="accent1"/>
-            </a:effectRef>
-            <a:fontRef idx="minor">
-              <a:schemeClr val="lt1"/>
-            </a:fontRef>
-          </p:style>
-          <p:txBody>
-            <a:bodyPr rtlCol="0" anchor="ctr"/>
-            <a:lstStyle/>
-            <a:p>
-              <a:pPr algn="ctr"/>
-              <a:r>
-                <a:rPr lang="en-US" dirty="0">
-                  <a:solidFill>
-                    <a:sysClr val="windowText" lastClr="000000"/>
-                  </a:solidFill>
-                </a:rPr>
-                <a:t>001</a:t>
-              </a:r>
-            </a:p>
-          </p:txBody>
-        </p:sp>
-        <p:sp>
-          <p:nvSpPr>
-            <p:cNvPr id="31" name="Rectangle 30">
-              <a:extLst>
-                <a:ext uri="{FF2B5EF4-FFF2-40B4-BE49-F238E27FC236}">
-                  <a16:creationId xmlns:a16="http://schemas.microsoft.com/office/drawing/2014/main" id="{FE639B1F-492F-6D48-B8DC-AD934F1A8431}"/>
-                </a:ext>
-              </a:extLst>
-            </p:cNvPr>
-            <p:cNvSpPr/>
-            <p:nvPr/>
-          </p:nvSpPr>
-          <p:spPr>
-            <a:xfrm>
-              <a:off x="6918441" y="3568988"/>
-              <a:ext cx="647700" cy="514939"/>
-            </a:xfrm>
-            <a:prstGeom prst="rect">
-              <a:avLst/>
-            </a:prstGeom>
-          </p:spPr>
-          <p:style>
-            <a:lnRef idx="2">
-              <a:schemeClr val="accent1">
-                <a:shade val="50000"/>
-              </a:schemeClr>
-            </a:lnRef>
-            <a:fillRef idx="1">
-              <a:schemeClr val="accent1"/>
-            </a:fillRef>
-            <a:effectRef idx="0">
-              <a:schemeClr val="accent1"/>
-            </a:effectRef>
-            <a:fontRef idx="minor">
-              <a:schemeClr val="lt1"/>
-            </a:fontRef>
-          </p:style>
-          <p:txBody>
-            <a:bodyPr rtlCol="0" anchor="ctr"/>
-            <a:lstStyle/>
-            <a:p>
-              <a:pPr algn="ctr"/>
-              <a:r>
-                <a:rPr lang="en-US" dirty="0">
-                  <a:solidFill>
-                    <a:sysClr val="windowText" lastClr="000000"/>
-                  </a:solidFill>
-                </a:rPr>
-                <a:t>010</a:t>
-              </a:r>
-            </a:p>
-          </p:txBody>
-        </p:sp>
-        <p:sp>
-          <p:nvSpPr>
-            <p:cNvPr id="32" name="Rectangle 31">
-              <a:extLst>
-                <a:ext uri="{FF2B5EF4-FFF2-40B4-BE49-F238E27FC236}">
-                  <a16:creationId xmlns:a16="http://schemas.microsoft.com/office/drawing/2014/main" id="{1941F3AA-EF73-4E48-898F-EE8F51D6CF07}"/>
-                </a:ext>
-              </a:extLst>
-            </p:cNvPr>
-            <p:cNvSpPr/>
-            <p:nvPr/>
-          </p:nvSpPr>
-          <p:spPr>
-            <a:xfrm>
-              <a:off x="7626540" y="3568988"/>
-              <a:ext cx="647700" cy="514939"/>
-            </a:xfrm>
-            <a:prstGeom prst="rect">
-              <a:avLst/>
-            </a:prstGeom>
-          </p:spPr>
-          <p:style>
-            <a:lnRef idx="2">
-              <a:schemeClr val="accent1">
-                <a:shade val="50000"/>
-              </a:schemeClr>
-            </a:lnRef>
-            <a:fillRef idx="1">
-              <a:schemeClr val="accent1"/>
-            </a:fillRef>
-            <a:effectRef idx="0">
-              <a:schemeClr val="accent1"/>
-            </a:effectRef>
-            <a:fontRef idx="minor">
-              <a:schemeClr val="lt1"/>
-            </a:fontRef>
-          </p:style>
-          <p:txBody>
-            <a:bodyPr rtlCol="0" anchor="ctr"/>
-            <a:lstStyle/>
-            <a:p>
-              <a:pPr algn="ctr"/>
-              <a:r>
-                <a:rPr lang="en-US" dirty="0">
-                  <a:solidFill>
-                    <a:sysClr val="windowText" lastClr="000000"/>
-                  </a:solidFill>
-                </a:rPr>
-                <a:t>011</a:t>
-              </a:r>
-            </a:p>
-          </p:txBody>
-        </p:sp>
-        <p:sp>
-          <p:nvSpPr>
-            <p:cNvPr id="33" name="Rectangle 32">
-              <a:extLst>
-                <a:ext uri="{FF2B5EF4-FFF2-40B4-BE49-F238E27FC236}">
-                  <a16:creationId xmlns:a16="http://schemas.microsoft.com/office/drawing/2014/main" id="{A0EE4D28-2F65-774A-8265-E8FD9019FC9D}"/>
-                </a:ext>
-              </a:extLst>
-            </p:cNvPr>
-            <p:cNvSpPr/>
-            <p:nvPr/>
-          </p:nvSpPr>
-          <p:spPr>
-            <a:xfrm>
-              <a:off x="8828490" y="3567591"/>
-              <a:ext cx="647700" cy="514939"/>
-            </a:xfrm>
-            <a:prstGeom prst="rect">
-              <a:avLst/>
-            </a:prstGeom>
-          </p:spPr>
-          <p:style>
-            <a:lnRef idx="2">
-              <a:schemeClr val="accent1">
-                <a:shade val="50000"/>
-              </a:schemeClr>
-            </a:lnRef>
-            <a:fillRef idx="1">
-              <a:schemeClr val="accent1"/>
-            </a:fillRef>
-            <a:effectRef idx="0">
-              <a:schemeClr val="accent1"/>
-            </a:effectRef>
-            <a:fontRef idx="minor">
-              <a:schemeClr val="lt1"/>
-            </a:fontRef>
-          </p:style>
-          <p:txBody>
-            <a:bodyPr rtlCol="0" anchor="ctr"/>
-            <a:lstStyle/>
-            <a:p>
-              <a:pPr algn="ctr"/>
-              <a:r>
-                <a:rPr lang="en-US" dirty="0">
-                  <a:solidFill>
-                    <a:sysClr val="windowText" lastClr="000000"/>
-                  </a:solidFill>
-                </a:rPr>
-                <a:t>100</a:t>
-              </a:r>
-            </a:p>
-          </p:txBody>
-        </p:sp>
-        <p:sp>
-          <p:nvSpPr>
-            <p:cNvPr id="34" name="Rectangle 33">
-              <a:extLst>
-                <a:ext uri="{FF2B5EF4-FFF2-40B4-BE49-F238E27FC236}">
-                  <a16:creationId xmlns:a16="http://schemas.microsoft.com/office/drawing/2014/main" id="{17765800-CD8A-F24F-9665-CBC42BEBBB5F}"/>
-                </a:ext>
-              </a:extLst>
-            </p:cNvPr>
-            <p:cNvSpPr/>
-            <p:nvPr/>
-          </p:nvSpPr>
-          <p:spPr>
-            <a:xfrm>
-              <a:off x="9523815" y="3567591"/>
-              <a:ext cx="647700" cy="514939"/>
-            </a:xfrm>
-            <a:prstGeom prst="rect">
-              <a:avLst/>
-            </a:prstGeom>
-          </p:spPr>
-          <p:style>
-            <a:lnRef idx="2">
-              <a:schemeClr val="accent1">
-                <a:shade val="50000"/>
-              </a:schemeClr>
-            </a:lnRef>
-            <a:fillRef idx="1">
-              <a:schemeClr val="accent1"/>
-            </a:fillRef>
-            <a:effectRef idx="0">
-              <a:schemeClr val="accent1"/>
-            </a:effectRef>
-            <a:fontRef idx="minor">
-              <a:schemeClr val="lt1"/>
-            </a:fontRef>
-          </p:style>
-          <p:txBody>
-            <a:bodyPr rtlCol="0" anchor="ctr"/>
-            <a:lstStyle/>
-            <a:p>
-              <a:pPr algn="ctr"/>
-              <a:r>
-                <a:rPr lang="en-US" dirty="0">
-                  <a:solidFill>
-                    <a:sysClr val="windowText" lastClr="000000"/>
-                  </a:solidFill>
-                </a:rPr>
-                <a:t>101</a:t>
-              </a:r>
-            </a:p>
-          </p:txBody>
-        </p:sp>
-        <p:sp>
-          <p:nvSpPr>
-            <p:cNvPr id="35" name="Rectangle 34">
-              <a:extLst>
-                <a:ext uri="{FF2B5EF4-FFF2-40B4-BE49-F238E27FC236}">
-                  <a16:creationId xmlns:a16="http://schemas.microsoft.com/office/drawing/2014/main" id="{7AD17A2C-773D-F948-8D3E-A8F1F46F0257}"/>
-                </a:ext>
-              </a:extLst>
-            </p:cNvPr>
-            <p:cNvSpPr/>
-            <p:nvPr/>
-          </p:nvSpPr>
-          <p:spPr>
-            <a:xfrm>
-              <a:off x="10258221" y="3567591"/>
-              <a:ext cx="647700" cy="514939"/>
-            </a:xfrm>
-            <a:prstGeom prst="rect">
-              <a:avLst/>
-            </a:prstGeom>
-          </p:spPr>
-          <p:style>
-            <a:lnRef idx="2">
-              <a:schemeClr val="accent1">
-                <a:shade val="50000"/>
-              </a:schemeClr>
-            </a:lnRef>
-            <a:fillRef idx="1">
-              <a:schemeClr val="accent1"/>
-            </a:fillRef>
-            <a:effectRef idx="0">
-              <a:schemeClr val="accent1"/>
-            </a:effectRef>
-            <a:fontRef idx="minor">
-              <a:schemeClr val="lt1"/>
-            </a:fontRef>
-          </p:style>
-          <p:txBody>
-            <a:bodyPr rtlCol="0" anchor="ctr"/>
-            <a:lstStyle/>
-            <a:p>
-              <a:pPr algn="ctr"/>
-              <a:r>
-                <a:rPr lang="en-US" dirty="0">
-                  <a:solidFill>
-                    <a:sysClr val="windowText" lastClr="000000"/>
-                  </a:solidFill>
-                </a:rPr>
-                <a:t>110</a:t>
-              </a:r>
-            </a:p>
-          </p:txBody>
-        </p:sp>
-        <p:sp>
-          <p:nvSpPr>
-            <p:cNvPr id="36" name="Rectangle 35">
-              <a:extLst>
-                <a:ext uri="{FF2B5EF4-FFF2-40B4-BE49-F238E27FC236}">
-                  <a16:creationId xmlns:a16="http://schemas.microsoft.com/office/drawing/2014/main" id="{1D81AB5B-457F-734E-9849-6EBB78780146}"/>
-                </a:ext>
-              </a:extLst>
-            </p:cNvPr>
-            <p:cNvSpPr/>
-            <p:nvPr/>
-          </p:nvSpPr>
-          <p:spPr>
-            <a:xfrm>
-              <a:off x="11012921" y="3567591"/>
-              <a:ext cx="647700" cy="514939"/>
-            </a:xfrm>
-            <a:prstGeom prst="rect">
-              <a:avLst/>
-            </a:prstGeom>
-          </p:spPr>
-          <p:style>
-            <a:lnRef idx="2">
-              <a:schemeClr val="accent1">
-                <a:shade val="50000"/>
-              </a:schemeClr>
-            </a:lnRef>
-            <a:fillRef idx="1">
-              <a:schemeClr val="accent1"/>
-            </a:fillRef>
-            <a:effectRef idx="0">
-              <a:schemeClr val="accent1"/>
-            </a:effectRef>
-            <a:fontRef idx="minor">
-              <a:schemeClr val="lt1"/>
-            </a:fontRef>
-          </p:style>
-          <p:txBody>
-            <a:bodyPr rtlCol="0" anchor="ctr"/>
-            <a:lstStyle/>
-            <a:p>
-              <a:pPr algn="ctr"/>
-              <a:r>
-                <a:rPr lang="en-US" dirty="0">
-                  <a:solidFill>
-                    <a:sysClr val="windowText" lastClr="000000"/>
-                  </a:solidFill>
-                </a:rPr>
-                <a:t>111</a:t>
-              </a:r>
-            </a:p>
-          </p:txBody>
-        </p:sp>
-        <p:cxnSp>
-          <p:nvCxnSpPr>
-            <p:cNvPr id="38" name="Straight Arrow Connector 37">
-              <a:extLst>
-                <a:ext uri="{FF2B5EF4-FFF2-40B4-BE49-F238E27FC236}">
-                  <a16:creationId xmlns:a16="http://schemas.microsoft.com/office/drawing/2014/main" id="{2C790033-697C-8D46-B143-1596770E24DF}"/>
-                </a:ext>
-              </a:extLst>
-            </p:cNvPr>
-            <p:cNvCxnSpPr>
-              <a:stCxn id="20" idx="2"/>
-            </p:cNvCxnSpPr>
-            <p:nvPr/>
-          </p:nvCxnSpPr>
-          <p:spPr>
-            <a:xfrm flipH="1">
-              <a:off x="6918441" y="1724614"/>
-              <a:ext cx="1434984" cy="257764"/>
-            </a:xfrm>
-            <a:prstGeom prst="straightConnector1">
-              <a:avLst/>
-            </a:prstGeom>
-            <a:ln>
-              <a:tailEnd type="triangle"/>
-            </a:ln>
-          </p:spPr>
-          <p:style>
-            <a:lnRef idx="1">
-              <a:schemeClr val="accent1"/>
-            </a:lnRef>
-            <a:fillRef idx="0">
-              <a:schemeClr val="accent1"/>
-            </a:fillRef>
-            <a:effectRef idx="0">
-              <a:schemeClr val="accent1"/>
-            </a:effectRef>
-            <a:fontRef idx="minor">
-              <a:schemeClr val="tx1"/>
-            </a:fontRef>
-          </p:style>
-        </p:cxnSp>
-        <p:cxnSp>
-          <p:nvCxnSpPr>
-            <p:cNvPr id="40" name="Straight Arrow Connector 39">
-              <a:extLst>
-                <a:ext uri="{FF2B5EF4-FFF2-40B4-BE49-F238E27FC236}">
-                  <a16:creationId xmlns:a16="http://schemas.microsoft.com/office/drawing/2014/main" id="{D7C53F62-6C79-8C48-83A6-324A63B4E35A}"/>
-                </a:ext>
-              </a:extLst>
-            </p:cNvPr>
-            <p:cNvCxnSpPr>
-              <a:endCxn id="24" idx="0"/>
-            </p:cNvCxnSpPr>
-            <p:nvPr/>
-          </p:nvCxnSpPr>
-          <p:spPr>
-            <a:xfrm>
-              <a:off x="8362950" y="1724614"/>
-              <a:ext cx="1628029" cy="257764"/>
-            </a:xfrm>
-            <a:prstGeom prst="straightConnector1">
-              <a:avLst/>
-            </a:prstGeom>
-            <a:ln>
-              <a:tailEnd type="triangle"/>
-            </a:ln>
-          </p:spPr>
-          <p:style>
-            <a:lnRef idx="1">
-              <a:schemeClr val="accent1"/>
-            </a:lnRef>
-            <a:fillRef idx="0">
-              <a:schemeClr val="accent1"/>
-            </a:fillRef>
-            <a:effectRef idx="0">
-              <a:schemeClr val="accent1"/>
-            </a:effectRef>
-            <a:fontRef idx="minor">
-              <a:schemeClr val="tx1"/>
-            </a:fontRef>
-          </p:style>
-        </p:cxnSp>
-        <p:cxnSp>
-          <p:nvCxnSpPr>
-            <p:cNvPr id="42" name="Straight Arrow Connector 41">
-              <a:extLst>
-                <a:ext uri="{FF2B5EF4-FFF2-40B4-BE49-F238E27FC236}">
-                  <a16:creationId xmlns:a16="http://schemas.microsoft.com/office/drawing/2014/main" id="{501DE15D-469E-A54E-AF9F-07576E8352A5}"/>
-                </a:ext>
-              </a:extLst>
-            </p:cNvPr>
-            <p:cNvCxnSpPr>
-              <a:stCxn id="23" idx="2"/>
-              <a:endCxn id="25" idx="0"/>
-            </p:cNvCxnSpPr>
-            <p:nvPr/>
-          </p:nvCxnSpPr>
-          <p:spPr>
-            <a:xfrm flipH="1">
-              <a:off x="6178518" y="2497317"/>
-              <a:ext cx="762000" cy="337494"/>
-            </a:xfrm>
-            <a:prstGeom prst="straightConnector1">
-              <a:avLst/>
-            </a:prstGeom>
-            <a:ln>
-              <a:tailEnd type="triangle"/>
-            </a:ln>
-          </p:spPr>
-          <p:style>
-            <a:lnRef idx="1">
-              <a:schemeClr val="accent1"/>
-            </a:lnRef>
-            <a:fillRef idx="0">
-              <a:schemeClr val="accent1"/>
-            </a:fillRef>
-            <a:effectRef idx="0">
-              <a:schemeClr val="accent1"/>
-            </a:effectRef>
-            <a:fontRef idx="minor">
-              <a:schemeClr val="tx1"/>
-            </a:fontRef>
-          </p:style>
-        </p:cxnSp>
-        <p:cxnSp>
-          <p:nvCxnSpPr>
-            <p:cNvPr id="44" name="Straight Arrow Connector 43">
-              <a:extLst>
-                <a:ext uri="{FF2B5EF4-FFF2-40B4-BE49-F238E27FC236}">
-                  <a16:creationId xmlns:a16="http://schemas.microsoft.com/office/drawing/2014/main" id="{8AF36C55-B0B4-704C-B86A-09F85317D86D}"/>
-                </a:ext>
-              </a:extLst>
-            </p:cNvPr>
-            <p:cNvCxnSpPr>
-              <a:endCxn id="26" idx="0"/>
-            </p:cNvCxnSpPr>
-            <p:nvPr/>
-          </p:nvCxnSpPr>
-          <p:spPr>
-            <a:xfrm>
-              <a:off x="6918441" y="2510129"/>
-              <a:ext cx="678514" cy="324681"/>
-            </a:xfrm>
-            <a:prstGeom prst="straightConnector1">
-              <a:avLst/>
-            </a:prstGeom>
-            <a:ln>
-              <a:tailEnd type="triangle"/>
-            </a:ln>
-          </p:spPr>
-          <p:style>
-            <a:lnRef idx="1">
-              <a:schemeClr val="accent1"/>
-            </a:lnRef>
-            <a:fillRef idx="0">
-              <a:schemeClr val="accent1"/>
-            </a:fillRef>
-            <a:effectRef idx="0">
-              <a:schemeClr val="accent1"/>
-            </a:effectRef>
-            <a:fontRef idx="minor">
-              <a:schemeClr val="tx1"/>
-            </a:fontRef>
-          </p:style>
-        </p:cxnSp>
-        <p:cxnSp>
-          <p:nvCxnSpPr>
-            <p:cNvPr id="46" name="Straight Arrow Connector 45">
-              <a:extLst>
-                <a:ext uri="{FF2B5EF4-FFF2-40B4-BE49-F238E27FC236}">
-                  <a16:creationId xmlns:a16="http://schemas.microsoft.com/office/drawing/2014/main" id="{D0FC68BB-256D-0C47-A6B6-9C84ADCD7384}"/>
-                </a:ext>
-              </a:extLst>
-            </p:cNvPr>
-            <p:cNvCxnSpPr>
-              <a:stCxn id="24" idx="2"/>
-              <a:endCxn id="27" idx="0"/>
-            </p:cNvCxnSpPr>
-            <p:nvPr/>
-          </p:nvCxnSpPr>
-          <p:spPr>
-            <a:xfrm flipH="1">
-              <a:off x="9571440" y="2497317"/>
-              <a:ext cx="419539" cy="337492"/>
-            </a:xfrm>
-            <a:prstGeom prst="straightConnector1">
-              <a:avLst/>
-            </a:prstGeom>
-            <a:ln>
-              <a:tailEnd type="triangle"/>
-            </a:ln>
-          </p:spPr>
-          <p:style>
-            <a:lnRef idx="1">
-              <a:schemeClr val="accent1"/>
-            </a:lnRef>
-            <a:fillRef idx="0">
-              <a:schemeClr val="accent1"/>
-            </a:fillRef>
-            <a:effectRef idx="0">
-              <a:schemeClr val="accent1"/>
-            </a:effectRef>
-            <a:fontRef idx="minor">
-              <a:schemeClr val="tx1"/>
-            </a:fontRef>
-          </p:style>
-        </p:cxnSp>
-        <p:cxnSp>
-          <p:nvCxnSpPr>
-            <p:cNvPr id="48" name="Straight Arrow Connector 47">
-              <a:extLst>
-                <a:ext uri="{FF2B5EF4-FFF2-40B4-BE49-F238E27FC236}">
-                  <a16:creationId xmlns:a16="http://schemas.microsoft.com/office/drawing/2014/main" id="{76142602-0C99-E645-A219-FB971D04179A}"/>
-                </a:ext>
-              </a:extLst>
-            </p:cNvPr>
-            <p:cNvCxnSpPr>
-              <a:cxnSpLocks/>
-              <a:stCxn id="24" idx="2"/>
-              <a:endCxn id="28" idx="0"/>
-            </p:cNvCxnSpPr>
-            <p:nvPr/>
-          </p:nvCxnSpPr>
-          <p:spPr>
-            <a:xfrm>
-              <a:off x="9990979" y="2497317"/>
-              <a:ext cx="800253" cy="337492"/>
-            </a:xfrm>
-            <a:prstGeom prst="straightConnector1">
-              <a:avLst/>
-            </a:prstGeom>
-            <a:ln>
-              <a:tailEnd type="triangle"/>
-            </a:ln>
-          </p:spPr>
-          <p:style>
-            <a:lnRef idx="1">
-              <a:schemeClr val="accent1"/>
-            </a:lnRef>
-            <a:fillRef idx="0">
-              <a:schemeClr val="accent1"/>
-            </a:fillRef>
-            <a:effectRef idx="0">
-              <a:schemeClr val="accent1"/>
-            </a:effectRef>
-            <a:fontRef idx="minor">
-              <a:schemeClr val="tx1"/>
-            </a:fontRef>
-          </p:style>
-        </p:cxnSp>
-        <p:cxnSp>
-          <p:nvCxnSpPr>
-            <p:cNvPr id="51" name="Straight Arrow Connector 50">
-              <a:extLst>
-                <a:ext uri="{FF2B5EF4-FFF2-40B4-BE49-F238E27FC236}">
-                  <a16:creationId xmlns:a16="http://schemas.microsoft.com/office/drawing/2014/main" id="{E82EA744-6C8D-A645-9F24-3013775C9961}"/>
-                </a:ext>
-              </a:extLst>
-            </p:cNvPr>
-            <p:cNvCxnSpPr>
-              <a:cxnSpLocks/>
-              <a:stCxn id="25" idx="2"/>
-              <a:endCxn id="29" idx="0"/>
-            </p:cNvCxnSpPr>
-            <p:nvPr/>
-          </p:nvCxnSpPr>
-          <p:spPr>
-            <a:xfrm flipH="1">
-              <a:off x="5816568" y="3349750"/>
-              <a:ext cx="361950" cy="219238"/>
-            </a:xfrm>
-            <a:prstGeom prst="straightConnector1">
-              <a:avLst/>
-            </a:prstGeom>
-            <a:ln>
-              <a:tailEnd type="triangle"/>
-            </a:ln>
-          </p:spPr>
-          <p:style>
-            <a:lnRef idx="1">
-              <a:schemeClr val="accent1"/>
-            </a:lnRef>
-            <a:fillRef idx="0">
-              <a:schemeClr val="accent1"/>
-            </a:fillRef>
-            <a:effectRef idx="0">
-              <a:schemeClr val="accent1"/>
-            </a:effectRef>
-            <a:fontRef idx="minor">
-              <a:schemeClr val="tx1"/>
-            </a:fontRef>
-          </p:style>
-        </p:cxnSp>
-        <p:cxnSp>
-          <p:nvCxnSpPr>
-            <p:cNvPr id="54" name="Straight Arrow Connector 53">
-              <a:extLst>
-                <a:ext uri="{FF2B5EF4-FFF2-40B4-BE49-F238E27FC236}">
-                  <a16:creationId xmlns:a16="http://schemas.microsoft.com/office/drawing/2014/main" id="{DD5FA9DC-6BD1-E04B-AAEA-85A66BA40164}"/>
-                </a:ext>
-              </a:extLst>
-            </p:cNvPr>
-            <p:cNvCxnSpPr>
-              <a:cxnSpLocks/>
-              <a:stCxn id="25" idx="2"/>
-              <a:endCxn id="30" idx="0"/>
-            </p:cNvCxnSpPr>
-            <p:nvPr/>
-          </p:nvCxnSpPr>
-          <p:spPr>
-            <a:xfrm>
-              <a:off x="6178518" y="3349750"/>
-              <a:ext cx="346149" cy="219238"/>
-            </a:xfrm>
-            <a:prstGeom prst="straightConnector1">
-              <a:avLst/>
-            </a:prstGeom>
-            <a:ln>
-              <a:tailEnd type="triangle"/>
-            </a:ln>
-          </p:spPr>
-          <p:style>
-            <a:lnRef idx="1">
-              <a:schemeClr val="accent1"/>
-            </a:lnRef>
-            <a:fillRef idx="0">
-              <a:schemeClr val="accent1"/>
-            </a:fillRef>
-            <a:effectRef idx="0">
-              <a:schemeClr val="accent1"/>
-            </a:effectRef>
-            <a:fontRef idx="minor">
-              <a:schemeClr val="tx1"/>
-            </a:fontRef>
-          </p:style>
-        </p:cxnSp>
-        <p:cxnSp>
-          <p:nvCxnSpPr>
-            <p:cNvPr id="57" name="Straight Arrow Connector 56">
-              <a:extLst>
-                <a:ext uri="{FF2B5EF4-FFF2-40B4-BE49-F238E27FC236}">
-                  <a16:creationId xmlns:a16="http://schemas.microsoft.com/office/drawing/2014/main" id="{27D66AE8-F395-EE4A-B5EC-E7A1189DCB07}"/>
-                </a:ext>
-              </a:extLst>
-            </p:cNvPr>
-            <p:cNvCxnSpPr>
-              <a:cxnSpLocks/>
-              <a:stCxn id="26" idx="2"/>
-              <a:endCxn id="31" idx="0"/>
-            </p:cNvCxnSpPr>
-            <p:nvPr/>
-          </p:nvCxnSpPr>
-          <p:spPr>
-            <a:xfrm flipH="1">
-              <a:off x="7242291" y="3349749"/>
-              <a:ext cx="354664" cy="219239"/>
-            </a:xfrm>
-            <a:prstGeom prst="straightConnector1">
-              <a:avLst/>
-            </a:prstGeom>
-            <a:ln>
-              <a:tailEnd type="triangle"/>
-            </a:ln>
-          </p:spPr>
-          <p:style>
-            <a:lnRef idx="1">
-              <a:schemeClr val="accent1"/>
-            </a:lnRef>
-            <a:fillRef idx="0">
-              <a:schemeClr val="accent1"/>
-            </a:fillRef>
-            <a:effectRef idx="0">
-              <a:schemeClr val="accent1"/>
-            </a:effectRef>
-            <a:fontRef idx="minor">
-              <a:schemeClr val="tx1"/>
-            </a:fontRef>
-          </p:style>
-        </p:cxnSp>
-        <p:cxnSp>
-          <p:nvCxnSpPr>
-            <p:cNvPr id="60" name="Straight Arrow Connector 59">
-              <a:extLst>
-                <a:ext uri="{FF2B5EF4-FFF2-40B4-BE49-F238E27FC236}">
-                  <a16:creationId xmlns:a16="http://schemas.microsoft.com/office/drawing/2014/main" id="{30179CFE-7FDC-7E4D-AB07-8461069BB3F1}"/>
-                </a:ext>
-              </a:extLst>
-            </p:cNvPr>
-            <p:cNvCxnSpPr>
-              <a:cxnSpLocks/>
-              <a:stCxn id="26" idx="2"/>
-              <a:endCxn id="32" idx="0"/>
-            </p:cNvCxnSpPr>
-            <p:nvPr/>
-          </p:nvCxnSpPr>
-          <p:spPr>
-            <a:xfrm>
-              <a:off x="7596955" y="3349749"/>
-              <a:ext cx="353435" cy="219239"/>
-            </a:xfrm>
-            <a:prstGeom prst="straightConnector1">
-              <a:avLst/>
-            </a:prstGeom>
-            <a:ln>
-              <a:tailEnd type="triangle"/>
-            </a:ln>
-          </p:spPr>
-          <p:style>
-            <a:lnRef idx="1">
-              <a:schemeClr val="accent1"/>
-            </a:lnRef>
-            <a:fillRef idx="0">
-              <a:schemeClr val="accent1"/>
-            </a:fillRef>
-            <a:effectRef idx="0">
-              <a:schemeClr val="accent1"/>
-            </a:effectRef>
-            <a:fontRef idx="minor">
-              <a:schemeClr val="tx1"/>
-            </a:fontRef>
-          </p:style>
-        </p:cxnSp>
-        <p:cxnSp>
-          <p:nvCxnSpPr>
-            <p:cNvPr id="63" name="Straight Arrow Connector 62">
-              <a:extLst>
-                <a:ext uri="{FF2B5EF4-FFF2-40B4-BE49-F238E27FC236}">
-                  <a16:creationId xmlns:a16="http://schemas.microsoft.com/office/drawing/2014/main" id="{93C693AE-788D-AC4C-B060-73F72BDAE837}"/>
-                </a:ext>
-              </a:extLst>
-            </p:cNvPr>
-            <p:cNvCxnSpPr>
-              <a:cxnSpLocks/>
-              <a:stCxn id="27" idx="2"/>
-              <a:endCxn id="33" idx="0"/>
-            </p:cNvCxnSpPr>
-            <p:nvPr/>
-          </p:nvCxnSpPr>
-          <p:spPr>
-            <a:xfrm flipH="1">
-              <a:off x="9152340" y="3349748"/>
-              <a:ext cx="419100" cy="217843"/>
-            </a:xfrm>
-            <a:prstGeom prst="straightConnector1">
-              <a:avLst/>
-            </a:prstGeom>
-            <a:ln>
-              <a:tailEnd type="triangle"/>
-            </a:ln>
-          </p:spPr>
-          <p:style>
-            <a:lnRef idx="1">
-              <a:schemeClr val="accent1"/>
-            </a:lnRef>
-            <a:fillRef idx="0">
-              <a:schemeClr val="accent1"/>
-            </a:fillRef>
-            <a:effectRef idx="0">
-              <a:schemeClr val="accent1"/>
-            </a:effectRef>
-            <a:fontRef idx="minor">
-              <a:schemeClr val="tx1"/>
-            </a:fontRef>
-          </p:style>
-        </p:cxnSp>
-        <p:cxnSp>
-          <p:nvCxnSpPr>
-            <p:cNvPr id="66" name="Straight Arrow Connector 65">
-              <a:extLst>
-                <a:ext uri="{FF2B5EF4-FFF2-40B4-BE49-F238E27FC236}">
-                  <a16:creationId xmlns:a16="http://schemas.microsoft.com/office/drawing/2014/main" id="{944C2E8B-E5CA-834B-BC63-0D58CDFF8AEB}"/>
-                </a:ext>
-              </a:extLst>
-            </p:cNvPr>
-            <p:cNvCxnSpPr>
-              <a:cxnSpLocks/>
-              <a:stCxn id="27" idx="2"/>
-              <a:endCxn id="34" idx="0"/>
-            </p:cNvCxnSpPr>
-            <p:nvPr/>
-          </p:nvCxnSpPr>
-          <p:spPr>
-            <a:xfrm>
-              <a:off x="9571440" y="3349748"/>
-              <a:ext cx="276225" cy="217843"/>
-            </a:xfrm>
-            <a:prstGeom prst="straightConnector1">
-              <a:avLst/>
-            </a:prstGeom>
-            <a:ln>
-              <a:tailEnd type="triangle"/>
-            </a:ln>
-          </p:spPr>
-          <p:style>
-            <a:lnRef idx="1">
-              <a:schemeClr val="accent1"/>
-            </a:lnRef>
-            <a:fillRef idx="0">
-              <a:schemeClr val="accent1"/>
-            </a:fillRef>
-            <a:effectRef idx="0">
-              <a:schemeClr val="accent1"/>
-            </a:effectRef>
-            <a:fontRef idx="minor">
-              <a:schemeClr val="tx1"/>
-            </a:fontRef>
-          </p:style>
-        </p:cxnSp>
-        <p:cxnSp>
-          <p:nvCxnSpPr>
-            <p:cNvPr id="70" name="Straight Arrow Connector 69">
-              <a:extLst>
-                <a:ext uri="{FF2B5EF4-FFF2-40B4-BE49-F238E27FC236}">
-                  <a16:creationId xmlns:a16="http://schemas.microsoft.com/office/drawing/2014/main" id="{0C43082F-DE5A-F64E-B6D7-B296A3E566AF}"/>
-                </a:ext>
-              </a:extLst>
-            </p:cNvPr>
-            <p:cNvCxnSpPr>
-              <a:cxnSpLocks/>
-              <a:endCxn id="35" idx="0"/>
-            </p:cNvCxnSpPr>
-            <p:nvPr/>
-          </p:nvCxnSpPr>
-          <p:spPr>
-            <a:xfrm flipH="1">
-              <a:off x="10582071" y="3349748"/>
-              <a:ext cx="209162" cy="217843"/>
-            </a:xfrm>
-            <a:prstGeom prst="straightConnector1">
-              <a:avLst/>
-            </a:prstGeom>
-            <a:ln>
-              <a:tailEnd type="triangle"/>
-            </a:ln>
-          </p:spPr>
-          <p:style>
-            <a:lnRef idx="1">
-              <a:schemeClr val="accent1"/>
-            </a:lnRef>
-            <a:fillRef idx="0">
-              <a:schemeClr val="accent1"/>
-            </a:fillRef>
-            <a:effectRef idx="0">
-              <a:schemeClr val="accent1"/>
-            </a:effectRef>
-            <a:fontRef idx="minor">
-              <a:schemeClr val="tx1"/>
-            </a:fontRef>
-          </p:style>
-        </p:cxnSp>
-        <p:cxnSp>
-          <p:nvCxnSpPr>
-            <p:cNvPr id="73" name="Straight Arrow Connector 72">
-              <a:extLst>
-                <a:ext uri="{FF2B5EF4-FFF2-40B4-BE49-F238E27FC236}">
-                  <a16:creationId xmlns:a16="http://schemas.microsoft.com/office/drawing/2014/main" id="{2C9A9D74-D67A-DD45-A5A0-1AE87570CB72}"/>
-                </a:ext>
-              </a:extLst>
-            </p:cNvPr>
-            <p:cNvCxnSpPr>
-              <a:cxnSpLocks/>
-            </p:cNvCxnSpPr>
-            <p:nvPr/>
-          </p:nvCxnSpPr>
-          <p:spPr>
-            <a:xfrm>
-              <a:off x="10791233" y="3349748"/>
-              <a:ext cx="648292" cy="312635"/>
-            </a:xfrm>
-            <a:prstGeom prst="straightConnector1">
-              <a:avLst/>
-            </a:prstGeom>
-            <a:ln>
-              <a:tailEnd type="triangle"/>
-            </a:ln>
-          </p:spPr>
-          <p:style>
-            <a:lnRef idx="1">
-              <a:schemeClr val="accent1"/>
-            </a:lnRef>
-            <a:fillRef idx="0">
-              <a:schemeClr val="accent1"/>
-            </a:fillRef>
-            <a:effectRef idx="0">
-              <a:schemeClr val="accent1"/>
-            </a:effectRef>
-            <a:fontRef idx="minor">
-              <a:schemeClr val="tx1"/>
-            </a:fontRef>
-          </p:style>
-        </p:cxnSp>
-        <p:sp>
-          <p:nvSpPr>
-            <p:cNvPr id="77" name="TextBox 76">
-              <a:extLst>
-                <a:ext uri="{FF2B5EF4-FFF2-40B4-BE49-F238E27FC236}">
-                  <a16:creationId xmlns:a16="http://schemas.microsoft.com/office/drawing/2014/main" id="{1AE03F08-F11E-514E-92BE-6FA5C36D47D9}"/>
-                </a:ext>
-              </a:extLst>
-            </p:cNvPr>
-            <p:cNvSpPr txBox="1"/>
-            <p:nvPr/>
-          </p:nvSpPr>
-          <p:spPr>
-            <a:xfrm>
-              <a:off x="7576566" y="1239485"/>
-              <a:ext cx="304800" cy="400110"/>
-            </a:xfrm>
-            <a:prstGeom prst="rect">
-              <a:avLst/>
-            </a:prstGeom>
-            <a:noFill/>
-          </p:spPr>
-          <p:txBody>
-            <a:bodyPr wrap="square" rtlCol="0">
-              <a:spAutoFit/>
-            </a:bodyPr>
-            <a:lstStyle/>
-            <a:p>
-              <a:r>
-                <a:rPr lang="en-US" sz="2000" dirty="0">
-                  <a:solidFill>
-                    <a:schemeClr val="accent5">
-                      <a:lumMod val="60000"/>
-                      <a:lumOff val="40000"/>
-                    </a:schemeClr>
-                  </a:solidFill>
-                </a:rPr>
-                <a:t>0</a:t>
-              </a:r>
-            </a:p>
-          </p:txBody>
-        </p:sp>
-        <p:sp>
-          <p:nvSpPr>
-            <p:cNvPr id="78" name="TextBox 77">
-              <a:extLst>
-                <a:ext uri="{FF2B5EF4-FFF2-40B4-BE49-F238E27FC236}">
-                  <a16:creationId xmlns:a16="http://schemas.microsoft.com/office/drawing/2014/main" id="{D7DCDC54-ABB7-FB43-AE71-DDACA6D73C6D}"/>
-                </a:ext>
-              </a:extLst>
-            </p:cNvPr>
-            <p:cNvSpPr txBox="1"/>
-            <p:nvPr/>
-          </p:nvSpPr>
-          <p:spPr>
-            <a:xfrm>
-              <a:off x="6146694" y="2033387"/>
-              <a:ext cx="304800" cy="400110"/>
-            </a:xfrm>
-            <a:prstGeom prst="rect">
-              <a:avLst/>
-            </a:prstGeom>
-            <a:noFill/>
-          </p:spPr>
-          <p:txBody>
-            <a:bodyPr wrap="square" rtlCol="0">
-              <a:spAutoFit/>
-            </a:bodyPr>
-            <a:lstStyle/>
-            <a:p>
-              <a:r>
-                <a:rPr lang="en-US" sz="2000" dirty="0">
-                  <a:solidFill>
-                    <a:schemeClr val="accent5">
-                      <a:lumMod val="60000"/>
-                      <a:lumOff val="40000"/>
-                    </a:schemeClr>
-                  </a:solidFill>
-                </a:rPr>
-                <a:t>1</a:t>
-              </a:r>
-            </a:p>
-          </p:txBody>
-        </p:sp>
-        <p:sp>
-          <p:nvSpPr>
-            <p:cNvPr id="79" name="TextBox 78">
-              <a:extLst>
-                <a:ext uri="{FF2B5EF4-FFF2-40B4-BE49-F238E27FC236}">
-                  <a16:creationId xmlns:a16="http://schemas.microsoft.com/office/drawing/2014/main" id="{10A5B54F-04A7-E64A-975C-6478845DCBAC}"/>
-                </a:ext>
-              </a:extLst>
-            </p:cNvPr>
-            <p:cNvSpPr txBox="1"/>
-            <p:nvPr/>
-          </p:nvSpPr>
-          <p:spPr>
-            <a:xfrm>
-              <a:off x="9190726" y="2031705"/>
-              <a:ext cx="304800" cy="400110"/>
-            </a:xfrm>
-            <a:prstGeom prst="rect">
-              <a:avLst/>
-            </a:prstGeom>
-            <a:noFill/>
-          </p:spPr>
-          <p:txBody>
-            <a:bodyPr wrap="square" rtlCol="0">
-              <a:spAutoFit/>
-            </a:bodyPr>
-            <a:lstStyle/>
-            <a:p>
-              <a:r>
-                <a:rPr lang="en-US" sz="2000" dirty="0">
-                  <a:solidFill>
-                    <a:schemeClr val="accent5">
-                      <a:lumMod val="60000"/>
-                      <a:lumOff val="40000"/>
-                    </a:schemeClr>
-                  </a:solidFill>
-                </a:rPr>
-                <a:t>2</a:t>
-              </a:r>
-            </a:p>
-          </p:txBody>
-        </p:sp>
-        <p:sp>
-          <p:nvSpPr>
-            <p:cNvPr id="80" name="TextBox 79">
-              <a:extLst>
-                <a:ext uri="{FF2B5EF4-FFF2-40B4-BE49-F238E27FC236}">
-                  <a16:creationId xmlns:a16="http://schemas.microsoft.com/office/drawing/2014/main" id="{6E59B557-DF6E-FF45-B11B-F2D1BC9B5EE1}"/>
-                </a:ext>
-              </a:extLst>
-            </p:cNvPr>
-            <p:cNvSpPr txBox="1"/>
-            <p:nvPr/>
-          </p:nvSpPr>
-          <p:spPr>
-            <a:xfrm>
-              <a:off x="5405829" y="2905003"/>
-              <a:ext cx="304800" cy="400110"/>
-            </a:xfrm>
-            <a:prstGeom prst="rect">
-              <a:avLst/>
-            </a:prstGeom>
-            <a:noFill/>
-          </p:spPr>
-          <p:txBody>
-            <a:bodyPr wrap="square" rtlCol="0">
-              <a:spAutoFit/>
-            </a:bodyPr>
-            <a:lstStyle/>
-            <a:p>
-              <a:r>
-                <a:rPr lang="en-US" sz="2000" dirty="0">
-                  <a:solidFill>
-                    <a:schemeClr val="accent5">
-                      <a:lumMod val="60000"/>
-                      <a:lumOff val="40000"/>
-                    </a:schemeClr>
-                  </a:solidFill>
-                </a:rPr>
-                <a:t>3</a:t>
-              </a:r>
-            </a:p>
-          </p:txBody>
-        </p:sp>
-        <p:sp>
-          <p:nvSpPr>
-            <p:cNvPr id="81" name="TextBox 80">
-              <a:extLst>
-                <a:ext uri="{FF2B5EF4-FFF2-40B4-BE49-F238E27FC236}">
-                  <a16:creationId xmlns:a16="http://schemas.microsoft.com/office/drawing/2014/main" id="{D85C7C6C-9E0F-B346-A52A-DE2A668721EE}"/>
-                </a:ext>
-              </a:extLst>
-            </p:cNvPr>
-            <p:cNvSpPr txBox="1"/>
-            <p:nvPr/>
-          </p:nvSpPr>
-          <p:spPr>
-            <a:xfrm>
-              <a:off x="6843888" y="2868436"/>
-              <a:ext cx="304800" cy="400110"/>
-            </a:xfrm>
-            <a:prstGeom prst="rect">
-              <a:avLst/>
-            </a:prstGeom>
-            <a:noFill/>
-          </p:spPr>
-          <p:txBody>
-            <a:bodyPr wrap="square" rtlCol="0">
-              <a:spAutoFit/>
-            </a:bodyPr>
-            <a:lstStyle/>
-            <a:p>
-              <a:r>
-                <a:rPr lang="en-US" sz="2000" dirty="0">
-                  <a:solidFill>
-                    <a:schemeClr val="accent5">
-                      <a:lumMod val="60000"/>
-                      <a:lumOff val="40000"/>
-                    </a:schemeClr>
-                  </a:solidFill>
-                </a:rPr>
-                <a:t>4</a:t>
-              </a:r>
-            </a:p>
-          </p:txBody>
-        </p:sp>
-        <p:sp>
-          <p:nvSpPr>
-            <p:cNvPr id="82" name="TextBox 81">
-              <a:extLst>
-                <a:ext uri="{FF2B5EF4-FFF2-40B4-BE49-F238E27FC236}">
-                  <a16:creationId xmlns:a16="http://schemas.microsoft.com/office/drawing/2014/main" id="{8A0DC199-5328-344E-A0E4-89D0E97E467F}"/>
-                </a:ext>
-              </a:extLst>
-            </p:cNvPr>
-            <p:cNvSpPr txBox="1"/>
-            <p:nvPr/>
-          </p:nvSpPr>
-          <p:spPr>
-            <a:xfrm>
-              <a:off x="8798110" y="2876491"/>
-              <a:ext cx="304800" cy="400110"/>
-            </a:xfrm>
-            <a:prstGeom prst="rect">
-              <a:avLst/>
-            </a:prstGeom>
-            <a:noFill/>
-          </p:spPr>
-          <p:txBody>
-            <a:bodyPr wrap="square" rtlCol="0">
-              <a:spAutoFit/>
-            </a:bodyPr>
-            <a:lstStyle/>
-            <a:p>
-              <a:r>
-                <a:rPr lang="en-US" sz="2000" dirty="0">
-                  <a:solidFill>
-                    <a:schemeClr val="accent5">
-                      <a:lumMod val="60000"/>
-                      <a:lumOff val="40000"/>
-                    </a:schemeClr>
-                  </a:solidFill>
-                </a:rPr>
-                <a:t>5</a:t>
-              </a:r>
-            </a:p>
-          </p:txBody>
-        </p:sp>
-        <p:sp>
-          <p:nvSpPr>
-            <p:cNvPr id="83" name="TextBox 82">
-              <a:extLst>
-                <a:ext uri="{FF2B5EF4-FFF2-40B4-BE49-F238E27FC236}">
-                  <a16:creationId xmlns:a16="http://schemas.microsoft.com/office/drawing/2014/main" id="{F23FCA28-6199-5A4C-81FD-26AD07ADFE00}"/>
-                </a:ext>
-              </a:extLst>
-            </p:cNvPr>
-            <p:cNvSpPr txBox="1"/>
-            <p:nvPr/>
-          </p:nvSpPr>
-          <p:spPr>
-            <a:xfrm>
-              <a:off x="11235283" y="2892223"/>
-              <a:ext cx="304800" cy="400110"/>
-            </a:xfrm>
-            <a:prstGeom prst="rect">
-              <a:avLst/>
-            </a:prstGeom>
-            <a:noFill/>
-          </p:spPr>
-          <p:txBody>
-            <a:bodyPr wrap="square" rtlCol="0">
-              <a:spAutoFit/>
-            </a:bodyPr>
-            <a:lstStyle/>
-            <a:p>
-              <a:r>
-                <a:rPr lang="en-US" sz="2000" dirty="0">
-                  <a:solidFill>
-                    <a:schemeClr val="accent5">
-                      <a:lumMod val="60000"/>
-                      <a:lumOff val="40000"/>
-                    </a:schemeClr>
-                  </a:solidFill>
-                </a:rPr>
-                <a:t>6</a:t>
-              </a:r>
-            </a:p>
-          </p:txBody>
-        </p:sp>
-        <p:sp>
-          <p:nvSpPr>
-            <p:cNvPr id="84" name="TextBox 83">
-              <a:extLst>
-                <a:ext uri="{FF2B5EF4-FFF2-40B4-BE49-F238E27FC236}">
-                  <a16:creationId xmlns:a16="http://schemas.microsoft.com/office/drawing/2014/main" id="{9D3D3A7C-2DD3-AF47-816B-AA700F9232A8}"/>
-                </a:ext>
-              </a:extLst>
-            </p:cNvPr>
-            <p:cNvSpPr txBox="1"/>
-            <p:nvPr/>
-          </p:nvSpPr>
-          <p:spPr>
-            <a:xfrm>
-              <a:off x="5660919" y="4057590"/>
-              <a:ext cx="304800" cy="400110"/>
-            </a:xfrm>
-            <a:prstGeom prst="rect">
-              <a:avLst/>
-            </a:prstGeom>
-            <a:noFill/>
-          </p:spPr>
-          <p:txBody>
-            <a:bodyPr wrap="square" rtlCol="0">
-              <a:spAutoFit/>
-            </a:bodyPr>
-            <a:lstStyle/>
-            <a:p>
-              <a:r>
-                <a:rPr lang="en-US" sz="2000" dirty="0">
-                  <a:solidFill>
-                    <a:schemeClr val="accent5">
-                      <a:lumMod val="60000"/>
-                      <a:lumOff val="40000"/>
-                    </a:schemeClr>
-                  </a:solidFill>
-                </a:rPr>
-                <a:t>7</a:t>
-              </a:r>
-            </a:p>
-          </p:txBody>
-        </p:sp>
-        <p:sp>
-          <p:nvSpPr>
-            <p:cNvPr id="85" name="TextBox 84">
-              <a:extLst>
-                <a:ext uri="{FF2B5EF4-FFF2-40B4-BE49-F238E27FC236}">
-                  <a16:creationId xmlns:a16="http://schemas.microsoft.com/office/drawing/2014/main" id="{07421D98-9ACE-934A-A420-30B4BC9AEC31}"/>
-                </a:ext>
-              </a:extLst>
-            </p:cNvPr>
-            <p:cNvSpPr txBox="1"/>
-            <p:nvPr/>
-          </p:nvSpPr>
-          <p:spPr>
-            <a:xfrm>
-              <a:off x="6376965" y="4068428"/>
-              <a:ext cx="304800" cy="400110"/>
-            </a:xfrm>
-            <a:prstGeom prst="rect">
-              <a:avLst/>
-            </a:prstGeom>
-            <a:noFill/>
-          </p:spPr>
-          <p:txBody>
-            <a:bodyPr wrap="square" rtlCol="0">
-              <a:spAutoFit/>
-            </a:bodyPr>
-            <a:lstStyle/>
-            <a:p>
-              <a:r>
-                <a:rPr lang="en-US" sz="2000" dirty="0">
-                  <a:solidFill>
-                    <a:schemeClr val="accent5">
-                      <a:lumMod val="60000"/>
-                      <a:lumOff val="40000"/>
-                    </a:schemeClr>
-                  </a:solidFill>
-                </a:rPr>
-                <a:t>8</a:t>
-              </a:r>
-            </a:p>
-          </p:txBody>
-        </p:sp>
-        <p:sp>
-          <p:nvSpPr>
-            <p:cNvPr id="86" name="TextBox 85">
-              <a:extLst>
-                <a:ext uri="{FF2B5EF4-FFF2-40B4-BE49-F238E27FC236}">
-                  <a16:creationId xmlns:a16="http://schemas.microsoft.com/office/drawing/2014/main" id="{61B76186-8347-0B4C-8303-DF3A18E81494}"/>
-                </a:ext>
-              </a:extLst>
-            </p:cNvPr>
-            <p:cNvSpPr txBox="1"/>
-            <p:nvPr/>
-          </p:nvSpPr>
-          <p:spPr>
-            <a:xfrm>
-              <a:off x="7088968" y="4048329"/>
-              <a:ext cx="304800" cy="400110"/>
-            </a:xfrm>
-            <a:prstGeom prst="rect">
-              <a:avLst/>
-            </a:prstGeom>
-            <a:noFill/>
-          </p:spPr>
-          <p:txBody>
-            <a:bodyPr wrap="square" rtlCol="0">
-              <a:spAutoFit/>
-            </a:bodyPr>
-            <a:lstStyle/>
-            <a:p>
-              <a:r>
-                <a:rPr lang="en-US" sz="2000" dirty="0">
-                  <a:solidFill>
-                    <a:schemeClr val="accent5">
-                      <a:lumMod val="60000"/>
-                      <a:lumOff val="40000"/>
-                    </a:schemeClr>
-                  </a:solidFill>
-                </a:rPr>
-                <a:t>9</a:t>
-              </a:r>
-            </a:p>
-          </p:txBody>
-        </p:sp>
-        <p:sp>
-          <p:nvSpPr>
-            <p:cNvPr id="87" name="TextBox 86">
-              <a:extLst>
-                <a:ext uri="{FF2B5EF4-FFF2-40B4-BE49-F238E27FC236}">
-                  <a16:creationId xmlns:a16="http://schemas.microsoft.com/office/drawing/2014/main" id="{CAB55CE3-D900-D146-A9BD-347BBAC2E33D}"/>
-                </a:ext>
-              </a:extLst>
-            </p:cNvPr>
-            <p:cNvSpPr txBox="1"/>
-            <p:nvPr/>
-          </p:nvSpPr>
-          <p:spPr>
-            <a:xfrm>
-              <a:off x="7774240" y="4048329"/>
-              <a:ext cx="470458" cy="400110"/>
-            </a:xfrm>
-            <a:prstGeom prst="rect">
-              <a:avLst/>
-            </a:prstGeom>
-            <a:noFill/>
-          </p:spPr>
-          <p:txBody>
-            <a:bodyPr wrap="square" rtlCol="0">
-              <a:spAutoFit/>
-            </a:bodyPr>
-            <a:lstStyle/>
-            <a:p>
-              <a:r>
-                <a:rPr lang="en-US" sz="2000" dirty="0">
-                  <a:solidFill>
-                    <a:schemeClr val="accent5">
-                      <a:lumMod val="60000"/>
-                      <a:lumOff val="40000"/>
-                    </a:schemeClr>
-                  </a:solidFill>
-                </a:rPr>
-                <a:t>10</a:t>
-              </a:r>
-            </a:p>
-          </p:txBody>
-        </p:sp>
-        <p:sp>
-          <p:nvSpPr>
-            <p:cNvPr id="88" name="TextBox 87">
-              <a:extLst>
-                <a:ext uri="{FF2B5EF4-FFF2-40B4-BE49-F238E27FC236}">
-                  <a16:creationId xmlns:a16="http://schemas.microsoft.com/office/drawing/2014/main" id="{ACF162CA-D850-9646-ADAE-6AEB3A48440E}"/>
-                </a:ext>
-              </a:extLst>
-            </p:cNvPr>
-            <p:cNvSpPr txBox="1"/>
-            <p:nvPr/>
-          </p:nvSpPr>
-          <p:spPr>
-            <a:xfrm>
-              <a:off x="8874486" y="4043806"/>
-              <a:ext cx="522076" cy="400110"/>
-            </a:xfrm>
-            <a:prstGeom prst="rect">
-              <a:avLst/>
-            </a:prstGeom>
-            <a:noFill/>
-          </p:spPr>
-          <p:txBody>
-            <a:bodyPr wrap="square" rtlCol="0">
-              <a:spAutoFit/>
-            </a:bodyPr>
-            <a:lstStyle/>
-            <a:p>
-              <a:r>
-                <a:rPr lang="en-US" sz="2000" dirty="0">
-                  <a:solidFill>
-                    <a:schemeClr val="accent5">
-                      <a:lumMod val="60000"/>
-                      <a:lumOff val="40000"/>
-                    </a:schemeClr>
-                  </a:solidFill>
-                </a:rPr>
-                <a:t>11</a:t>
-              </a:r>
-            </a:p>
-          </p:txBody>
-        </p:sp>
-        <p:sp>
-          <p:nvSpPr>
-            <p:cNvPr id="89" name="TextBox 88">
-              <a:extLst>
-                <a:ext uri="{FF2B5EF4-FFF2-40B4-BE49-F238E27FC236}">
-                  <a16:creationId xmlns:a16="http://schemas.microsoft.com/office/drawing/2014/main" id="{694F0246-B401-EE4A-AA70-A82689B85E4D}"/>
-                </a:ext>
-              </a:extLst>
-            </p:cNvPr>
-            <p:cNvSpPr txBox="1"/>
-            <p:nvPr/>
-          </p:nvSpPr>
-          <p:spPr>
-            <a:xfrm>
-              <a:off x="9571441" y="4048329"/>
-              <a:ext cx="570494" cy="400110"/>
-            </a:xfrm>
-            <a:prstGeom prst="rect">
-              <a:avLst/>
-            </a:prstGeom>
-            <a:noFill/>
-          </p:spPr>
-          <p:txBody>
-            <a:bodyPr wrap="square" rtlCol="0">
-              <a:spAutoFit/>
-            </a:bodyPr>
-            <a:lstStyle/>
-            <a:p>
-              <a:r>
-                <a:rPr lang="en-US" sz="2000" dirty="0">
-                  <a:solidFill>
-                    <a:schemeClr val="accent5">
-                      <a:lumMod val="60000"/>
-                      <a:lumOff val="40000"/>
-                    </a:schemeClr>
-                  </a:solidFill>
-                </a:rPr>
-                <a:t>12</a:t>
-              </a:r>
-            </a:p>
-          </p:txBody>
-        </p:sp>
-        <p:sp>
-          <p:nvSpPr>
-            <p:cNvPr id="90" name="TextBox 89">
-              <a:extLst>
-                <a:ext uri="{FF2B5EF4-FFF2-40B4-BE49-F238E27FC236}">
-                  <a16:creationId xmlns:a16="http://schemas.microsoft.com/office/drawing/2014/main" id="{C6DE7ECB-F69E-924A-AA37-4AFB2551BA98}"/>
-                </a:ext>
-              </a:extLst>
-            </p:cNvPr>
-            <p:cNvSpPr txBox="1"/>
-            <p:nvPr/>
-          </p:nvSpPr>
-          <p:spPr>
-            <a:xfrm>
-              <a:off x="10315026" y="4050279"/>
-              <a:ext cx="508030" cy="400110"/>
-            </a:xfrm>
-            <a:prstGeom prst="rect">
-              <a:avLst/>
-            </a:prstGeom>
-            <a:noFill/>
-          </p:spPr>
-          <p:txBody>
-            <a:bodyPr wrap="square" rtlCol="0">
-              <a:spAutoFit/>
-            </a:bodyPr>
-            <a:lstStyle/>
-            <a:p>
-              <a:r>
-                <a:rPr lang="en-US" sz="2000" dirty="0">
-                  <a:solidFill>
-                    <a:schemeClr val="accent5">
-                      <a:lumMod val="60000"/>
-                      <a:lumOff val="40000"/>
-                    </a:schemeClr>
-                  </a:solidFill>
-                </a:rPr>
-                <a:t>13</a:t>
-              </a:r>
-            </a:p>
-          </p:txBody>
-        </p:sp>
-        <p:sp>
-          <p:nvSpPr>
-            <p:cNvPr id="91" name="TextBox 90">
-              <a:extLst>
-                <a:ext uri="{FF2B5EF4-FFF2-40B4-BE49-F238E27FC236}">
-                  <a16:creationId xmlns:a16="http://schemas.microsoft.com/office/drawing/2014/main" id="{C175E8FC-1AB3-2945-81A7-B44156728EC4}"/>
-                </a:ext>
-              </a:extLst>
-            </p:cNvPr>
-            <p:cNvSpPr txBox="1"/>
-            <p:nvPr/>
-          </p:nvSpPr>
-          <p:spPr>
-            <a:xfrm>
-              <a:off x="11104561" y="4050279"/>
-              <a:ext cx="510139" cy="400110"/>
-            </a:xfrm>
-            <a:prstGeom prst="rect">
-              <a:avLst/>
-            </a:prstGeom>
-            <a:noFill/>
-          </p:spPr>
-          <p:txBody>
-            <a:bodyPr wrap="square" rtlCol="0">
-              <a:spAutoFit/>
-            </a:bodyPr>
-            <a:lstStyle/>
-            <a:p>
-              <a:r>
-                <a:rPr lang="en-US" sz="2000" dirty="0">
-                  <a:solidFill>
-                    <a:schemeClr val="accent5">
-                      <a:lumMod val="60000"/>
-                      <a:lumOff val="40000"/>
-                    </a:schemeClr>
-                  </a:solidFill>
-                </a:rPr>
-                <a:t>14</a:t>
-              </a:r>
-            </a:p>
-          </p:txBody>
-        </p:sp>
-      </p:grpSp>
-    </p:spTree>
-    <p:extLst>
-      <p:ext uri="{BB962C8B-B14F-4D97-AF65-F5344CB8AC3E}">
-        <p14:creationId xmlns:p14="http://schemas.microsoft.com/office/powerpoint/2010/main" val="1376162537"/>
-      </p:ext>
-    </p:extLst>
-  </p:cSld>
-  <p:clrMapOvr>
-    <a:masterClrMapping/>
-  </p:clrMapOvr>
-  <p:timing>
-    <p:tnLst>
-      <p:par>
-        <p:cTn id="1" dur="indefinite" restart="never" nodeType="tmRoot">
-          <p:childTnLst>
-            <p:seq concurrent="1" nextAc="seek">
-              <p:cTn id="2" dur="indefinite" nodeType="mainSeq">
-                <p:childTnLst>
-                  <p:par>
-                    <p:cTn id="3" fill="hold">
-                      <p:stCondLst>
-                        <p:cond delay="indefinite"/>
-                      </p:stCondLst>
-                      <p:childTnLst>
-                        <p:par>
-                          <p:cTn id="4" fill="hold">
-                            <p:stCondLst>
-                              <p:cond delay="0"/>
-                            </p:stCondLst>
-                            <p:childTnLst>
-                              <p:par>
-                                <p:cTn id="5" presetID="10" presetClass="entr" presetSubtype="0" fill="hold" grpId="0" nodeType="clickEffect">
-                                  <p:stCondLst>
-                                    <p:cond delay="0"/>
-                                  </p:stCondLst>
-                                  <p:childTnLst>
-                                    <p:set>
-                                      <p:cBhvr>
-                                        <p:cTn id="6" dur="1" fill="hold">
-                                          <p:stCondLst>
-                                            <p:cond delay="0"/>
-                                          </p:stCondLst>
-                                        </p:cTn>
-                                        <p:tgtEl>
-                                          <p:spTgt spid="5"/>
-                                        </p:tgtEl>
-                                        <p:attrNameLst>
-                                          <p:attrName>style.visibility</p:attrName>
-                                        </p:attrNameLst>
-                                      </p:cBhvr>
-                                      <p:to>
-                                        <p:strVal val="visible"/>
-                                      </p:to>
-                                    </p:set>
-                                    <p:animEffect transition="in" filter="fade">
-                                      <p:cBhvr>
-                                        <p:cTn id="7" dur="500"/>
-                                        <p:tgtEl>
-                                          <p:spTgt spid="5"/>
-                                        </p:tgtEl>
-                                      </p:cBhvr>
-                                    </p:animEffect>
-                                  </p:childTnLst>
-                                </p:cTn>
-                              </p:par>
-                            </p:childTnLst>
-                          </p:cTn>
-                        </p:par>
-                        <p:par>
-                          <p:cTn id="8" fill="hold">
-                            <p:stCondLst>
-                              <p:cond delay="500"/>
-                            </p:stCondLst>
-                            <p:childTnLst>
-                              <p:par>
-                                <p:cTn id="9" presetID="10" presetClass="entr" presetSubtype="0" fill="hold" grpId="0" nodeType="afterEffect">
-                                  <p:stCondLst>
-                                    <p:cond delay="0"/>
-                                  </p:stCondLst>
-                                  <p:childTnLst>
-                                    <p:set>
-                                      <p:cBhvr>
-                                        <p:cTn id="10" dur="1" fill="hold">
-                                          <p:stCondLst>
-                                            <p:cond delay="0"/>
-                                          </p:stCondLst>
-                                        </p:cTn>
-                                        <p:tgtEl>
-                                          <p:spTgt spid="6"/>
-                                        </p:tgtEl>
-                                        <p:attrNameLst>
-                                          <p:attrName>style.visibility</p:attrName>
-                                        </p:attrNameLst>
-                                      </p:cBhvr>
-                                      <p:to>
-                                        <p:strVal val="visible"/>
-                                      </p:to>
-                                    </p:set>
-                                    <p:animEffect transition="in" filter="fade">
-                                      <p:cBhvr>
-                                        <p:cTn id="11" dur="500"/>
-                                        <p:tgtEl>
-                                          <p:spTgt spid="6"/>
-                                        </p:tgtEl>
-                                      </p:cBhvr>
-                                    </p:animEffect>
-                                  </p:childTnLst>
-                                </p:cTn>
-                              </p:par>
-                            </p:childTnLst>
-                          </p:cTn>
-                        </p:par>
-                        <p:par>
-                          <p:cTn id="12" fill="hold">
-                            <p:stCondLst>
-                              <p:cond delay="1000"/>
-                            </p:stCondLst>
-                            <p:childTnLst>
-                              <p:par>
-                                <p:cTn id="13" presetID="10" presetClass="entr" presetSubtype="0" fill="hold" grpId="0" nodeType="afterEffect">
-                                  <p:stCondLst>
-                                    <p:cond delay="0"/>
-                                  </p:stCondLst>
-                                  <p:childTnLst>
-                                    <p:set>
-                                      <p:cBhvr>
-                                        <p:cTn id="14" dur="1" fill="hold">
-                                          <p:stCondLst>
-                                            <p:cond delay="0"/>
-                                          </p:stCondLst>
-                                        </p:cTn>
-                                        <p:tgtEl>
-                                          <p:spTgt spid="7"/>
-                                        </p:tgtEl>
-                                        <p:attrNameLst>
-                                          <p:attrName>style.visibility</p:attrName>
-                                        </p:attrNameLst>
-                                      </p:cBhvr>
-                                      <p:to>
-                                        <p:strVal val="visible"/>
-                                      </p:to>
-                                    </p:set>
-                                    <p:animEffect transition="in" filter="fade">
-                                      <p:cBhvr>
-                                        <p:cTn id="15" dur="500"/>
-                                        <p:tgtEl>
-                                          <p:spTgt spid="7"/>
-                                        </p:tgtEl>
-                                      </p:cBhvr>
-                                    </p:animEffect>
-                                  </p:childTnLst>
-                                </p:cTn>
-                              </p:par>
-                            </p:childTnLst>
-                          </p:cTn>
-                        </p:par>
-                        <p:par>
-                          <p:cTn id="16" fill="hold">
-                            <p:stCondLst>
-                              <p:cond delay="1500"/>
-                            </p:stCondLst>
-                            <p:childTnLst>
-                              <p:par>
-                                <p:cTn id="17" presetID="10" presetClass="entr" presetSubtype="0" fill="hold" grpId="0" nodeType="afterEffect">
-                                  <p:stCondLst>
-                                    <p:cond delay="0"/>
-                                  </p:stCondLst>
-                                  <p:childTnLst>
-                                    <p:set>
-                                      <p:cBhvr>
-                                        <p:cTn id="18" dur="1" fill="hold">
-                                          <p:stCondLst>
-                                            <p:cond delay="0"/>
-                                          </p:stCondLst>
-                                        </p:cTn>
-                                        <p:tgtEl>
-                                          <p:spTgt spid="8"/>
-                                        </p:tgtEl>
-                                        <p:attrNameLst>
-                                          <p:attrName>style.visibility</p:attrName>
-                                        </p:attrNameLst>
-                                      </p:cBhvr>
-                                      <p:to>
-                                        <p:strVal val="visible"/>
-                                      </p:to>
-                                    </p:set>
-                                    <p:animEffect transition="in" filter="fade">
-                                      <p:cBhvr>
-                                        <p:cTn id="19" dur="500"/>
-                                        <p:tgtEl>
-                                          <p:spTgt spid="8"/>
-                                        </p:tgtEl>
-                                      </p:cBhvr>
-                                    </p:animEffect>
-                                  </p:childTnLst>
-                                </p:cTn>
-                              </p:par>
-                            </p:childTnLst>
-                          </p:cTn>
-                        </p:par>
-                        <p:par>
-                          <p:cTn id="20" fill="hold">
-                            <p:stCondLst>
-                              <p:cond delay="2000"/>
-                            </p:stCondLst>
-                            <p:childTnLst>
-                              <p:par>
-                                <p:cTn id="21" presetID="10" presetClass="entr" presetSubtype="0" fill="hold" grpId="0" nodeType="afterEffect">
-                                  <p:stCondLst>
-                                    <p:cond delay="0"/>
-                                  </p:stCondLst>
-                                  <p:childTnLst>
-                                    <p:set>
-                                      <p:cBhvr>
-                                        <p:cTn id="22" dur="1" fill="hold">
-                                          <p:stCondLst>
-                                            <p:cond delay="0"/>
-                                          </p:stCondLst>
-                                        </p:cTn>
-                                        <p:tgtEl>
-                                          <p:spTgt spid="9"/>
-                                        </p:tgtEl>
-                                        <p:attrNameLst>
-                                          <p:attrName>style.visibility</p:attrName>
-                                        </p:attrNameLst>
-                                      </p:cBhvr>
-                                      <p:to>
-                                        <p:strVal val="visible"/>
-                                      </p:to>
-                                    </p:set>
-                                    <p:animEffect transition="in" filter="fade">
-                                      <p:cBhvr>
-                                        <p:cTn id="23" dur="500"/>
-                                        <p:tgtEl>
-                                          <p:spTgt spid="9"/>
-                                        </p:tgtEl>
-                                      </p:cBhvr>
-                                    </p:animEffect>
-                                  </p:childTnLst>
-                                </p:cTn>
-                              </p:par>
-                            </p:childTnLst>
-                          </p:cTn>
-                        </p:par>
-                        <p:par>
-                          <p:cTn id="24" fill="hold">
-                            <p:stCondLst>
-                              <p:cond delay="2500"/>
-                            </p:stCondLst>
-                            <p:childTnLst>
-                              <p:par>
-                                <p:cTn id="25" presetID="10" presetClass="entr" presetSubtype="0" fill="hold" grpId="0" nodeType="afterEffect">
-                                  <p:stCondLst>
-                                    <p:cond delay="0"/>
-                                  </p:stCondLst>
-                                  <p:childTnLst>
-                                    <p:set>
-                                      <p:cBhvr>
-                                        <p:cTn id="26" dur="1" fill="hold">
-                                          <p:stCondLst>
-                                            <p:cond delay="0"/>
-                                          </p:stCondLst>
-                                        </p:cTn>
-                                        <p:tgtEl>
-                                          <p:spTgt spid="10"/>
-                                        </p:tgtEl>
-                                        <p:attrNameLst>
-                                          <p:attrName>style.visibility</p:attrName>
-                                        </p:attrNameLst>
-                                      </p:cBhvr>
-                                      <p:to>
-                                        <p:strVal val="visible"/>
-                                      </p:to>
-                                    </p:set>
-                                    <p:animEffect transition="in" filter="fade">
-                                      <p:cBhvr>
-                                        <p:cTn id="27" dur="500"/>
-                                        <p:tgtEl>
-                                          <p:spTgt spid="10"/>
-                                        </p:tgtEl>
-                                      </p:cBhvr>
-                                    </p:animEffect>
-                                  </p:childTnLst>
-                                </p:cTn>
-                              </p:par>
-                            </p:childTnLst>
-                          </p:cTn>
-                        </p:par>
-                        <p:par>
-                          <p:cTn id="28" fill="hold">
-                            <p:stCondLst>
-                              <p:cond delay="3000"/>
-                            </p:stCondLst>
-                            <p:childTnLst>
-                              <p:par>
-                                <p:cTn id="29" presetID="10" presetClass="entr" presetSubtype="0" fill="hold" grpId="0" nodeType="afterEffect">
-                                  <p:stCondLst>
-                                    <p:cond delay="0"/>
-                                  </p:stCondLst>
-                                  <p:childTnLst>
-                                    <p:set>
-                                      <p:cBhvr>
-                                        <p:cTn id="30" dur="1" fill="hold">
-                                          <p:stCondLst>
-                                            <p:cond delay="0"/>
-                                          </p:stCondLst>
-                                        </p:cTn>
-                                        <p:tgtEl>
-                                          <p:spTgt spid="11"/>
-                                        </p:tgtEl>
-                                        <p:attrNameLst>
-                                          <p:attrName>style.visibility</p:attrName>
-                                        </p:attrNameLst>
-                                      </p:cBhvr>
-                                      <p:to>
-                                        <p:strVal val="visible"/>
-                                      </p:to>
-                                    </p:set>
-                                    <p:animEffect transition="in" filter="fade">
-                                      <p:cBhvr>
-                                        <p:cTn id="31" dur="500"/>
-                                        <p:tgtEl>
-                                          <p:spTgt spid="11"/>
-                                        </p:tgtEl>
-                                      </p:cBhvr>
-                                    </p:animEffect>
-                                  </p:childTnLst>
-                                </p:cTn>
-                              </p:par>
-                            </p:childTnLst>
-                          </p:cTn>
-                        </p:par>
-                        <p:par>
-                          <p:cTn id="32" fill="hold">
-                            <p:stCondLst>
-                              <p:cond delay="3500"/>
-                            </p:stCondLst>
-                            <p:childTnLst>
-                              <p:par>
-                                <p:cTn id="33" presetID="10" presetClass="entr" presetSubtype="0" fill="hold" grpId="0" nodeType="afterEffect">
-                                  <p:stCondLst>
-                                    <p:cond delay="0"/>
-                                  </p:stCondLst>
-                                  <p:childTnLst>
-                                    <p:set>
-                                      <p:cBhvr>
-                                        <p:cTn id="34" dur="1" fill="hold">
-                                          <p:stCondLst>
-                                            <p:cond delay="0"/>
-                                          </p:stCondLst>
-                                        </p:cTn>
-                                        <p:tgtEl>
-                                          <p:spTgt spid="12"/>
-                                        </p:tgtEl>
-                                        <p:attrNameLst>
-                                          <p:attrName>style.visibility</p:attrName>
-                                        </p:attrNameLst>
-                                      </p:cBhvr>
-                                      <p:to>
-                                        <p:strVal val="visible"/>
-                                      </p:to>
-                                    </p:set>
-                                    <p:animEffect transition="in" filter="fade">
-                                      <p:cBhvr>
-                                        <p:cTn id="35" dur="500"/>
-                                        <p:tgtEl>
-                                          <p:spTgt spid="12"/>
-                                        </p:tgtEl>
-                                      </p:cBhvr>
-                                    </p:animEffect>
-                                  </p:childTnLst>
-                                </p:cTn>
-                              </p:par>
-                            </p:childTnLst>
-                          </p:cTn>
-                        </p:par>
-                        <p:par>
-                          <p:cTn id="36" fill="hold">
-                            <p:stCondLst>
-                              <p:cond delay="4000"/>
-                            </p:stCondLst>
-                            <p:childTnLst>
-                              <p:par>
-                                <p:cTn id="37" presetID="10" presetClass="entr" presetSubtype="0" fill="hold" grpId="0" nodeType="afterEffect">
-                                  <p:stCondLst>
-                                    <p:cond delay="0"/>
-                                  </p:stCondLst>
-                                  <p:childTnLst>
-                                    <p:set>
-                                      <p:cBhvr>
-                                        <p:cTn id="38" dur="1" fill="hold">
-                                          <p:stCondLst>
-                                            <p:cond delay="0"/>
-                                          </p:stCondLst>
-                                        </p:cTn>
-                                        <p:tgtEl>
-                                          <p:spTgt spid="13"/>
-                                        </p:tgtEl>
-                                        <p:attrNameLst>
-                                          <p:attrName>style.visibility</p:attrName>
-                                        </p:attrNameLst>
-                                      </p:cBhvr>
-                                      <p:to>
-                                        <p:strVal val="visible"/>
-                                      </p:to>
-                                    </p:set>
-                                    <p:animEffect transition="in" filter="fade">
-                                      <p:cBhvr>
-                                        <p:cTn id="39" dur="500"/>
-                                        <p:tgtEl>
-                                          <p:spTgt spid="13"/>
-                                        </p:tgtEl>
-                                      </p:cBhvr>
-                                    </p:animEffect>
-                                  </p:childTnLst>
-                                </p:cTn>
-                              </p:par>
-                            </p:childTnLst>
-                          </p:cTn>
-                        </p:par>
-                        <p:par>
-                          <p:cTn id="40" fill="hold">
-                            <p:stCondLst>
-                              <p:cond delay="4500"/>
-                            </p:stCondLst>
-                            <p:childTnLst>
-                              <p:par>
-                                <p:cTn id="41" presetID="10" presetClass="entr" presetSubtype="0" fill="hold" grpId="0" nodeType="afterEffect">
-                                  <p:stCondLst>
-                                    <p:cond delay="0"/>
-                                  </p:stCondLst>
-                                  <p:childTnLst>
-                                    <p:set>
-                                      <p:cBhvr>
-                                        <p:cTn id="42" dur="1" fill="hold">
-                                          <p:stCondLst>
-                                            <p:cond delay="0"/>
-                                          </p:stCondLst>
-                                        </p:cTn>
-                                        <p:tgtEl>
-                                          <p:spTgt spid="14"/>
-                                        </p:tgtEl>
-                                        <p:attrNameLst>
-                                          <p:attrName>style.visibility</p:attrName>
-                                        </p:attrNameLst>
-                                      </p:cBhvr>
-                                      <p:to>
-                                        <p:strVal val="visible"/>
-                                      </p:to>
-                                    </p:set>
-                                    <p:animEffect transition="in" filter="fade">
-                                      <p:cBhvr>
-                                        <p:cTn id="43" dur="500"/>
-                                        <p:tgtEl>
-                                          <p:spTgt spid="14"/>
-                                        </p:tgtEl>
-                                      </p:cBhvr>
-                                    </p:animEffect>
-                                  </p:childTnLst>
-                                </p:cTn>
-                              </p:par>
-                            </p:childTnLst>
-                          </p:cTn>
-                        </p:par>
-                        <p:par>
-                          <p:cTn id="44" fill="hold">
-                            <p:stCondLst>
-                              <p:cond delay="5000"/>
-                            </p:stCondLst>
-                            <p:childTnLst>
-                              <p:par>
-                                <p:cTn id="45" presetID="10" presetClass="entr" presetSubtype="0" fill="hold" grpId="0" nodeType="afterEffect">
-                                  <p:stCondLst>
-                                    <p:cond delay="0"/>
-                                  </p:stCondLst>
-                                  <p:childTnLst>
-                                    <p:set>
-                                      <p:cBhvr>
-                                        <p:cTn id="46" dur="1" fill="hold">
-                                          <p:stCondLst>
-                                            <p:cond delay="0"/>
-                                          </p:stCondLst>
-                                        </p:cTn>
-                                        <p:tgtEl>
-                                          <p:spTgt spid="15"/>
-                                        </p:tgtEl>
-                                        <p:attrNameLst>
-                                          <p:attrName>style.visibility</p:attrName>
-                                        </p:attrNameLst>
-                                      </p:cBhvr>
-                                      <p:to>
-                                        <p:strVal val="visible"/>
-                                      </p:to>
-                                    </p:set>
-                                    <p:animEffect transition="in" filter="fade">
-                                      <p:cBhvr>
-                                        <p:cTn id="47" dur="500"/>
-                                        <p:tgtEl>
-                                          <p:spTgt spid="15"/>
-                                        </p:tgtEl>
-                                      </p:cBhvr>
-                                    </p:animEffect>
-                                  </p:childTnLst>
-                                </p:cTn>
-                              </p:par>
-                            </p:childTnLst>
-                          </p:cTn>
-                        </p:par>
-                        <p:par>
-                          <p:cTn id="48" fill="hold">
-                            <p:stCondLst>
-                              <p:cond delay="5500"/>
-                            </p:stCondLst>
-                            <p:childTnLst>
-                              <p:par>
-                                <p:cTn id="49" presetID="10" presetClass="entr" presetSubtype="0" fill="hold" grpId="0" nodeType="afterEffect">
-                                  <p:stCondLst>
-                                    <p:cond delay="0"/>
-                                  </p:stCondLst>
-                                  <p:childTnLst>
-                                    <p:set>
-                                      <p:cBhvr>
-                                        <p:cTn id="50" dur="1" fill="hold">
-                                          <p:stCondLst>
-                                            <p:cond delay="0"/>
-                                          </p:stCondLst>
-                                        </p:cTn>
-                                        <p:tgtEl>
-                                          <p:spTgt spid="16"/>
-                                        </p:tgtEl>
-                                        <p:attrNameLst>
-                                          <p:attrName>style.visibility</p:attrName>
-                                        </p:attrNameLst>
-                                      </p:cBhvr>
-                                      <p:to>
-                                        <p:strVal val="visible"/>
-                                      </p:to>
-                                    </p:set>
-                                    <p:animEffect transition="in" filter="fade">
-                                      <p:cBhvr>
-                                        <p:cTn id="51" dur="500"/>
-                                        <p:tgtEl>
-                                          <p:spTgt spid="16"/>
-                                        </p:tgtEl>
-                                      </p:cBhvr>
-                                    </p:animEffect>
-                                  </p:childTnLst>
-                                </p:cTn>
-                              </p:par>
-                            </p:childTnLst>
-                          </p:cTn>
-                        </p:par>
-                        <p:par>
-                          <p:cTn id="52" fill="hold">
-                            <p:stCondLst>
-                              <p:cond delay="6000"/>
-                            </p:stCondLst>
-                            <p:childTnLst>
-                              <p:par>
-                                <p:cTn id="53" presetID="10" presetClass="entr" presetSubtype="0" fill="hold" grpId="0" nodeType="afterEffect">
-                                  <p:stCondLst>
-                                    <p:cond delay="0"/>
-                                  </p:stCondLst>
-                                  <p:childTnLst>
-                                    <p:set>
-                                      <p:cBhvr>
-                                        <p:cTn id="54" dur="1" fill="hold">
-                                          <p:stCondLst>
-                                            <p:cond delay="0"/>
-                                          </p:stCondLst>
-                                        </p:cTn>
-                                        <p:tgtEl>
-                                          <p:spTgt spid="17"/>
-                                        </p:tgtEl>
-                                        <p:attrNameLst>
-                                          <p:attrName>style.visibility</p:attrName>
-                                        </p:attrNameLst>
-                                      </p:cBhvr>
-                                      <p:to>
-                                        <p:strVal val="visible"/>
-                                      </p:to>
-                                    </p:set>
-                                    <p:animEffect transition="in" filter="fade">
-                                      <p:cBhvr>
-                                        <p:cTn id="55" dur="500"/>
-                                        <p:tgtEl>
-                                          <p:spTgt spid="17"/>
-                                        </p:tgtEl>
-                                      </p:cBhvr>
-                                    </p:animEffect>
-                                  </p:childTnLst>
-                                </p:cTn>
-                              </p:par>
-                            </p:childTnLst>
-                          </p:cTn>
-                        </p:par>
-                        <p:par>
-                          <p:cTn id="56" fill="hold">
-                            <p:stCondLst>
-                              <p:cond delay="6500"/>
-                            </p:stCondLst>
-                            <p:childTnLst>
-                              <p:par>
-                                <p:cTn id="57" presetID="10" presetClass="entr" presetSubtype="0" fill="hold" grpId="0" nodeType="afterEffect">
-                                  <p:stCondLst>
-                                    <p:cond delay="0"/>
-                                  </p:stCondLst>
-                                  <p:childTnLst>
-                                    <p:set>
-                                      <p:cBhvr>
-                                        <p:cTn id="58" dur="1" fill="hold">
-                                          <p:stCondLst>
-                                            <p:cond delay="0"/>
-                                          </p:stCondLst>
-                                        </p:cTn>
-                                        <p:tgtEl>
-                                          <p:spTgt spid="18"/>
-                                        </p:tgtEl>
-                                        <p:attrNameLst>
-                                          <p:attrName>style.visibility</p:attrName>
-                                        </p:attrNameLst>
-                                      </p:cBhvr>
-                                      <p:to>
-                                        <p:strVal val="visible"/>
-                                      </p:to>
-                                    </p:set>
-                                    <p:animEffect transition="in" filter="fade">
-                                      <p:cBhvr>
-                                        <p:cTn id="59" dur="500"/>
-                                        <p:tgtEl>
-                                          <p:spTgt spid="18"/>
-                                        </p:tgtEl>
-                                      </p:cBhvr>
-                                    </p:animEffect>
-                                  </p:childTnLst>
-                                </p:cTn>
-                              </p:par>
-                            </p:childTnLst>
-                          </p:cTn>
-                        </p:par>
-                        <p:par>
-                          <p:cTn id="60" fill="hold">
-                            <p:stCondLst>
-                              <p:cond delay="7000"/>
-                            </p:stCondLst>
-                            <p:childTnLst>
-                              <p:par>
-                                <p:cTn id="61" presetID="10" presetClass="entr" presetSubtype="0" fill="hold" grpId="0" nodeType="afterEffect">
-                                  <p:stCondLst>
-                                    <p:cond delay="0"/>
-                                  </p:stCondLst>
-                                  <p:childTnLst>
-                                    <p:set>
-                                      <p:cBhvr>
-                                        <p:cTn id="62" dur="1" fill="hold">
-                                          <p:stCondLst>
-                                            <p:cond delay="0"/>
-                                          </p:stCondLst>
-                                        </p:cTn>
-                                        <p:tgtEl>
-                                          <p:spTgt spid="19"/>
-                                        </p:tgtEl>
-                                        <p:attrNameLst>
-                                          <p:attrName>style.visibility</p:attrName>
-                                        </p:attrNameLst>
-                                      </p:cBhvr>
-                                      <p:to>
-                                        <p:strVal val="visible"/>
-                                      </p:to>
-                                    </p:set>
-                                    <p:animEffect transition="in" filter="fade">
-                                      <p:cBhvr>
-                                        <p:cTn id="63" dur="500"/>
-                                        <p:tgtEl>
-                                          <p:spTgt spid="19"/>
-                                        </p:tgtEl>
-                                      </p:cBhvr>
-                                    </p:animEffect>
-                                  </p:childTnLst>
-                                </p:cTn>
-                              </p:par>
-                            </p:childTnLst>
-                          </p:cTn>
-                        </p:par>
-                      </p:childTnLst>
-                    </p:cTn>
-                  </p:par>
-                </p:childTnLst>
-              </p:cTn>
-              <p:prevCondLst>
-                <p:cond evt="onPrev" delay="0">
-                  <p:tgtEl>
-                    <p:sldTgt/>
-                  </p:tgtEl>
-                </p:cond>
-              </p:prevCondLst>
-              <p:nextCondLst>
-                <p:cond evt="onNext" delay="0">
-                  <p:tgtEl>
-                    <p:sldTgt/>
-                  </p:tgtEl>
-                </p:cond>
-              </p:nextCondLst>
-            </p:seq>
-          </p:childTnLst>
-        </p:cTn>
-      </p:par>
-    </p:tnLst>
-    <p:bldLst>
-      <p:bldP spid="5" grpId="0"/>
-      <p:bldP spid="6" grpId="0"/>
-      <p:bldP spid="7" grpId="0"/>
-      <p:bldP spid="8" grpId="0"/>
-      <p:bldP spid="9" grpId="0"/>
-      <p:bldP spid="10" grpId="0"/>
-      <p:bldP spid="11" grpId="0"/>
-      <p:bldP spid="12" grpId="0"/>
-      <p:bldP spid="13" grpId="0"/>
-      <p:bldP spid="14" grpId="0"/>
-      <p:bldP spid="15" grpId="0"/>
-      <p:bldP spid="16" grpId="0"/>
-      <p:bldP spid="17" grpId="0"/>
-      <p:bldP spid="18" grpId="0"/>
-      <p:bldP spid="19" grpId="0"/>
-    </p:bldLst>
-  </p:timing>
-</p:sld>
-</file>
-
-<file path=ppt/slides/slide18.xml><?xml version="1.0" encoding="utf-8"?>
-<p:sld xmlns:a="http://schemas.openxmlformats.org/drawingml/2006/main" xmlns:r="http://schemas.openxmlformats.org/officeDocument/2006/relationships" xmlns:p="http://schemas.openxmlformats.org/presentationml/2006/main">
-  <p:cSld>
-    <p:spTree>
-      <p:nvGrpSpPr>
-        <p:cNvPr id="1" name=""/>
-        <p:cNvGrpSpPr/>
-        <p:nvPr/>
-      </p:nvGrpSpPr>
-      <p:grpSpPr>
-        <a:xfrm>
-          <a:off x="0" y="0"/>
-          <a:ext cx="0" cy="0"/>
-          <a:chOff x="0" y="0"/>
-          <a:chExt cx="0" cy="0"/>
-        </a:xfrm>
-      </p:grpSpPr>
-      <p:sp>
-        <p:nvSpPr>
-          <p:cNvPr id="2" name="Title 1"/>
-          <p:cNvSpPr>
-            <a:spLocks noGrp="1"/>
-          </p:cNvSpPr>
-          <p:nvPr>
-            <p:ph type="title"/>
-          </p:nvPr>
-        </p:nvSpPr>
-        <p:spPr>
-          <a:xfrm>
-            <a:off x="1141413" y="213001"/>
-            <a:ext cx="9905998" cy="859450"/>
-          </a:xfrm>
-        </p:spPr>
-        <p:txBody>
-          <a:bodyPr/>
-          <a:lstStyle/>
-          <a:p>
-            <a:pPr algn="ctr"/>
-            <a:r>
-              <a:rPr lang="en-US" dirty="0"/>
-              <a:t>Listing all strings</a:t>
-            </a:r>
-          </a:p>
-        </p:txBody>
-      </p:sp>
-      <mc:AlternateContent xmlns:mc="http://schemas.openxmlformats.org/markup-compatibility/2006" xmlns:a14="http://schemas.microsoft.com/office/drawing/2010/main">
-        <mc:Choice Requires="a14">
-          <p:sp>
-            <p:nvSpPr>
-              <p:cNvPr id="3" name="Content Placeholder 2"/>
-              <p:cNvSpPr>
-                <a:spLocks noGrp="1"/>
-              </p:cNvSpPr>
-              <p:nvPr>
-                <p:ph idx="1"/>
-              </p:nvPr>
-            </p:nvSpPr>
-            <p:spPr>
-              <a:xfrm>
                 <a:off x="1041312" y="4847188"/>
                 <a:ext cx="10006099" cy="1649865"/>
               </a:xfrm>
@@ -19457,7 +15688,7 @@
           <a:p>
             <a:fld id="{9BB9F8D7-E2A3-4222-BD86-A63794DF33E7}" type="slidenum">
               <a:rPr lang="en-US" smtClean="0"/>
-              <a:t>18</a:t>
+              <a:t>17</a:t>
             </a:fld>
             <a:endParaRPr lang="en-US"/>
           </a:p>
@@ -21568,7 +17799,7 @@
 </p:sld>
 </file>
 
-<file path=ppt/slides/slide19.xml><?xml version="1.0" encoding="utf-8"?>
+<file path=ppt/slides/slide18.xml><?xml version="1.0" encoding="utf-8"?>
 <p:sld xmlns:a="http://schemas.openxmlformats.org/drawingml/2006/main" xmlns:r="http://schemas.openxmlformats.org/officeDocument/2006/relationships" xmlns:p="http://schemas.openxmlformats.org/presentationml/2006/main">
   <p:cSld>
     <p:spTree>
@@ -21712,7 +17943,7 @@
           <a:p>
             <a:fld id="{9BB9F8D7-E2A3-4222-BD86-A63794DF33E7}" type="slidenum">
               <a:rPr lang="en-US" smtClean="0"/>
-              <a:t>19</a:t>
+              <a:t>18</a:t>
             </a:fld>
             <a:endParaRPr lang="en-US"/>
           </a:p>
@@ -23823,6 +20054,457 @@
 </p:sld>
 </file>
 
+<file path=ppt/slides/slide19.xml><?xml version="1.0" encoding="utf-8"?>
+<p:sld xmlns:a="http://schemas.openxmlformats.org/drawingml/2006/main" xmlns:r="http://schemas.openxmlformats.org/officeDocument/2006/relationships" xmlns:p="http://schemas.openxmlformats.org/presentationml/2006/main">
+  <p:cSld>
+    <p:spTree>
+      <p:nvGrpSpPr>
+        <p:cNvPr id="1" name=""/>
+        <p:cNvGrpSpPr/>
+        <p:nvPr/>
+      </p:nvGrpSpPr>
+      <p:grpSpPr>
+        <a:xfrm>
+          <a:off x="0" y="0"/>
+          <a:ext cx="0" cy="0"/>
+          <a:chOff x="0" y="0"/>
+          <a:chExt cx="0" cy="0"/>
+        </a:xfrm>
+      </p:grpSpPr>
+      <p:sp>
+        <p:nvSpPr>
+          <p:cNvPr id="2" name="Title 1">
+            <a:extLst>
+              <a:ext uri="{FF2B5EF4-FFF2-40B4-BE49-F238E27FC236}">
+                <a16:creationId xmlns:a16="http://schemas.microsoft.com/office/drawing/2014/main" id="{08E0B0D7-EDA1-49F7-A7D2-67C8E4796135}"/>
+              </a:ext>
+            </a:extLst>
+          </p:cNvPr>
+          <p:cNvSpPr>
+            <a:spLocks noGrp="1"/>
+          </p:cNvSpPr>
+          <p:nvPr>
+            <p:ph type="title"/>
+          </p:nvPr>
+        </p:nvSpPr>
+        <p:spPr>
+          <a:xfrm>
+            <a:off x="1141413" y="205051"/>
+            <a:ext cx="9905998" cy="1289795"/>
+          </a:xfrm>
+        </p:spPr>
+        <p:txBody>
+          <a:bodyPr>
+            <a:normAutofit/>
+          </a:bodyPr>
+          <a:lstStyle/>
+          <a:p>
+            <a:pPr algn="ctr"/>
+            <a:r>
+              <a:rPr lang="en-US" dirty="0"/>
+              <a:t>Demonstrate that each of the following is countable</a:t>
+            </a:r>
+          </a:p>
+        </p:txBody>
+      </p:sp>
+      <mc:AlternateContent xmlns:mc="http://schemas.openxmlformats.org/markup-compatibility/2006" xmlns:a14="http://schemas.microsoft.com/office/drawing/2010/main">
+        <mc:Choice Requires="a14">
+          <p:sp>
+            <p:nvSpPr>
+              <p:cNvPr id="3" name="Content Placeholder 2">
+                <a:extLst>
+                  <a:ext uri="{FF2B5EF4-FFF2-40B4-BE49-F238E27FC236}">
+                    <a16:creationId xmlns:a16="http://schemas.microsoft.com/office/drawing/2014/main" id="{369A19D1-C136-42F3-970A-50C610E3ED37}"/>
+                  </a:ext>
+                </a:extLst>
+              </p:cNvPr>
+              <p:cNvSpPr>
+                <a:spLocks noGrp="1"/>
+              </p:cNvSpPr>
+              <p:nvPr>
+                <p:ph idx="1"/>
+              </p:nvPr>
+            </p:nvSpPr>
+            <p:spPr>
+              <a:xfrm>
+                <a:off x="4613945" y="2074558"/>
+                <a:ext cx="2960934" cy="3541714"/>
+              </a:xfrm>
+            </p:spPr>
+            <p:txBody>
+              <a:bodyPr>
+                <a:normAutofit/>
+              </a:bodyPr>
+              <a:lstStyle/>
+              <a:p>
+                <a14:m>
+                  <m:oMath xmlns:m="http://schemas.openxmlformats.org/officeDocument/2006/math">
+                    <m:sSup>
+                      <m:sSupPr>
+                        <m:ctrlPr>
+                          <a:rPr lang="en-US" b="0" i="1" smtClean="0">
+                            <a:latin typeface="Cambria Math" panose="02040503050406030204" pitchFamily="18" charset="0"/>
+                          </a:rPr>
+                        </m:ctrlPr>
+                      </m:sSupPr>
+                      <m:e>
+                        <m:r>
+                          <a:rPr lang="en-US" b="0" i="1" smtClean="0">
+                            <a:latin typeface="Cambria Math" panose="02040503050406030204" pitchFamily="18" charset="0"/>
+                          </a:rPr>
+                          <m:t>ℤ</m:t>
+                        </m:r>
+                      </m:e>
+                      <m:sup>
+                        <m:r>
+                          <a:rPr lang="en-US" b="0" i="1" smtClean="0">
+                            <a:latin typeface="Cambria Math" panose="02040503050406030204" pitchFamily="18" charset="0"/>
+                          </a:rPr>
+                          <m:t>+</m:t>
+                        </m:r>
+                      </m:sup>
+                    </m:sSup>
+                    <m:r>
+                      <a:rPr lang="en-US" b="0" i="1" smtClean="0">
+                        <a:latin typeface="Cambria Math" panose="02040503050406030204" pitchFamily="18" charset="0"/>
+                      </a:rPr>
+                      <m:t>=</m:t>
+                    </m:r>
+                    <m:r>
+                      <a:rPr lang="en-US" b="0" i="1" smtClean="0">
+                        <a:latin typeface="Cambria Math" panose="02040503050406030204" pitchFamily="18" charset="0"/>
+                      </a:rPr>
+                      <m:t>ℕ</m:t>
+                    </m:r>
+                    <m:r>
+                      <a:rPr lang="en-US" b="0" i="1" smtClean="0">
+                        <a:latin typeface="Cambria Math" panose="02040503050406030204" pitchFamily="18" charset="0"/>
+                      </a:rPr>
+                      <m:t>∖</m:t>
+                    </m:r>
+                    <m:d>
+                      <m:dPr>
+                        <m:begChr m:val="{"/>
+                        <m:endChr m:val="}"/>
+                        <m:ctrlPr>
+                          <a:rPr lang="en-US" b="0" i="1" smtClean="0">
+                            <a:latin typeface="Cambria Math" panose="02040503050406030204" pitchFamily="18" charset="0"/>
+                          </a:rPr>
+                        </m:ctrlPr>
+                      </m:dPr>
+                      <m:e>
+                        <m:r>
+                          <a:rPr lang="en-US" b="0" i="1" smtClean="0">
+                            <a:latin typeface="Cambria Math" panose="02040503050406030204" pitchFamily="18" charset="0"/>
+                          </a:rPr>
+                          <m:t>0</m:t>
+                        </m:r>
+                      </m:e>
+                    </m:d>
+                  </m:oMath>
+                </a14:m>
+                <a:endParaRPr lang="en-US" b="0" i="1" dirty="0">
+                  <a:latin typeface="Cambria Math" panose="02040503050406030204" pitchFamily="18" charset="0"/>
+                </a:endParaRPr>
+              </a:p>
+              <a:p>
+                <a14:m>
+                  <m:oMath xmlns:m="http://schemas.openxmlformats.org/officeDocument/2006/math">
+                    <m:r>
+                      <a:rPr lang="en-US" b="0" i="1" smtClean="0">
+                        <a:latin typeface="Cambria Math" panose="02040503050406030204" pitchFamily="18" charset="0"/>
+                      </a:rPr>
+                      <m:t>{</m:t>
+                    </m:r>
+                    <m:r>
+                      <a:rPr lang="en-US" b="0" i="1" smtClean="0">
+                        <a:latin typeface="Cambria Math" panose="02040503050406030204" pitchFamily="18" charset="0"/>
+                      </a:rPr>
+                      <m:t>𝑛</m:t>
+                    </m:r>
+                    <m:r>
+                      <a:rPr lang="en-US" b="0" i="1" smtClean="0">
+                        <a:latin typeface="Cambria Math" panose="02040503050406030204" pitchFamily="18" charset="0"/>
+                      </a:rPr>
+                      <m:t>∈</m:t>
+                    </m:r>
+                    <m:r>
+                      <a:rPr lang="en-US" b="0" i="1" smtClean="0">
+                        <a:latin typeface="Cambria Math" panose="02040503050406030204" pitchFamily="18" charset="0"/>
+                      </a:rPr>
+                      <m:t>ℕ</m:t>
+                    </m:r>
+                    <m:r>
+                      <a:rPr lang="en-US" b="0" i="1" smtClean="0">
+                        <a:latin typeface="Cambria Math" panose="02040503050406030204" pitchFamily="18" charset="0"/>
+                      </a:rPr>
+                      <m:t>|</m:t>
+                    </m:r>
+                    <m:r>
+                      <a:rPr lang="en-US" b="0" i="1" smtClean="0">
+                        <a:latin typeface="Cambria Math" panose="02040503050406030204" pitchFamily="18" charset="0"/>
+                      </a:rPr>
+                      <m:t>𝑛</m:t>
+                    </m:r>
+                    <m:r>
+                      <a:rPr lang="en-US" b="0" i="1" smtClean="0">
+                        <a:latin typeface="Cambria Math" panose="02040503050406030204" pitchFamily="18" charset="0"/>
+                      </a:rPr>
+                      <m:t> </m:t>
+                    </m:r>
+                    <m:r>
+                      <m:rPr>
+                        <m:sty m:val="p"/>
+                      </m:rPr>
+                      <a:rPr lang="en-US" b="0" i="0" smtClean="0">
+                        <a:latin typeface="Cambria Math" panose="02040503050406030204" pitchFamily="18" charset="0"/>
+                      </a:rPr>
+                      <m:t>is</m:t>
+                    </m:r>
+                    <m:r>
+                      <a:rPr lang="en-US" b="0" i="0" smtClean="0">
+                        <a:latin typeface="Cambria Math" panose="02040503050406030204" pitchFamily="18" charset="0"/>
+                      </a:rPr>
+                      <m:t> </m:t>
+                    </m:r>
+                    <m:r>
+                      <m:rPr>
+                        <m:sty m:val="p"/>
+                      </m:rPr>
+                      <a:rPr lang="en-US" b="0" i="0" smtClean="0">
+                        <a:latin typeface="Cambria Math" panose="02040503050406030204" pitchFamily="18" charset="0"/>
+                      </a:rPr>
+                      <m:t>even</m:t>
+                    </m:r>
+                    <m:r>
+                      <a:rPr lang="en-US" b="0" i="1" smtClean="0">
+                        <a:latin typeface="Cambria Math" panose="02040503050406030204" pitchFamily="18" charset="0"/>
+                      </a:rPr>
+                      <m:t>}</m:t>
+                    </m:r>
+                  </m:oMath>
+                </a14:m>
+                <a:endParaRPr lang="en-US" dirty="0"/>
+              </a:p>
+              <a:p>
+                <a14:m>
+                  <m:oMath xmlns:m="http://schemas.openxmlformats.org/officeDocument/2006/math">
+                    <m:r>
+                      <a:rPr lang="en-US" b="0" i="1" smtClean="0">
+                        <a:latin typeface="Cambria Math" panose="02040503050406030204" pitchFamily="18" charset="0"/>
+                      </a:rPr>
+                      <m:t>{</m:t>
+                    </m:r>
+                    <m:r>
+                      <a:rPr lang="en-US" b="0" i="1" smtClean="0">
+                        <a:latin typeface="Cambria Math" panose="02040503050406030204" pitchFamily="18" charset="0"/>
+                      </a:rPr>
+                      <m:t>𝑛</m:t>
+                    </m:r>
+                    <m:r>
+                      <a:rPr lang="en-US" b="0" i="1" smtClean="0">
+                        <a:latin typeface="Cambria Math" panose="02040503050406030204" pitchFamily="18" charset="0"/>
+                      </a:rPr>
+                      <m:t>∈</m:t>
+                    </m:r>
+                    <m:r>
+                      <a:rPr lang="en-US" b="0" i="1" smtClean="0">
+                        <a:latin typeface="Cambria Math" panose="02040503050406030204" pitchFamily="18" charset="0"/>
+                      </a:rPr>
+                      <m:t>ℕ</m:t>
+                    </m:r>
+                    <m:r>
+                      <a:rPr lang="en-US" b="0" i="1" smtClean="0">
+                        <a:latin typeface="Cambria Math" panose="02040503050406030204" pitchFamily="18" charset="0"/>
+                      </a:rPr>
+                      <m:t>|</m:t>
+                    </m:r>
+                    <m:r>
+                      <a:rPr lang="en-US" b="0" i="1" smtClean="0">
+                        <a:latin typeface="Cambria Math" panose="02040503050406030204" pitchFamily="18" charset="0"/>
+                      </a:rPr>
+                      <m:t>𝑛</m:t>
+                    </m:r>
+                    <m:r>
+                      <a:rPr lang="en-US" b="0" i="1" smtClean="0">
+                        <a:latin typeface="Cambria Math" panose="02040503050406030204" pitchFamily="18" charset="0"/>
+                      </a:rPr>
+                      <m:t> </m:t>
+                    </m:r>
+                    <m:r>
+                      <m:rPr>
+                        <m:sty m:val="p"/>
+                      </m:rPr>
+                      <a:rPr lang="en-US" b="0" i="0" smtClean="0">
+                        <a:latin typeface="Cambria Math" panose="02040503050406030204" pitchFamily="18" charset="0"/>
+                      </a:rPr>
+                      <m:t>is</m:t>
+                    </m:r>
+                    <m:r>
+                      <a:rPr lang="en-US" b="0" i="0" smtClean="0">
+                        <a:latin typeface="Cambria Math" panose="02040503050406030204" pitchFamily="18" charset="0"/>
+                      </a:rPr>
+                      <m:t> </m:t>
+                    </m:r>
+                    <m:r>
+                      <m:rPr>
+                        <m:sty m:val="p"/>
+                      </m:rPr>
+                      <a:rPr lang="en-US" b="0" i="0" smtClean="0">
+                        <a:latin typeface="Cambria Math" panose="02040503050406030204" pitchFamily="18" charset="0"/>
+                      </a:rPr>
+                      <m:t>odd</m:t>
+                    </m:r>
+                    <m:r>
+                      <a:rPr lang="en-US" b="0" i="1" smtClean="0">
+                        <a:latin typeface="Cambria Math" panose="02040503050406030204" pitchFamily="18" charset="0"/>
+                      </a:rPr>
+                      <m:t>}</m:t>
+                    </m:r>
+                  </m:oMath>
+                </a14:m>
+                <a:endParaRPr lang="en-US" dirty="0"/>
+              </a:p>
+              <a:p>
+                <a14:m>
+                  <m:oMath xmlns:m="http://schemas.openxmlformats.org/officeDocument/2006/math">
+                    <m:r>
+                      <a:rPr lang="en-US" b="0" i="1" smtClean="0">
+                        <a:latin typeface="Cambria Math" panose="02040503050406030204" pitchFamily="18" charset="0"/>
+                      </a:rPr>
+                      <m:t>ℤ</m:t>
+                    </m:r>
+                  </m:oMath>
+                </a14:m>
+                <a:endParaRPr lang="en-US" dirty="0"/>
+              </a:p>
+              <a:p>
+                <a14:m>
+                  <m:oMath xmlns:m="http://schemas.openxmlformats.org/officeDocument/2006/math">
+                    <m:r>
+                      <a:rPr lang="en-US" b="0" i="1" smtClean="0">
+                        <a:latin typeface="Cambria Math" panose="02040503050406030204" pitchFamily="18" charset="0"/>
+                      </a:rPr>
+                      <m:t>ℕ</m:t>
+                    </m:r>
+                    <m:r>
+                      <a:rPr lang="en-US" b="0" i="1" smtClean="0">
+                        <a:latin typeface="Cambria Math" panose="02040503050406030204" pitchFamily="18" charset="0"/>
+                      </a:rPr>
+                      <m:t>×</m:t>
+                    </m:r>
+                    <m:r>
+                      <a:rPr lang="en-US" b="0" i="1" smtClean="0">
+                        <a:latin typeface="Cambria Math" panose="02040503050406030204" pitchFamily="18" charset="0"/>
+                      </a:rPr>
+                      <m:t>ℕ</m:t>
+                    </m:r>
+                  </m:oMath>
+                </a14:m>
+                <a:endParaRPr lang="en-US" dirty="0"/>
+              </a:p>
+              <a:p>
+                <a14:m>
+                  <m:oMath xmlns:m="http://schemas.openxmlformats.org/officeDocument/2006/math">
+                    <m:r>
+                      <a:rPr lang="en-US" b="0" i="1" smtClean="0">
+                        <a:latin typeface="Cambria Math" panose="02040503050406030204" pitchFamily="18" charset="0"/>
+                      </a:rPr>
+                      <m:t>ℚ</m:t>
+                    </m:r>
+                  </m:oMath>
+                </a14:m>
+                <a:endParaRPr lang="en-US" dirty="0"/>
+              </a:p>
+            </p:txBody>
+          </p:sp>
+        </mc:Choice>
+        <mc:Fallback xmlns="">
+          <p:sp>
+            <p:nvSpPr>
+              <p:cNvPr id="3" name="Content Placeholder 2">
+                <a:extLst>
+                  <a:ext uri="{FF2B5EF4-FFF2-40B4-BE49-F238E27FC236}">
+                    <a16:creationId xmlns:a16="http://schemas.microsoft.com/office/drawing/2014/main" id="{369A19D1-C136-42F3-970A-50C610E3ED37}"/>
+                  </a:ext>
+                </a:extLst>
+              </p:cNvPr>
+              <p:cNvSpPr>
+                <a:spLocks noGrp="1" noRot="1" noChangeAspect="1" noMove="1" noResize="1" noEditPoints="1" noAdjustHandles="1" noChangeArrowheads="1" noChangeShapeType="1" noTextEdit="1"/>
+              </p:cNvSpPr>
+              <p:nvPr>
+                <p:ph idx="1"/>
+              </p:nvPr>
+            </p:nvSpPr>
+            <p:spPr>
+              <a:xfrm>
+                <a:off x="4613945" y="2074558"/>
+                <a:ext cx="2960934" cy="3541714"/>
+              </a:xfrm>
+              <a:blipFill>
+                <a:blip r:embed="rId2"/>
+                <a:stretch>
+                  <a:fillRect l="-3846" t="-1786"/>
+                </a:stretch>
+              </a:blipFill>
+            </p:spPr>
+            <p:txBody>
+              <a:bodyPr/>
+              <a:lstStyle/>
+              <a:p>
+                <a:r>
+                  <a:rPr lang="en-US">
+                    <a:noFill/>
+                  </a:rPr>
+                  <a:t> </a:t>
+                </a:r>
+              </a:p>
+            </p:txBody>
+          </p:sp>
+        </mc:Fallback>
+      </mc:AlternateContent>
+      <p:sp>
+        <p:nvSpPr>
+          <p:cNvPr id="4" name="Slide Number Placeholder 3">
+            <a:extLst>
+              <a:ext uri="{FF2B5EF4-FFF2-40B4-BE49-F238E27FC236}">
+                <a16:creationId xmlns:a16="http://schemas.microsoft.com/office/drawing/2014/main" id="{38094FDB-0592-493E-A04B-1242E8FD5520}"/>
+              </a:ext>
+            </a:extLst>
+          </p:cNvPr>
+          <p:cNvSpPr>
+            <a:spLocks noGrp="1"/>
+          </p:cNvSpPr>
+          <p:nvPr>
+            <p:ph type="sldNum" sz="quarter" idx="12"/>
+          </p:nvPr>
+        </p:nvSpPr>
+        <p:spPr/>
+        <p:txBody>
+          <a:bodyPr/>
+          <a:lstStyle/>
+          <a:p>
+            <a:fld id="{9BB9F8D7-E2A3-4222-BD86-A63794DF33E7}" type="slidenum">
+              <a:rPr lang="en-US" smtClean="0"/>
+              <a:t>19</a:t>
+            </a:fld>
+            <a:endParaRPr lang="en-US"/>
+          </a:p>
+        </p:txBody>
+      </p:sp>
+    </p:spTree>
+    <p:extLst>
+      <p:ext uri="{BB962C8B-B14F-4D97-AF65-F5344CB8AC3E}">
+        <p14:creationId xmlns:p14="http://schemas.microsoft.com/office/powerpoint/2010/main" val="1241525711"/>
+      </p:ext>
+    </p:extLst>
+  </p:cSld>
+  <p:clrMapOvr>
+    <a:masterClrMapping/>
+  </p:clrMapOvr>
+</p:sld>
+</file>
+
 <file path=ppt/slides/slide2.xml><?xml version="1.0" encoding="utf-8"?>
 <p:sld xmlns:a="http://schemas.openxmlformats.org/drawingml/2006/main" xmlns:r="http://schemas.openxmlformats.org/officeDocument/2006/relationships" xmlns:p="http://schemas.openxmlformats.org/presentationml/2006/main">
   <p:cSld>
@@ -24346,457 +21028,6 @@
           <a:chExt cx="0" cy="0"/>
         </a:xfrm>
       </p:grpSpPr>
-      <p:sp>
-        <p:nvSpPr>
-          <p:cNvPr id="2" name="Title 1">
-            <a:extLst>
-              <a:ext uri="{FF2B5EF4-FFF2-40B4-BE49-F238E27FC236}">
-                <a16:creationId xmlns:a16="http://schemas.microsoft.com/office/drawing/2014/main" id="{08E0B0D7-EDA1-49F7-A7D2-67C8E4796135}"/>
-              </a:ext>
-            </a:extLst>
-          </p:cNvPr>
-          <p:cNvSpPr>
-            <a:spLocks noGrp="1"/>
-          </p:cNvSpPr>
-          <p:nvPr>
-            <p:ph type="title"/>
-          </p:nvPr>
-        </p:nvSpPr>
-        <p:spPr>
-          <a:xfrm>
-            <a:off x="1141413" y="205051"/>
-            <a:ext cx="9905998" cy="1289795"/>
-          </a:xfrm>
-        </p:spPr>
-        <p:txBody>
-          <a:bodyPr>
-            <a:normAutofit/>
-          </a:bodyPr>
-          <a:lstStyle/>
-          <a:p>
-            <a:pPr algn="ctr"/>
-            <a:r>
-              <a:rPr lang="en-US" dirty="0"/>
-              <a:t>Demonstrate that each of the following is countable</a:t>
-            </a:r>
-          </a:p>
-        </p:txBody>
-      </p:sp>
-      <mc:AlternateContent xmlns:mc="http://schemas.openxmlformats.org/markup-compatibility/2006" xmlns:a14="http://schemas.microsoft.com/office/drawing/2010/main">
-        <mc:Choice Requires="a14">
-          <p:sp>
-            <p:nvSpPr>
-              <p:cNvPr id="3" name="Content Placeholder 2">
-                <a:extLst>
-                  <a:ext uri="{FF2B5EF4-FFF2-40B4-BE49-F238E27FC236}">
-                    <a16:creationId xmlns:a16="http://schemas.microsoft.com/office/drawing/2014/main" id="{369A19D1-C136-42F3-970A-50C610E3ED37}"/>
-                  </a:ext>
-                </a:extLst>
-              </p:cNvPr>
-              <p:cNvSpPr>
-                <a:spLocks noGrp="1"/>
-              </p:cNvSpPr>
-              <p:nvPr>
-                <p:ph idx="1"/>
-              </p:nvPr>
-            </p:nvSpPr>
-            <p:spPr>
-              <a:xfrm>
-                <a:off x="4613945" y="2074558"/>
-                <a:ext cx="2960934" cy="3541714"/>
-              </a:xfrm>
-            </p:spPr>
-            <p:txBody>
-              <a:bodyPr>
-                <a:normAutofit/>
-              </a:bodyPr>
-              <a:lstStyle/>
-              <a:p>
-                <a14:m>
-                  <m:oMath xmlns:m="http://schemas.openxmlformats.org/officeDocument/2006/math">
-                    <m:sSup>
-                      <m:sSupPr>
-                        <m:ctrlPr>
-                          <a:rPr lang="en-US" b="0" i="1" smtClean="0">
-                            <a:latin typeface="Cambria Math" panose="02040503050406030204" pitchFamily="18" charset="0"/>
-                          </a:rPr>
-                        </m:ctrlPr>
-                      </m:sSupPr>
-                      <m:e>
-                        <m:r>
-                          <a:rPr lang="en-US" b="0" i="1" smtClean="0">
-                            <a:latin typeface="Cambria Math" panose="02040503050406030204" pitchFamily="18" charset="0"/>
-                          </a:rPr>
-                          <m:t>ℤ</m:t>
-                        </m:r>
-                      </m:e>
-                      <m:sup>
-                        <m:r>
-                          <a:rPr lang="en-US" b="0" i="1" smtClean="0">
-                            <a:latin typeface="Cambria Math" panose="02040503050406030204" pitchFamily="18" charset="0"/>
-                          </a:rPr>
-                          <m:t>+</m:t>
-                        </m:r>
-                      </m:sup>
-                    </m:sSup>
-                    <m:r>
-                      <a:rPr lang="en-US" b="0" i="1" smtClean="0">
-                        <a:latin typeface="Cambria Math" panose="02040503050406030204" pitchFamily="18" charset="0"/>
-                      </a:rPr>
-                      <m:t>=</m:t>
-                    </m:r>
-                    <m:r>
-                      <a:rPr lang="en-US" b="0" i="1" smtClean="0">
-                        <a:latin typeface="Cambria Math" panose="02040503050406030204" pitchFamily="18" charset="0"/>
-                      </a:rPr>
-                      <m:t>ℕ</m:t>
-                    </m:r>
-                    <m:r>
-                      <a:rPr lang="en-US" b="0" i="1" smtClean="0">
-                        <a:latin typeface="Cambria Math" panose="02040503050406030204" pitchFamily="18" charset="0"/>
-                      </a:rPr>
-                      <m:t>∖</m:t>
-                    </m:r>
-                    <m:d>
-                      <m:dPr>
-                        <m:begChr m:val="{"/>
-                        <m:endChr m:val="}"/>
-                        <m:ctrlPr>
-                          <a:rPr lang="en-US" b="0" i="1" smtClean="0">
-                            <a:latin typeface="Cambria Math" panose="02040503050406030204" pitchFamily="18" charset="0"/>
-                          </a:rPr>
-                        </m:ctrlPr>
-                      </m:dPr>
-                      <m:e>
-                        <m:r>
-                          <a:rPr lang="en-US" b="0" i="1" smtClean="0">
-                            <a:latin typeface="Cambria Math" panose="02040503050406030204" pitchFamily="18" charset="0"/>
-                          </a:rPr>
-                          <m:t>0</m:t>
-                        </m:r>
-                      </m:e>
-                    </m:d>
-                  </m:oMath>
-                </a14:m>
-                <a:endParaRPr lang="en-US" b="0" i="1" dirty="0">
-                  <a:latin typeface="Cambria Math" panose="02040503050406030204" pitchFamily="18" charset="0"/>
-                </a:endParaRPr>
-              </a:p>
-              <a:p>
-                <a14:m>
-                  <m:oMath xmlns:m="http://schemas.openxmlformats.org/officeDocument/2006/math">
-                    <m:r>
-                      <a:rPr lang="en-US" b="0" i="1" smtClean="0">
-                        <a:latin typeface="Cambria Math" panose="02040503050406030204" pitchFamily="18" charset="0"/>
-                      </a:rPr>
-                      <m:t>{</m:t>
-                    </m:r>
-                    <m:r>
-                      <a:rPr lang="en-US" b="0" i="1" smtClean="0">
-                        <a:latin typeface="Cambria Math" panose="02040503050406030204" pitchFamily="18" charset="0"/>
-                      </a:rPr>
-                      <m:t>𝑛</m:t>
-                    </m:r>
-                    <m:r>
-                      <a:rPr lang="en-US" b="0" i="1" smtClean="0">
-                        <a:latin typeface="Cambria Math" panose="02040503050406030204" pitchFamily="18" charset="0"/>
-                      </a:rPr>
-                      <m:t>∈</m:t>
-                    </m:r>
-                    <m:r>
-                      <a:rPr lang="en-US" b="0" i="1" smtClean="0">
-                        <a:latin typeface="Cambria Math" panose="02040503050406030204" pitchFamily="18" charset="0"/>
-                      </a:rPr>
-                      <m:t>ℕ</m:t>
-                    </m:r>
-                    <m:r>
-                      <a:rPr lang="en-US" b="0" i="1" smtClean="0">
-                        <a:latin typeface="Cambria Math" panose="02040503050406030204" pitchFamily="18" charset="0"/>
-                      </a:rPr>
-                      <m:t>|</m:t>
-                    </m:r>
-                    <m:r>
-                      <a:rPr lang="en-US" b="0" i="1" smtClean="0">
-                        <a:latin typeface="Cambria Math" panose="02040503050406030204" pitchFamily="18" charset="0"/>
-                      </a:rPr>
-                      <m:t>𝑛</m:t>
-                    </m:r>
-                    <m:r>
-                      <a:rPr lang="en-US" b="0" i="1" smtClean="0">
-                        <a:latin typeface="Cambria Math" panose="02040503050406030204" pitchFamily="18" charset="0"/>
-                      </a:rPr>
-                      <m:t> </m:t>
-                    </m:r>
-                    <m:r>
-                      <m:rPr>
-                        <m:sty m:val="p"/>
-                      </m:rPr>
-                      <a:rPr lang="en-US" b="0" i="0" smtClean="0">
-                        <a:latin typeface="Cambria Math" panose="02040503050406030204" pitchFamily="18" charset="0"/>
-                      </a:rPr>
-                      <m:t>is</m:t>
-                    </m:r>
-                    <m:r>
-                      <a:rPr lang="en-US" b="0" i="0" smtClean="0">
-                        <a:latin typeface="Cambria Math" panose="02040503050406030204" pitchFamily="18" charset="0"/>
-                      </a:rPr>
-                      <m:t> </m:t>
-                    </m:r>
-                    <m:r>
-                      <m:rPr>
-                        <m:sty m:val="p"/>
-                      </m:rPr>
-                      <a:rPr lang="en-US" b="0" i="0" smtClean="0">
-                        <a:latin typeface="Cambria Math" panose="02040503050406030204" pitchFamily="18" charset="0"/>
-                      </a:rPr>
-                      <m:t>even</m:t>
-                    </m:r>
-                    <m:r>
-                      <a:rPr lang="en-US" b="0" i="1" smtClean="0">
-                        <a:latin typeface="Cambria Math" panose="02040503050406030204" pitchFamily="18" charset="0"/>
-                      </a:rPr>
-                      <m:t>}</m:t>
-                    </m:r>
-                  </m:oMath>
-                </a14:m>
-                <a:endParaRPr lang="en-US" dirty="0"/>
-              </a:p>
-              <a:p>
-                <a14:m>
-                  <m:oMath xmlns:m="http://schemas.openxmlformats.org/officeDocument/2006/math">
-                    <m:r>
-                      <a:rPr lang="en-US" b="0" i="1" smtClean="0">
-                        <a:latin typeface="Cambria Math" panose="02040503050406030204" pitchFamily="18" charset="0"/>
-                      </a:rPr>
-                      <m:t>{</m:t>
-                    </m:r>
-                    <m:r>
-                      <a:rPr lang="en-US" b="0" i="1" smtClean="0">
-                        <a:latin typeface="Cambria Math" panose="02040503050406030204" pitchFamily="18" charset="0"/>
-                      </a:rPr>
-                      <m:t>𝑛</m:t>
-                    </m:r>
-                    <m:r>
-                      <a:rPr lang="en-US" b="0" i="1" smtClean="0">
-                        <a:latin typeface="Cambria Math" panose="02040503050406030204" pitchFamily="18" charset="0"/>
-                      </a:rPr>
-                      <m:t>∈</m:t>
-                    </m:r>
-                    <m:r>
-                      <a:rPr lang="en-US" b="0" i="1" smtClean="0">
-                        <a:latin typeface="Cambria Math" panose="02040503050406030204" pitchFamily="18" charset="0"/>
-                      </a:rPr>
-                      <m:t>ℕ</m:t>
-                    </m:r>
-                    <m:r>
-                      <a:rPr lang="en-US" b="0" i="1" smtClean="0">
-                        <a:latin typeface="Cambria Math" panose="02040503050406030204" pitchFamily="18" charset="0"/>
-                      </a:rPr>
-                      <m:t>|</m:t>
-                    </m:r>
-                    <m:r>
-                      <a:rPr lang="en-US" b="0" i="1" smtClean="0">
-                        <a:latin typeface="Cambria Math" panose="02040503050406030204" pitchFamily="18" charset="0"/>
-                      </a:rPr>
-                      <m:t>𝑛</m:t>
-                    </m:r>
-                    <m:r>
-                      <a:rPr lang="en-US" b="0" i="1" smtClean="0">
-                        <a:latin typeface="Cambria Math" panose="02040503050406030204" pitchFamily="18" charset="0"/>
-                      </a:rPr>
-                      <m:t> </m:t>
-                    </m:r>
-                    <m:r>
-                      <m:rPr>
-                        <m:sty m:val="p"/>
-                      </m:rPr>
-                      <a:rPr lang="en-US" b="0" i="0" smtClean="0">
-                        <a:latin typeface="Cambria Math" panose="02040503050406030204" pitchFamily="18" charset="0"/>
-                      </a:rPr>
-                      <m:t>is</m:t>
-                    </m:r>
-                    <m:r>
-                      <a:rPr lang="en-US" b="0" i="0" smtClean="0">
-                        <a:latin typeface="Cambria Math" panose="02040503050406030204" pitchFamily="18" charset="0"/>
-                      </a:rPr>
-                      <m:t> </m:t>
-                    </m:r>
-                    <m:r>
-                      <m:rPr>
-                        <m:sty m:val="p"/>
-                      </m:rPr>
-                      <a:rPr lang="en-US" b="0" i="0" smtClean="0">
-                        <a:latin typeface="Cambria Math" panose="02040503050406030204" pitchFamily="18" charset="0"/>
-                      </a:rPr>
-                      <m:t>odd</m:t>
-                    </m:r>
-                    <m:r>
-                      <a:rPr lang="en-US" b="0" i="1" smtClean="0">
-                        <a:latin typeface="Cambria Math" panose="02040503050406030204" pitchFamily="18" charset="0"/>
-                      </a:rPr>
-                      <m:t>}</m:t>
-                    </m:r>
-                  </m:oMath>
-                </a14:m>
-                <a:endParaRPr lang="en-US" dirty="0"/>
-              </a:p>
-              <a:p>
-                <a14:m>
-                  <m:oMath xmlns:m="http://schemas.openxmlformats.org/officeDocument/2006/math">
-                    <m:r>
-                      <a:rPr lang="en-US" b="0" i="1" smtClean="0">
-                        <a:latin typeface="Cambria Math" panose="02040503050406030204" pitchFamily="18" charset="0"/>
-                      </a:rPr>
-                      <m:t>ℤ</m:t>
-                    </m:r>
-                  </m:oMath>
-                </a14:m>
-                <a:endParaRPr lang="en-US" dirty="0"/>
-              </a:p>
-              <a:p>
-                <a14:m>
-                  <m:oMath xmlns:m="http://schemas.openxmlformats.org/officeDocument/2006/math">
-                    <m:r>
-                      <a:rPr lang="en-US" b="0" i="1" smtClean="0">
-                        <a:latin typeface="Cambria Math" panose="02040503050406030204" pitchFamily="18" charset="0"/>
-                      </a:rPr>
-                      <m:t>ℕ</m:t>
-                    </m:r>
-                    <m:r>
-                      <a:rPr lang="en-US" b="0" i="1" smtClean="0">
-                        <a:latin typeface="Cambria Math" panose="02040503050406030204" pitchFamily="18" charset="0"/>
-                      </a:rPr>
-                      <m:t>×</m:t>
-                    </m:r>
-                    <m:r>
-                      <a:rPr lang="en-US" b="0" i="1" smtClean="0">
-                        <a:latin typeface="Cambria Math" panose="02040503050406030204" pitchFamily="18" charset="0"/>
-                      </a:rPr>
-                      <m:t>ℕ</m:t>
-                    </m:r>
-                  </m:oMath>
-                </a14:m>
-                <a:endParaRPr lang="en-US" dirty="0"/>
-              </a:p>
-              <a:p>
-                <a14:m>
-                  <m:oMath xmlns:m="http://schemas.openxmlformats.org/officeDocument/2006/math">
-                    <m:r>
-                      <a:rPr lang="en-US" b="0" i="1" smtClean="0">
-                        <a:latin typeface="Cambria Math" panose="02040503050406030204" pitchFamily="18" charset="0"/>
-                      </a:rPr>
-                      <m:t>ℚ</m:t>
-                    </m:r>
-                  </m:oMath>
-                </a14:m>
-                <a:endParaRPr lang="en-US" dirty="0"/>
-              </a:p>
-            </p:txBody>
-          </p:sp>
-        </mc:Choice>
-        <mc:Fallback xmlns="">
-          <p:sp>
-            <p:nvSpPr>
-              <p:cNvPr id="3" name="Content Placeholder 2">
-                <a:extLst>
-                  <a:ext uri="{FF2B5EF4-FFF2-40B4-BE49-F238E27FC236}">
-                    <a16:creationId xmlns:a16="http://schemas.microsoft.com/office/drawing/2014/main" id="{369A19D1-C136-42F3-970A-50C610E3ED37}"/>
-                  </a:ext>
-                </a:extLst>
-              </p:cNvPr>
-              <p:cNvSpPr>
-                <a:spLocks noGrp="1" noRot="1" noChangeAspect="1" noMove="1" noResize="1" noEditPoints="1" noAdjustHandles="1" noChangeArrowheads="1" noChangeShapeType="1" noTextEdit="1"/>
-              </p:cNvSpPr>
-              <p:nvPr>
-                <p:ph idx="1"/>
-              </p:nvPr>
-            </p:nvSpPr>
-            <p:spPr>
-              <a:xfrm>
-                <a:off x="4613945" y="2074558"/>
-                <a:ext cx="2960934" cy="3541714"/>
-              </a:xfrm>
-              <a:blipFill>
-                <a:blip r:embed="rId2"/>
-                <a:stretch>
-                  <a:fillRect l="-3846" t="-1786"/>
-                </a:stretch>
-              </a:blipFill>
-            </p:spPr>
-            <p:txBody>
-              <a:bodyPr/>
-              <a:lstStyle/>
-              <a:p>
-                <a:r>
-                  <a:rPr lang="en-US">
-                    <a:noFill/>
-                  </a:rPr>
-                  <a:t> </a:t>
-                </a:r>
-              </a:p>
-            </p:txBody>
-          </p:sp>
-        </mc:Fallback>
-      </mc:AlternateContent>
-      <p:sp>
-        <p:nvSpPr>
-          <p:cNvPr id="4" name="Slide Number Placeholder 3">
-            <a:extLst>
-              <a:ext uri="{FF2B5EF4-FFF2-40B4-BE49-F238E27FC236}">
-                <a16:creationId xmlns:a16="http://schemas.microsoft.com/office/drawing/2014/main" id="{38094FDB-0592-493E-A04B-1242E8FD5520}"/>
-              </a:ext>
-            </a:extLst>
-          </p:cNvPr>
-          <p:cNvSpPr>
-            <a:spLocks noGrp="1"/>
-          </p:cNvSpPr>
-          <p:nvPr>
-            <p:ph type="sldNum" sz="quarter" idx="12"/>
-          </p:nvPr>
-        </p:nvSpPr>
-        <p:spPr/>
-        <p:txBody>
-          <a:bodyPr/>
-          <a:lstStyle/>
-          <a:p>
-            <a:fld id="{9BB9F8D7-E2A3-4222-BD86-A63794DF33E7}" type="slidenum">
-              <a:rPr lang="en-US" smtClean="0"/>
-              <a:t>20</a:t>
-            </a:fld>
-            <a:endParaRPr lang="en-US"/>
-          </a:p>
-        </p:txBody>
-      </p:sp>
-    </p:spTree>
-    <p:extLst>
-      <p:ext uri="{BB962C8B-B14F-4D97-AF65-F5344CB8AC3E}">
-        <p14:creationId xmlns:p14="http://schemas.microsoft.com/office/powerpoint/2010/main" val="1241525711"/>
-      </p:ext>
-    </p:extLst>
-  </p:cSld>
-  <p:clrMapOvr>
-    <a:masterClrMapping/>
-  </p:clrMapOvr>
-</p:sld>
-</file>
-
-<file path=ppt/slides/slide21.xml><?xml version="1.0" encoding="utf-8"?>
-<p:sld xmlns:a="http://schemas.openxmlformats.org/drawingml/2006/main" xmlns:r="http://schemas.openxmlformats.org/officeDocument/2006/relationships" xmlns:p="http://schemas.openxmlformats.org/presentationml/2006/main">
-  <p:cSld>
-    <p:spTree>
-      <p:nvGrpSpPr>
-        <p:cNvPr id="1" name=""/>
-        <p:cNvGrpSpPr/>
-        <p:nvPr/>
-      </p:nvGrpSpPr>
-      <p:grpSpPr>
-        <a:xfrm>
-          <a:off x="0" y="0"/>
-          <a:ext cx="0" cy="0"/>
-          <a:chOff x="0" y="0"/>
-          <a:chExt cx="0" cy="0"/>
-        </a:xfrm>
-      </p:grpSpPr>
       <mc:AlternateContent xmlns:mc="http://schemas.openxmlformats.org/markup-compatibility/2006" xmlns:a14="http://schemas.microsoft.com/office/drawing/2010/main">
         <mc:Choice Requires="a14">
           <p:sp>
@@ -25085,7 +21316,7 @@
           <a:p>
             <a:fld id="{9BB9F8D7-E2A3-4222-BD86-A63794DF33E7}" type="slidenum">
               <a:rPr lang="en-US" smtClean="0"/>
-              <a:t>21</a:t>
+              <a:t>20</a:t>
             </a:fld>
             <a:endParaRPr lang="en-US"/>
           </a:p>
@@ -25104,7 +21335,7 @@
 </p:sld>
 </file>
 
-<file path=ppt/slides/slide22.xml><?xml version="1.0" encoding="utf-8"?>
+<file path=ppt/slides/slide21.xml><?xml version="1.0" encoding="utf-8"?>
 <p:sld xmlns:a="http://schemas.openxmlformats.org/drawingml/2006/main" xmlns:r="http://schemas.openxmlformats.org/officeDocument/2006/relationships" xmlns:p="http://schemas.openxmlformats.org/presentationml/2006/main">
   <p:cSld>
     <p:spTree>
@@ -25506,7 +21737,7 @@
           <a:p>
             <a:fld id="{9BB9F8D7-E2A3-4222-BD86-A63794DF33E7}" type="slidenum">
               <a:rPr lang="en-US" smtClean="0"/>
-              <a:t>22</a:t>
+              <a:t>21</a:t>
             </a:fld>
             <a:endParaRPr lang="en-US"/>
           </a:p>
@@ -25525,7 +21756,7 @@
 </p:sld>
 </file>
 
-<file path=ppt/slides/slide23.xml><?xml version="1.0" encoding="utf-8"?>
+<file path=ppt/slides/slide22.xml><?xml version="1.0" encoding="utf-8"?>
 <p:sld xmlns:a="http://schemas.openxmlformats.org/drawingml/2006/main" xmlns:r="http://schemas.openxmlformats.org/officeDocument/2006/relationships" xmlns:p="http://schemas.openxmlformats.org/presentationml/2006/main">
   <p:cSld>
     <p:spTree>
@@ -25930,7 +22161,7 @@
           <a:p>
             <a:fld id="{9BB9F8D7-E2A3-4222-BD86-A63794DF33E7}" type="slidenum">
               <a:rPr lang="en-US" smtClean="0"/>
-              <a:t>23</a:t>
+              <a:t>22</a:t>
             </a:fld>
             <a:endParaRPr lang="en-US"/>
           </a:p>
@@ -25949,7 +22180,7 @@
 </p:sld>
 </file>
 
-<file path=ppt/slides/slide24.xml><?xml version="1.0" encoding="utf-8"?>
+<file path=ppt/slides/slide23.xml><?xml version="1.0" encoding="utf-8"?>
 <p:sld xmlns:a="http://schemas.openxmlformats.org/drawingml/2006/main" xmlns:r="http://schemas.openxmlformats.org/officeDocument/2006/relationships" xmlns:p="http://schemas.openxmlformats.org/presentationml/2006/main">
   <p:cSld>
     <p:spTree>
@@ -26527,7 +22758,7 @@
           <a:p>
             <a:fld id="{9BB9F8D7-E2A3-4222-BD86-A63794DF33E7}" type="slidenum">
               <a:rPr lang="en-US" smtClean="0"/>
-              <a:t>24</a:t>
+              <a:t>23</a:t>
             </a:fld>
             <a:endParaRPr lang="en-US"/>
           </a:p>
@@ -26546,7 +22777,7 @@
 </p:sld>
 </file>
 
-<file path=ppt/slides/slide25.xml><?xml version="1.0" encoding="utf-8"?>
+<file path=ppt/slides/slide24.xml><?xml version="1.0" encoding="utf-8"?>
 <p:sld xmlns:a="http://schemas.openxmlformats.org/drawingml/2006/main" xmlns:r="http://schemas.openxmlformats.org/officeDocument/2006/relationships" xmlns:p="http://schemas.openxmlformats.org/presentationml/2006/main">
   <p:cSld>
     <p:spTree>
@@ -26705,7 +22936,7 @@
 </p:sld>
 </file>
 
-<file path=ppt/slides/slide26.xml><?xml version="1.0" encoding="utf-8"?>
+<file path=ppt/slides/slide25.xml><?xml version="1.0" encoding="utf-8"?>
 <p:sld xmlns:a="http://schemas.openxmlformats.org/drawingml/2006/main" xmlns:r="http://schemas.openxmlformats.org/officeDocument/2006/relationships" xmlns:p="http://schemas.openxmlformats.org/presentationml/2006/main">
   <p:cSld>
     <p:spTree>
@@ -26977,7 +23208,7 @@
           <a:p>
             <a:fld id="{9BB9F8D7-E2A3-4222-BD86-A63794DF33E7}" type="slidenum">
               <a:rPr lang="en-US" smtClean="0"/>
-              <a:t>26</a:t>
+              <a:t>25</a:t>
             </a:fld>
             <a:endParaRPr lang="en-US"/>
           </a:p>
@@ -28869,7 +25100,7 @@
 </p:sld>
 </file>
 
-<file path=ppt/slides/slide27.xml><?xml version="1.0" encoding="utf-8"?>
+<file path=ppt/slides/slide26.xml><?xml version="1.0" encoding="utf-8"?>
 <p:sld xmlns:a="http://schemas.openxmlformats.org/drawingml/2006/main" xmlns:r="http://schemas.openxmlformats.org/officeDocument/2006/relationships" xmlns:p="http://schemas.openxmlformats.org/presentationml/2006/main">
   <p:cSld>
     <p:spTree>
@@ -29144,7 +25375,7 @@
           <a:p>
             <a:fld id="{9BB9F8D7-E2A3-4222-BD86-A63794DF33E7}" type="slidenum">
               <a:rPr lang="en-US" smtClean="0"/>
-              <a:t>27</a:t>
+              <a:t>26</a:t>
             </a:fld>
             <a:endParaRPr lang="en-US"/>
           </a:p>
@@ -29163,7 +25394,7 @@
 </p:sld>
 </file>
 
-<file path=ppt/slides/slide28.xml><?xml version="1.0" encoding="utf-8"?>
+<file path=ppt/slides/slide27.xml><?xml version="1.0" encoding="utf-8"?>
 <p:sld xmlns:a="http://schemas.openxmlformats.org/drawingml/2006/main" xmlns:r="http://schemas.openxmlformats.org/officeDocument/2006/relationships" xmlns:p="http://schemas.openxmlformats.org/presentationml/2006/main">
   <p:cSld>
     <p:spTree>
@@ -29222,7 +25453,7 @@
 </p:sld>
 </file>
 
-<file path=ppt/slides/slide29.xml><?xml version="1.0" encoding="utf-8"?>
+<file path=ppt/slides/slide28.xml><?xml version="1.0" encoding="utf-8"?>
 <p:sld xmlns:a="http://schemas.openxmlformats.org/drawingml/2006/main" xmlns:r="http://schemas.openxmlformats.org/officeDocument/2006/relationships" xmlns:p="http://schemas.openxmlformats.org/presentationml/2006/main">
   <p:cSld>
     <p:spTree>
@@ -29317,6 +25548,433 @@
           <a:p>
             <a:fld id="{9BB9F8D7-E2A3-4222-BD86-A63794DF33E7}" type="slidenum">
               <a:rPr lang="en-US" smtClean="0"/>
+              <a:t>28</a:t>
+            </a:fld>
+            <a:endParaRPr lang="en-US"/>
+          </a:p>
+        </p:txBody>
+      </p:sp>
+    </p:spTree>
+    <p:extLst>
+      <p:ext uri="{BB962C8B-B14F-4D97-AF65-F5344CB8AC3E}">
+        <p14:creationId xmlns:p14="http://schemas.microsoft.com/office/powerpoint/2010/main" val="311080482"/>
+      </p:ext>
+    </p:extLst>
+  </p:cSld>
+  <p:clrMapOvr>
+    <a:masterClrMapping/>
+  </p:clrMapOvr>
+</p:sld>
+</file>
+
+<file path=ppt/slides/slide29.xml><?xml version="1.0" encoding="utf-8"?>
+<p:sld xmlns:a="http://schemas.openxmlformats.org/drawingml/2006/main" xmlns:r="http://schemas.openxmlformats.org/officeDocument/2006/relationships" xmlns:p="http://schemas.openxmlformats.org/presentationml/2006/main">
+  <p:cSld>
+    <p:spTree>
+      <p:nvGrpSpPr>
+        <p:cNvPr id="1" name=""/>
+        <p:cNvGrpSpPr/>
+        <p:nvPr/>
+      </p:nvGrpSpPr>
+      <p:grpSpPr>
+        <a:xfrm>
+          <a:off x="0" y="0"/>
+          <a:ext cx="0" cy="0"/>
+          <a:chOff x="0" y="0"/>
+          <a:chExt cx="0" cy="0"/>
+        </a:xfrm>
+      </p:grpSpPr>
+      <mc:AlternateContent xmlns:mc="http://schemas.openxmlformats.org/markup-compatibility/2006" xmlns:a14="http://schemas.microsoft.com/office/drawing/2010/main">
+        <mc:Choice Requires="a14">
+          <p:sp>
+            <p:nvSpPr>
+              <p:cNvPr id="2" name="Title 1"/>
+              <p:cNvSpPr>
+                <a:spLocks noGrp="1"/>
+              </p:cNvSpPr>
+              <p:nvPr>
+                <p:ph type="title"/>
+              </p:nvPr>
+            </p:nvSpPr>
+            <p:spPr>
+              <a:xfrm>
+                <a:off x="1141413" y="276612"/>
+                <a:ext cx="9905998" cy="725252"/>
+              </a:xfrm>
+            </p:spPr>
+            <p:txBody>
+              <a:bodyPr>
+                <a:normAutofit/>
+              </a:bodyPr>
+              <a:lstStyle/>
+              <a:p>
+                <a:pPr algn="ctr"/>
+                <a:r>
+                  <a:rPr lang="en-US" dirty="0"/>
+                  <a:t>How many functions </a:t>
+                </a:r>
+                <a14:m>
+                  <m:oMath xmlns:m="http://schemas.openxmlformats.org/officeDocument/2006/math">
+                    <m:sSup>
+                      <m:sSupPr>
+                        <m:ctrlPr>
+                          <a:rPr lang="en-US" b="0" i="1" smtClean="0">
+                            <a:latin typeface="Cambria Math" panose="02040503050406030204" pitchFamily="18" charset="0"/>
+                          </a:rPr>
+                        </m:ctrlPr>
+                      </m:sSupPr>
+                      <m:e>
+                        <m:r>
+                          <m:rPr>
+                            <m:sty m:val="p"/>
+                          </m:rPr>
+                          <a:rPr lang="en-US" b="0" i="0" smtClean="0">
+                            <a:latin typeface="Cambria Math"/>
+                          </a:rPr>
+                          <m:t>Σ</m:t>
+                        </m:r>
+                      </m:e>
+                      <m:sup>
+                        <m:r>
+                          <a:rPr lang="en-US" b="0" i="1" smtClean="0">
+                            <a:latin typeface="Cambria Math"/>
+                          </a:rPr>
+                          <m:t>∗</m:t>
+                        </m:r>
+                      </m:sup>
+                    </m:sSup>
+                    <m:r>
+                      <a:rPr lang="en-US" b="0" i="1" smtClean="0">
+                        <a:latin typeface="Cambria Math"/>
+                      </a:rPr>
+                      <m:t>→</m:t>
+                    </m:r>
+                    <m:sSup>
+                      <m:sSupPr>
+                        <m:ctrlPr>
+                          <a:rPr lang="en-US" b="0" i="1" smtClean="0">
+                            <a:latin typeface="Cambria Math" panose="02040503050406030204" pitchFamily="18" charset="0"/>
+                          </a:rPr>
+                        </m:ctrlPr>
+                      </m:sSupPr>
+                      <m:e>
+                        <m:r>
+                          <m:rPr>
+                            <m:sty m:val="p"/>
+                          </m:rPr>
+                          <a:rPr lang="en-US" b="0" i="0" smtClean="0">
+                            <a:latin typeface="Cambria Math"/>
+                          </a:rPr>
+                          <m:t>Σ</m:t>
+                        </m:r>
+                      </m:e>
+                      <m:sup>
+                        <m:r>
+                          <a:rPr lang="en-US" b="0" i="1" smtClean="0">
+                            <a:latin typeface="Cambria Math"/>
+                          </a:rPr>
+                          <m:t>∗</m:t>
+                        </m:r>
+                      </m:sup>
+                    </m:sSup>
+                  </m:oMath>
+                </a14:m>
+                <a:r>
+                  <a:rPr lang="en-US" dirty="0"/>
+                  <a:t>?</a:t>
+                </a:r>
+              </a:p>
+            </p:txBody>
+          </p:sp>
+        </mc:Choice>
+        <mc:Fallback xmlns="">
+          <p:sp>
+            <p:nvSpPr>
+              <p:cNvPr id="2" name="Title 1"/>
+              <p:cNvSpPr>
+                <a:spLocks noGrp="1" noRot="1" noChangeAspect="1" noMove="1" noResize="1" noEditPoints="1" noAdjustHandles="1" noChangeArrowheads="1" noChangeShapeType="1" noTextEdit="1"/>
+              </p:cNvSpPr>
+              <p:nvPr>
+                <p:ph type="title"/>
+              </p:nvPr>
+            </p:nvSpPr>
+            <p:spPr>
+              <a:xfrm>
+                <a:off x="1141413" y="276612"/>
+                <a:ext cx="9905998" cy="725252"/>
+              </a:xfrm>
+              <a:blipFill>
+                <a:blip r:embed="rId2"/>
+                <a:stretch>
+                  <a:fillRect t="-10345" b="-20690"/>
+                </a:stretch>
+              </a:blipFill>
+            </p:spPr>
+            <p:txBody>
+              <a:bodyPr/>
+              <a:lstStyle/>
+              <a:p>
+                <a:r>
+                  <a:rPr lang="en-US">
+                    <a:noFill/>
+                  </a:rPr>
+                  <a:t> </a:t>
+                </a:r>
+              </a:p>
+            </p:txBody>
+          </p:sp>
+        </mc:Fallback>
+      </mc:AlternateContent>
+      <mc:AlternateContent xmlns:mc="http://schemas.openxmlformats.org/markup-compatibility/2006" xmlns:a14="http://schemas.microsoft.com/office/drawing/2010/main">
+        <mc:Choice Requires="a14">
+          <p:sp>
+            <p:nvSpPr>
+              <p:cNvPr id="3" name="Content Placeholder 2"/>
+              <p:cNvSpPr>
+                <a:spLocks noGrp="1"/>
+              </p:cNvSpPr>
+              <p:nvPr>
+                <p:ph idx="1"/>
+              </p:nvPr>
+            </p:nvSpPr>
+            <p:spPr>
+              <a:xfrm>
+                <a:off x="1451513" y="1748555"/>
+                <a:ext cx="9905999" cy="3541714"/>
+              </a:xfrm>
+            </p:spPr>
+            <p:txBody>
+              <a:bodyPr/>
+              <a:lstStyle/>
+              <a:p>
+                <a:r>
+                  <a:rPr lang="en-US" dirty="0"/>
+                  <a:t>Short answer: Too many!</a:t>
+                </a:r>
+              </a:p>
+              <a:p>
+                <a:pPr lvl="1"/>
+                <a:r>
+                  <a:rPr lang="en-US" dirty="0"/>
+                  <a:t>Uncountable </a:t>
+                </a:r>
+              </a:p>
+              <a:p>
+                <a:pPr lvl="1"/>
+                <a14:m>
+                  <m:oMath xmlns:m="http://schemas.openxmlformats.org/officeDocument/2006/math">
+                    <m:d>
+                      <m:dPr>
+                        <m:begChr m:val="|"/>
+                        <m:endChr m:val="}"/>
+                        <m:ctrlPr>
+                          <a:rPr lang="en-US" b="0" i="1" smtClean="0">
+                            <a:latin typeface="Cambria Math" panose="02040503050406030204" pitchFamily="18" charset="0"/>
+                          </a:rPr>
+                        </m:ctrlPr>
+                      </m:dPr>
+                      <m:e>
+                        <m:d>
+                          <m:dPr>
+                            <m:begChr m:val="{"/>
+                            <m:endChr m:val="|"/>
+                            <m:ctrlPr>
+                              <a:rPr lang="en-US" b="0" i="1" smtClean="0">
+                                <a:latin typeface="Cambria Math" panose="02040503050406030204" pitchFamily="18" charset="0"/>
+                              </a:rPr>
+                            </m:ctrlPr>
+                          </m:dPr>
+                          <m:e>
+                            <m:r>
+                              <a:rPr lang="en-US" b="0" i="1" smtClean="0">
+                                <a:latin typeface="Cambria Math"/>
+                              </a:rPr>
+                              <m:t>𝑓</m:t>
+                            </m:r>
+                            <m:r>
+                              <a:rPr lang="en-US" b="0" i="1" smtClean="0">
+                                <a:latin typeface="Cambria Math"/>
+                              </a:rPr>
+                              <m:t> </m:t>
+                            </m:r>
+                          </m:e>
+                        </m:d>
+                        <m:r>
+                          <a:rPr lang="en-US" b="0" i="1" smtClean="0">
+                            <a:latin typeface="Cambria Math"/>
+                          </a:rPr>
+                          <m:t>𝑓</m:t>
+                        </m:r>
+                        <m:r>
+                          <a:rPr lang="en-US" b="0" i="1" smtClean="0">
+                            <a:latin typeface="Cambria Math"/>
+                          </a:rPr>
+                          <m:t>:</m:t>
+                        </m:r>
+                        <m:sSup>
+                          <m:sSupPr>
+                            <m:ctrlPr>
+                              <a:rPr lang="en-US" b="0" i="1" smtClean="0">
+                                <a:latin typeface="Cambria Math" panose="02040503050406030204" pitchFamily="18" charset="0"/>
+                              </a:rPr>
+                            </m:ctrlPr>
+                          </m:sSupPr>
+                          <m:e>
+                            <m:r>
+                              <m:rPr>
+                                <m:sty m:val="p"/>
+                              </m:rPr>
+                              <a:rPr lang="en-US" b="0" i="0" smtClean="0">
+                                <a:latin typeface="Cambria Math"/>
+                              </a:rPr>
+                              <m:t>Σ</m:t>
+                            </m:r>
+                          </m:e>
+                          <m:sup>
+                            <m:r>
+                              <a:rPr lang="en-US" b="0" i="1" smtClean="0">
+                                <a:latin typeface="Cambria Math"/>
+                              </a:rPr>
+                              <m:t>∗</m:t>
+                            </m:r>
+                          </m:sup>
+                        </m:sSup>
+                        <m:r>
+                          <a:rPr lang="en-US" b="0" i="1" smtClean="0">
+                            <a:latin typeface="Cambria Math"/>
+                          </a:rPr>
+                          <m:t>→</m:t>
+                        </m:r>
+                        <m:sSup>
+                          <m:sSupPr>
+                            <m:ctrlPr>
+                              <a:rPr lang="en-US" b="0" i="1" smtClean="0">
+                                <a:latin typeface="Cambria Math" panose="02040503050406030204" pitchFamily="18" charset="0"/>
+                              </a:rPr>
+                            </m:ctrlPr>
+                          </m:sSupPr>
+                          <m:e>
+                            <m:r>
+                              <m:rPr>
+                                <m:sty m:val="p"/>
+                              </m:rPr>
+                              <a:rPr lang="en-US" b="0" i="0" smtClean="0">
+                                <a:latin typeface="Cambria Math"/>
+                              </a:rPr>
+                              <m:t>Σ</m:t>
+                            </m:r>
+                          </m:e>
+                          <m:sup>
+                            <m:r>
+                              <a:rPr lang="en-US" b="0" i="1" smtClean="0">
+                                <a:latin typeface="Cambria Math"/>
+                              </a:rPr>
+                              <m:t>∗</m:t>
+                            </m:r>
+                          </m:sup>
+                        </m:sSup>
+                      </m:e>
+                    </m:d>
+                    <m:r>
+                      <a:rPr lang="en-US" b="0" i="1" smtClean="0">
+                        <a:latin typeface="Cambria Math"/>
+                      </a:rPr>
+                      <m:t>|&gt;</m:t>
+                    </m:r>
+                    <m:r>
+                      <a:rPr lang="en-US" i="1">
+                        <a:latin typeface="Cambria Math"/>
+                      </a:rPr>
+                      <m:t>|</m:t>
+                    </m:r>
+                    <m:r>
+                      <m:rPr>
+                        <m:nor/>
+                      </m:rPr>
+                      <a:rPr lang="en-US"/>
+                      <m:t>ℕ</m:t>
+                    </m:r>
+                    <m:r>
+                      <m:rPr>
+                        <m:nor/>
+                      </m:rPr>
+                      <a:rPr lang="en-US"/>
+                      <m:t>|</m:t>
+                    </m:r>
+                  </m:oMath>
+                </a14:m>
+                <a:endParaRPr lang="en-US" dirty="0"/>
+              </a:p>
+              <a:p>
+                <a:r>
+                  <a:rPr lang="en-US" dirty="0"/>
+                  <a:t>Conclusion: Some functions cannot be computed by any java/python program</a:t>
+                </a:r>
+              </a:p>
+              <a:p>
+                <a:r>
+                  <a:rPr lang="en-US" dirty="0"/>
+                  <a:t>How to prove this?</a:t>
+                </a:r>
+              </a:p>
+            </p:txBody>
+          </p:sp>
+        </mc:Choice>
+        <mc:Fallback xmlns="">
+          <p:sp>
+            <p:nvSpPr>
+              <p:cNvPr id="3" name="Content Placeholder 2"/>
+              <p:cNvSpPr>
+                <a:spLocks noGrp="1" noRot="1" noChangeAspect="1" noMove="1" noResize="1" noEditPoints="1" noAdjustHandles="1" noChangeArrowheads="1" noChangeShapeType="1" noTextEdit="1"/>
+              </p:cNvSpPr>
+              <p:nvPr>
+                <p:ph idx="1"/>
+              </p:nvPr>
+            </p:nvSpPr>
+            <p:spPr>
+              <a:xfrm>
+                <a:off x="1451513" y="1748555"/>
+                <a:ext cx="9905999" cy="3541714"/>
+              </a:xfrm>
+              <a:blipFill>
+                <a:blip r:embed="rId3"/>
+                <a:stretch>
+                  <a:fillRect l="-1152" t="-2143"/>
+                </a:stretch>
+              </a:blipFill>
+            </p:spPr>
+            <p:txBody>
+              <a:bodyPr/>
+              <a:lstStyle/>
+              <a:p>
+                <a:r>
+                  <a:rPr lang="en-US">
+                    <a:noFill/>
+                  </a:rPr>
+                  <a:t> </a:t>
+                </a:r>
+              </a:p>
+            </p:txBody>
+          </p:sp>
+        </mc:Fallback>
+      </mc:AlternateContent>
+      <p:sp>
+        <p:nvSpPr>
+          <p:cNvPr id="4" name="Slide Number Placeholder 3"/>
+          <p:cNvSpPr>
+            <a:spLocks noGrp="1"/>
+          </p:cNvSpPr>
+          <p:nvPr>
+            <p:ph type="sldNum" sz="quarter" idx="12"/>
+          </p:nvPr>
+        </p:nvSpPr>
+        <p:spPr/>
+        <p:txBody>
+          <a:bodyPr/>
+          <a:lstStyle/>
+          <a:p>
+            <a:fld id="{9BB9F8D7-E2A3-4222-BD86-A63794DF33E7}" type="slidenum">
+              <a:rPr lang="en-US" smtClean="0"/>
               <a:t>29</a:t>
             </a:fld>
             <a:endParaRPr lang="en-US"/>
@@ -29326,7 +25984,7 @@
     </p:spTree>
     <p:extLst>
       <p:ext uri="{BB962C8B-B14F-4D97-AF65-F5344CB8AC3E}">
-        <p14:creationId xmlns:p14="http://schemas.microsoft.com/office/powerpoint/2010/main" val="311080482"/>
+        <p14:creationId xmlns:p14="http://schemas.microsoft.com/office/powerpoint/2010/main" val="379039478"/>
       </p:ext>
     </p:extLst>
   </p:cSld>
@@ -30923,433 +27581,6 @@
           <a:chExt cx="0" cy="0"/>
         </a:xfrm>
       </p:grpSpPr>
-      <mc:AlternateContent xmlns:mc="http://schemas.openxmlformats.org/markup-compatibility/2006" xmlns:a14="http://schemas.microsoft.com/office/drawing/2010/main">
-        <mc:Choice Requires="a14">
-          <p:sp>
-            <p:nvSpPr>
-              <p:cNvPr id="2" name="Title 1"/>
-              <p:cNvSpPr>
-                <a:spLocks noGrp="1"/>
-              </p:cNvSpPr>
-              <p:nvPr>
-                <p:ph type="title"/>
-              </p:nvPr>
-            </p:nvSpPr>
-            <p:spPr>
-              <a:xfrm>
-                <a:off x="1141413" y="276612"/>
-                <a:ext cx="9905998" cy="725252"/>
-              </a:xfrm>
-            </p:spPr>
-            <p:txBody>
-              <a:bodyPr>
-                <a:normAutofit/>
-              </a:bodyPr>
-              <a:lstStyle/>
-              <a:p>
-                <a:pPr algn="ctr"/>
-                <a:r>
-                  <a:rPr lang="en-US" dirty="0"/>
-                  <a:t>How many functions </a:t>
-                </a:r>
-                <a14:m>
-                  <m:oMath xmlns:m="http://schemas.openxmlformats.org/officeDocument/2006/math">
-                    <m:sSup>
-                      <m:sSupPr>
-                        <m:ctrlPr>
-                          <a:rPr lang="en-US" b="0" i="1" smtClean="0">
-                            <a:latin typeface="Cambria Math" panose="02040503050406030204" pitchFamily="18" charset="0"/>
-                          </a:rPr>
-                        </m:ctrlPr>
-                      </m:sSupPr>
-                      <m:e>
-                        <m:r>
-                          <m:rPr>
-                            <m:sty m:val="p"/>
-                          </m:rPr>
-                          <a:rPr lang="en-US" b="0" i="0" smtClean="0">
-                            <a:latin typeface="Cambria Math"/>
-                          </a:rPr>
-                          <m:t>Σ</m:t>
-                        </m:r>
-                      </m:e>
-                      <m:sup>
-                        <m:r>
-                          <a:rPr lang="en-US" b="0" i="1" smtClean="0">
-                            <a:latin typeface="Cambria Math"/>
-                          </a:rPr>
-                          <m:t>∗</m:t>
-                        </m:r>
-                      </m:sup>
-                    </m:sSup>
-                    <m:r>
-                      <a:rPr lang="en-US" b="0" i="1" smtClean="0">
-                        <a:latin typeface="Cambria Math"/>
-                      </a:rPr>
-                      <m:t>→</m:t>
-                    </m:r>
-                    <m:sSup>
-                      <m:sSupPr>
-                        <m:ctrlPr>
-                          <a:rPr lang="en-US" b="0" i="1" smtClean="0">
-                            <a:latin typeface="Cambria Math" panose="02040503050406030204" pitchFamily="18" charset="0"/>
-                          </a:rPr>
-                        </m:ctrlPr>
-                      </m:sSupPr>
-                      <m:e>
-                        <m:r>
-                          <m:rPr>
-                            <m:sty m:val="p"/>
-                          </m:rPr>
-                          <a:rPr lang="en-US" b="0" i="0" smtClean="0">
-                            <a:latin typeface="Cambria Math"/>
-                          </a:rPr>
-                          <m:t>Σ</m:t>
-                        </m:r>
-                      </m:e>
-                      <m:sup>
-                        <m:r>
-                          <a:rPr lang="en-US" b="0" i="1" smtClean="0">
-                            <a:latin typeface="Cambria Math"/>
-                          </a:rPr>
-                          <m:t>∗</m:t>
-                        </m:r>
-                      </m:sup>
-                    </m:sSup>
-                  </m:oMath>
-                </a14:m>
-                <a:r>
-                  <a:rPr lang="en-US" dirty="0"/>
-                  <a:t>?</a:t>
-                </a:r>
-              </a:p>
-            </p:txBody>
-          </p:sp>
-        </mc:Choice>
-        <mc:Fallback xmlns="">
-          <p:sp>
-            <p:nvSpPr>
-              <p:cNvPr id="2" name="Title 1"/>
-              <p:cNvSpPr>
-                <a:spLocks noGrp="1" noRot="1" noChangeAspect="1" noMove="1" noResize="1" noEditPoints="1" noAdjustHandles="1" noChangeArrowheads="1" noChangeShapeType="1" noTextEdit="1"/>
-              </p:cNvSpPr>
-              <p:nvPr>
-                <p:ph type="title"/>
-              </p:nvPr>
-            </p:nvSpPr>
-            <p:spPr>
-              <a:xfrm>
-                <a:off x="1141413" y="276612"/>
-                <a:ext cx="9905998" cy="725252"/>
-              </a:xfrm>
-              <a:blipFill>
-                <a:blip r:embed="rId2"/>
-                <a:stretch>
-                  <a:fillRect t="-10345" b="-20690"/>
-                </a:stretch>
-              </a:blipFill>
-            </p:spPr>
-            <p:txBody>
-              <a:bodyPr/>
-              <a:lstStyle/>
-              <a:p>
-                <a:r>
-                  <a:rPr lang="en-US">
-                    <a:noFill/>
-                  </a:rPr>
-                  <a:t> </a:t>
-                </a:r>
-              </a:p>
-            </p:txBody>
-          </p:sp>
-        </mc:Fallback>
-      </mc:AlternateContent>
-      <mc:AlternateContent xmlns:mc="http://schemas.openxmlformats.org/markup-compatibility/2006" xmlns:a14="http://schemas.microsoft.com/office/drawing/2010/main">
-        <mc:Choice Requires="a14">
-          <p:sp>
-            <p:nvSpPr>
-              <p:cNvPr id="3" name="Content Placeholder 2"/>
-              <p:cNvSpPr>
-                <a:spLocks noGrp="1"/>
-              </p:cNvSpPr>
-              <p:nvPr>
-                <p:ph idx="1"/>
-              </p:nvPr>
-            </p:nvSpPr>
-            <p:spPr>
-              <a:xfrm>
-                <a:off x="1451513" y="1748555"/>
-                <a:ext cx="9905999" cy="3541714"/>
-              </a:xfrm>
-            </p:spPr>
-            <p:txBody>
-              <a:bodyPr/>
-              <a:lstStyle/>
-              <a:p>
-                <a:r>
-                  <a:rPr lang="en-US" dirty="0"/>
-                  <a:t>Short answer: Too many!</a:t>
-                </a:r>
-              </a:p>
-              <a:p>
-                <a:pPr lvl="1"/>
-                <a:r>
-                  <a:rPr lang="en-US" dirty="0"/>
-                  <a:t>Uncountable </a:t>
-                </a:r>
-              </a:p>
-              <a:p>
-                <a:pPr lvl="1"/>
-                <a14:m>
-                  <m:oMath xmlns:m="http://schemas.openxmlformats.org/officeDocument/2006/math">
-                    <m:d>
-                      <m:dPr>
-                        <m:begChr m:val="|"/>
-                        <m:endChr m:val="}"/>
-                        <m:ctrlPr>
-                          <a:rPr lang="en-US" b="0" i="1" smtClean="0">
-                            <a:latin typeface="Cambria Math" panose="02040503050406030204" pitchFamily="18" charset="0"/>
-                          </a:rPr>
-                        </m:ctrlPr>
-                      </m:dPr>
-                      <m:e>
-                        <m:d>
-                          <m:dPr>
-                            <m:begChr m:val="{"/>
-                            <m:endChr m:val="|"/>
-                            <m:ctrlPr>
-                              <a:rPr lang="en-US" b="0" i="1" smtClean="0">
-                                <a:latin typeface="Cambria Math" panose="02040503050406030204" pitchFamily="18" charset="0"/>
-                              </a:rPr>
-                            </m:ctrlPr>
-                          </m:dPr>
-                          <m:e>
-                            <m:r>
-                              <a:rPr lang="en-US" b="0" i="1" smtClean="0">
-                                <a:latin typeface="Cambria Math"/>
-                              </a:rPr>
-                              <m:t>𝑓</m:t>
-                            </m:r>
-                            <m:r>
-                              <a:rPr lang="en-US" b="0" i="1" smtClean="0">
-                                <a:latin typeface="Cambria Math"/>
-                              </a:rPr>
-                              <m:t> </m:t>
-                            </m:r>
-                          </m:e>
-                        </m:d>
-                        <m:r>
-                          <a:rPr lang="en-US" b="0" i="1" smtClean="0">
-                            <a:latin typeface="Cambria Math"/>
-                          </a:rPr>
-                          <m:t>𝑓</m:t>
-                        </m:r>
-                        <m:r>
-                          <a:rPr lang="en-US" b="0" i="1" smtClean="0">
-                            <a:latin typeface="Cambria Math"/>
-                          </a:rPr>
-                          <m:t>:</m:t>
-                        </m:r>
-                        <m:sSup>
-                          <m:sSupPr>
-                            <m:ctrlPr>
-                              <a:rPr lang="en-US" b="0" i="1" smtClean="0">
-                                <a:latin typeface="Cambria Math" panose="02040503050406030204" pitchFamily="18" charset="0"/>
-                              </a:rPr>
-                            </m:ctrlPr>
-                          </m:sSupPr>
-                          <m:e>
-                            <m:r>
-                              <m:rPr>
-                                <m:sty m:val="p"/>
-                              </m:rPr>
-                              <a:rPr lang="en-US" b="0" i="0" smtClean="0">
-                                <a:latin typeface="Cambria Math"/>
-                              </a:rPr>
-                              <m:t>Σ</m:t>
-                            </m:r>
-                          </m:e>
-                          <m:sup>
-                            <m:r>
-                              <a:rPr lang="en-US" b="0" i="1" smtClean="0">
-                                <a:latin typeface="Cambria Math"/>
-                              </a:rPr>
-                              <m:t>∗</m:t>
-                            </m:r>
-                          </m:sup>
-                        </m:sSup>
-                        <m:r>
-                          <a:rPr lang="en-US" b="0" i="1" smtClean="0">
-                            <a:latin typeface="Cambria Math"/>
-                          </a:rPr>
-                          <m:t>→</m:t>
-                        </m:r>
-                        <m:sSup>
-                          <m:sSupPr>
-                            <m:ctrlPr>
-                              <a:rPr lang="en-US" b="0" i="1" smtClean="0">
-                                <a:latin typeface="Cambria Math" panose="02040503050406030204" pitchFamily="18" charset="0"/>
-                              </a:rPr>
-                            </m:ctrlPr>
-                          </m:sSupPr>
-                          <m:e>
-                            <m:r>
-                              <m:rPr>
-                                <m:sty m:val="p"/>
-                              </m:rPr>
-                              <a:rPr lang="en-US" b="0" i="0" smtClean="0">
-                                <a:latin typeface="Cambria Math"/>
-                              </a:rPr>
-                              <m:t>Σ</m:t>
-                            </m:r>
-                          </m:e>
-                          <m:sup>
-                            <m:r>
-                              <a:rPr lang="en-US" b="0" i="1" smtClean="0">
-                                <a:latin typeface="Cambria Math"/>
-                              </a:rPr>
-                              <m:t>∗</m:t>
-                            </m:r>
-                          </m:sup>
-                        </m:sSup>
-                      </m:e>
-                    </m:d>
-                    <m:r>
-                      <a:rPr lang="en-US" b="0" i="1" smtClean="0">
-                        <a:latin typeface="Cambria Math"/>
-                      </a:rPr>
-                      <m:t>|&gt;</m:t>
-                    </m:r>
-                    <m:r>
-                      <a:rPr lang="en-US" i="1">
-                        <a:latin typeface="Cambria Math"/>
-                      </a:rPr>
-                      <m:t>|</m:t>
-                    </m:r>
-                    <m:r>
-                      <m:rPr>
-                        <m:nor/>
-                      </m:rPr>
-                      <a:rPr lang="en-US"/>
-                      <m:t>ℕ</m:t>
-                    </m:r>
-                    <m:r>
-                      <m:rPr>
-                        <m:nor/>
-                      </m:rPr>
-                      <a:rPr lang="en-US"/>
-                      <m:t>|</m:t>
-                    </m:r>
-                  </m:oMath>
-                </a14:m>
-                <a:endParaRPr lang="en-US" dirty="0"/>
-              </a:p>
-              <a:p>
-                <a:r>
-                  <a:rPr lang="en-US" dirty="0"/>
-                  <a:t>Conclusion: Some functions cannot be computed by any java/python program</a:t>
-                </a:r>
-              </a:p>
-              <a:p>
-                <a:r>
-                  <a:rPr lang="en-US" dirty="0"/>
-                  <a:t>How to prove this?</a:t>
-                </a:r>
-              </a:p>
-            </p:txBody>
-          </p:sp>
-        </mc:Choice>
-        <mc:Fallback xmlns="">
-          <p:sp>
-            <p:nvSpPr>
-              <p:cNvPr id="3" name="Content Placeholder 2"/>
-              <p:cNvSpPr>
-                <a:spLocks noGrp="1" noRot="1" noChangeAspect="1" noMove="1" noResize="1" noEditPoints="1" noAdjustHandles="1" noChangeArrowheads="1" noChangeShapeType="1" noTextEdit="1"/>
-              </p:cNvSpPr>
-              <p:nvPr>
-                <p:ph idx="1"/>
-              </p:nvPr>
-            </p:nvSpPr>
-            <p:spPr>
-              <a:xfrm>
-                <a:off x="1451513" y="1748555"/>
-                <a:ext cx="9905999" cy="3541714"/>
-              </a:xfrm>
-              <a:blipFill>
-                <a:blip r:embed="rId3"/>
-                <a:stretch>
-                  <a:fillRect l="-1152" t="-2143"/>
-                </a:stretch>
-              </a:blipFill>
-            </p:spPr>
-            <p:txBody>
-              <a:bodyPr/>
-              <a:lstStyle/>
-              <a:p>
-                <a:r>
-                  <a:rPr lang="en-US">
-                    <a:noFill/>
-                  </a:rPr>
-                  <a:t> </a:t>
-                </a:r>
-              </a:p>
-            </p:txBody>
-          </p:sp>
-        </mc:Fallback>
-      </mc:AlternateContent>
-      <p:sp>
-        <p:nvSpPr>
-          <p:cNvPr id="4" name="Slide Number Placeholder 3"/>
-          <p:cNvSpPr>
-            <a:spLocks noGrp="1"/>
-          </p:cNvSpPr>
-          <p:nvPr>
-            <p:ph type="sldNum" sz="quarter" idx="12"/>
-          </p:nvPr>
-        </p:nvSpPr>
-        <p:spPr/>
-        <p:txBody>
-          <a:bodyPr/>
-          <a:lstStyle/>
-          <a:p>
-            <a:fld id="{9BB9F8D7-E2A3-4222-BD86-A63794DF33E7}" type="slidenum">
-              <a:rPr lang="en-US" smtClean="0"/>
-              <a:t>30</a:t>
-            </a:fld>
-            <a:endParaRPr lang="en-US"/>
-          </a:p>
-        </p:txBody>
-      </p:sp>
-    </p:spTree>
-    <p:extLst>
-      <p:ext uri="{BB962C8B-B14F-4D97-AF65-F5344CB8AC3E}">
-        <p14:creationId xmlns:p14="http://schemas.microsoft.com/office/powerpoint/2010/main" val="379039478"/>
-      </p:ext>
-    </p:extLst>
-  </p:cSld>
-  <p:clrMapOvr>
-    <a:masterClrMapping/>
-  </p:clrMapOvr>
-</p:sld>
-</file>
-
-<file path=ppt/slides/slide31.xml><?xml version="1.0" encoding="utf-8"?>
-<p:sld xmlns:a="http://schemas.openxmlformats.org/drawingml/2006/main" xmlns:r="http://schemas.openxmlformats.org/officeDocument/2006/relationships" xmlns:p="http://schemas.openxmlformats.org/presentationml/2006/main">
-  <p:cSld>
-    <p:spTree>
-      <p:nvGrpSpPr>
-        <p:cNvPr id="1" name=""/>
-        <p:cNvGrpSpPr/>
-        <p:nvPr/>
-      </p:nvGrpSpPr>
-      <p:grpSpPr>
-        <a:xfrm>
-          <a:off x="0" y="0"/>
-          <a:ext cx="0" cy="0"/>
-          <a:chOff x="0" y="0"/>
-          <a:chExt cx="0" cy="0"/>
-        </a:xfrm>
-      </p:grpSpPr>
       <p:sp>
         <p:nvSpPr>
           <p:cNvPr id="2" name="Title 1">
@@ -31428,7 +27659,7 @@
           <a:p>
             <a:fld id="{9BB9F8D7-E2A3-4222-BD86-A63794DF33E7}" type="slidenum">
               <a:rPr lang="en-US" smtClean="0"/>
-              <a:t>31</a:t>
+              <a:t>30</a:t>
             </a:fld>
             <a:endParaRPr lang="en-US"/>
           </a:p>
@@ -31447,7 +27678,7 @@
 </p:sld>
 </file>
 
-<file path=ppt/slides/slide32.xml><?xml version="1.0" encoding="utf-8"?>
+<file path=ppt/slides/slide31.xml><?xml version="1.0" encoding="utf-8"?>
 <p:sld xmlns:a="http://schemas.openxmlformats.org/drawingml/2006/main" xmlns:r="http://schemas.openxmlformats.org/officeDocument/2006/relationships" xmlns:p="http://schemas.openxmlformats.org/presentationml/2006/main">
   <p:cSld>
     <p:spTree>
@@ -31951,7 +28182,7 @@
           <a:p>
             <a:fld id="{9BB9F8D7-E2A3-4222-BD86-A63794DF33E7}" type="slidenum">
               <a:rPr lang="en-US" smtClean="0"/>
-              <a:t>32</a:t>
+              <a:t>31</a:t>
             </a:fld>
             <a:endParaRPr lang="en-US"/>
           </a:p>
@@ -32775,7 +29006,7 @@
 </p:sld>
 </file>
 
-<file path=ppt/slides/slide33.xml><?xml version="1.0" encoding="utf-8"?>
+<file path=ppt/slides/slide32.xml><?xml version="1.0" encoding="utf-8"?>
 <p:sld xmlns:a="http://schemas.openxmlformats.org/drawingml/2006/main" xmlns:r="http://schemas.openxmlformats.org/officeDocument/2006/relationships" xmlns:p="http://schemas.openxmlformats.org/presentationml/2006/main">
   <p:cSld>
     <p:spTree>
@@ -33177,7 +29408,7 @@
           <a:p>
             <a:fld id="{9BB9F8D7-E2A3-4222-BD86-A63794DF33E7}" type="slidenum">
               <a:rPr lang="en-US" smtClean="0"/>
-              <a:t>33</a:t>
+              <a:t>32</a:t>
             </a:fld>
             <a:endParaRPr lang="en-US"/>
           </a:p>
@@ -34267,7 +30498,7 @@
 </p:sld>
 </file>
 
-<file path=ppt/slides/slide34.xml><?xml version="1.0" encoding="utf-8"?>
+<file path=ppt/slides/slide33.xml><?xml version="1.0" encoding="utf-8"?>
 <p:sld xmlns:a="http://schemas.openxmlformats.org/drawingml/2006/main" xmlns:r="http://schemas.openxmlformats.org/officeDocument/2006/relationships" xmlns:p="http://schemas.openxmlformats.org/presentationml/2006/main">
   <p:cSld>
     <p:spTree>
@@ -34572,7 +30803,7 @@
           <a:p>
             <a:fld id="{9BB9F8D7-E2A3-4222-BD86-A63794DF33E7}" type="slidenum">
               <a:rPr lang="en-US" smtClean="0"/>
-              <a:t>34</a:t>
+              <a:t>33</a:t>
             </a:fld>
             <a:endParaRPr lang="en-US"/>
           </a:p>
@@ -34632,7 +30863,7 @@
 </p:sld>
 </file>
 
-<file path=ppt/slides/slide35.xml><?xml version="1.0" encoding="utf-8"?>
+<file path=ppt/slides/slide34.xml><?xml version="1.0" encoding="utf-8"?>
 <p:sld xmlns:a="http://schemas.openxmlformats.org/drawingml/2006/main" xmlns:r="http://schemas.openxmlformats.org/officeDocument/2006/relationships" xmlns:p="http://schemas.openxmlformats.org/presentationml/2006/main">
   <p:cSld>
     <p:spTree>
@@ -34820,7 +31051,7 @@
           <a:p>
             <a:fld id="{9BB9F8D7-E2A3-4222-BD86-A63794DF33E7}" type="slidenum">
               <a:rPr lang="en-US" smtClean="0"/>
-              <a:t>35</a:t>
+              <a:t>34</a:t>
             </a:fld>
             <a:endParaRPr lang="en-US"/>
           </a:p>
@@ -37883,7 +34114,7 @@
 </p:sld>
 </file>
 
-<file path=ppt/slides/slide36.xml><?xml version="1.0" encoding="utf-8"?>
+<file path=ppt/slides/slide35.xml><?xml version="1.0" encoding="utf-8"?>
 <p:sld xmlns:a="http://schemas.openxmlformats.org/drawingml/2006/main" xmlns:r="http://schemas.openxmlformats.org/officeDocument/2006/relationships" xmlns:p="http://schemas.openxmlformats.org/presentationml/2006/main">
   <p:cSld>
     <p:spTree>
@@ -38071,7 +34302,7 @@
           <a:p>
             <a:fld id="{9BB9F8D7-E2A3-4222-BD86-A63794DF33E7}" type="slidenum">
               <a:rPr lang="en-US" smtClean="0"/>
-              <a:t>36</a:t>
+              <a:t>35</a:t>
             </a:fld>
             <a:endParaRPr lang="en-US"/>
           </a:p>
@@ -40957,7 +37188,7 @@
 </p:sld>
 </file>
 
-<file path=ppt/slides/slide37.xml><?xml version="1.0" encoding="utf-8"?>
+<file path=ppt/slides/slide36.xml><?xml version="1.0" encoding="utf-8"?>
 <p:sld xmlns:a="http://schemas.openxmlformats.org/drawingml/2006/main" xmlns:r="http://schemas.openxmlformats.org/officeDocument/2006/relationships" xmlns:p="http://schemas.openxmlformats.org/presentationml/2006/main">
   <p:cSld>
     <p:spTree>
@@ -41106,7 +37337,7 @@
           <a:p>
             <a:fld id="{9BB9F8D7-E2A3-4222-BD86-A63794DF33E7}" type="slidenum">
               <a:rPr lang="en-US" smtClean="0"/>
-              <a:t>37</a:t>
+              <a:t>36</a:t>
             </a:fld>
             <a:endParaRPr lang="en-US"/>
           </a:p>
@@ -41125,7 +37356,7 @@
 </p:sld>
 </file>
 
-<file path=ppt/slides/slide38.xml><?xml version="1.0" encoding="utf-8"?>
+<file path=ppt/slides/slide37.xml><?xml version="1.0" encoding="utf-8"?>
 <p:sld xmlns:a="http://schemas.openxmlformats.org/drawingml/2006/main" xmlns:r="http://schemas.openxmlformats.org/officeDocument/2006/relationships" xmlns:p="http://schemas.openxmlformats.org/presentationml/2006/main">
   <p:cSld>
     <p:spTree>
@@ -41491,7 +37722,7 @@
           <a:p>
             <a:fld id="{9BB9F8D7-E2A3-4222-BD86-A63794DF33E7}" type="slidenum">
               <a:rPr lang="en-US" smtClean="0"/>
-              <a:t>38</a:t>
+              <a:t>37</a:t>
             </a:fld>
             <a:endParaRPr lang="en-US"/>
           </a:p>
@@ -41510,7 +37741,7 @@
 </p:sld>
 </file>
 
-<file path=ppt/slides/slide39.xml><?xml version="1.0" encoding="utf-8"?>
+<file path=ppt/slides/slide38.xml><?xml version="1.0" encoding="utf-8"?>
 <p:sld xmlns:a="http://schemas.openxmlformats.org/drawingml/2006/main" xmlns:r="http://schemas.openxmlformats.org/officeDocument/2006/relationships" xmlns:p="http://schemas.openxmlformats.org/presentationml/2006/main">
   <p:cSld>
     <p:spTree>
@@ -41620,7 +37851,7 @@
           <a:p>
             <a:fld id="{9BB9F8D7-E2A3-4222-BD86-A63794DF33E7}" type="slidenum">
               <a:rPr lang="en-US" smtClean="0"/>
-              <a:t>39</a:t>
+              <a:t>38</a:t>
             </a:fld>
             <a:endParaRPr lang="en-US"/>
           </a:p>
@@ -41640,7 +37871,7 @@
 </file>
 
 <file path=ppt/slides/slide4.xml><?xml version="1.0" encoding="utf-8"?>
-<p:sld xmlns:a="http://schemas.openxmlformats.org/drawingml/2006/main" xmlns:r="http://schemas.openxmlformats.org/officeDocument/2006/relationships" xmlns:p="http://schemas.openxmlformats.org/presentationml/2006/main">
+<p:sld xmlns:a="http://schemas.openxmlformats.org/drawingml/2006/main" xmlns:r="http://schemas.openxmlformats.org/officeDocument/2006/relationships" xmlns:p="http://schemas.openxmlformats.org/presentationml/2006/main" show="0">
   <p:cSld>
     <p:spTree>
       <p:nvGrpSpPr>
@@ -42143,7 +38374,7 @@
 </file>
 
 <file path=ppt/slides/slide5.xml><?xml version="1.0" encoding="utf-8"?>
-<p:sld xmlns:a="http://schemas.openxmlformats.org/drawingml/2006/main" xmlns:r="http://schemas.openxmlformats.org/officeDocument/2006/relationships" xmlns:p="http://schemas.openxmlformats.org/presentationml/2006/main">
+<p:sld xmlns:a="http://schemas.openxmlformats.org/drawingml/2006/main" xmlns:r="http://schemas.openxmlformats.org/officeDocument/2006/relationships" xmlns:p="http://schemas.openxmlformats.org/presentationml/2006/main" show="0">
   <p:cSld>
     <p:spTree>
       <p:nvGrpSpPr>
@@ -43082,7 +39313,7 @@
 </file>
 
 <file path=ppt/slides/slide6.xml><?xml version="1.0" encoding="utf-8"?>
-<p:sld xmlns:a="http://schemas.openxmlformats.org/drawingml/2006/main" xmlns:r="http://schemas.openxmlformats.org/officeDocument/2006/relationships" xmlns:p="http://schemas.openxmlformats.org/presentationml/2006/main">
+<p:sld xmlns:a="http://schemas.openxmlformats.org/drawingml/2006/main" xmlns:r="http://schemas.openxmlformats.org/officeDocument/2006/relationships" xmlns:p="http://schemas.openxmlformats.org/presentationml/2006/main" show="0">
   <p:cSld>
     <p:spTree>
       <p:nvGrpSpPr>
@@ -43280,8 +39511,8 @@
           </a:p>
         </p:txBody>
       </p:sp>
-      <mc:AlternateContent xmlns:mc="http://schemas.openxmlformats.org/markup-compatibility/2006">
-        <mc:Choice xmlns:a14="http://schemas.microsoft.com/office/drawing/2010/main" Requires="a14">
+      <mc:AlternateContent xmlns:mc="http://schemas.openxmlformats.org/markup-compatibility/2006" xmlns:a14="http://schemas.microsoft.com/office/drawing/2010/main">
+        <mc:Choice Requires="a14">
           <p:sp>
             <p:nvSpPr>
               <p:cNvPr id="7" name="TextBox 6">
@@ -43445,7 +39676,7 @@
             </p:txBody>
           </p:sp>
         </mc:Choice>
-        <mc:Fallback>
+        <mc:Fallback xmlns="">
           <p:sp>
             <p:nvSpPr>
               <p:cNvPr id="7" name="TextBox 6">
@@ -43571,8 +39802,8 @@
           </a:fontRef>
         </p:style>
       </p:cxnSp>
-      <mc:AlternateContent xmlns:mc="http://schemas.openxmlformats.org/markup-compatibility/2006">
-        <mc:Choice xmlns:a14="http://schemas.microsoft.com/office/drawing/2010/main" Requires="a14">
+      <mc:AlternateContent xmlns:mc="http://schemas.openxmlformats.org/markup-compatibility/2006" xmlns:a14="http://schemas.microsoft.com/office/drawing/2010/main">
+        <mc:Choice Requires="a14">
           <p:sp>
             <p:nvSpPr>
               <p:cNvPr id="10" name="TextBox 9">
@@ -43643,7 +39874,7 @@
             </p:txBody>
           </p:sp>
         </mc:Choice>
-        <mc:Fallback>
+        <mc:Fallback xmlns="">
           <p:sp>
             <p:nvSpPr>
               <p:cNvPr id="10" name="TextBox 9">
@@ -43733,8 +39964,8 @@
           </a:fontRef>
         </p:style>
       </p:cxnSp>
-      <mc:AlternateContent xmlns:mc="http://schemas.openxmlformats.org/markup-compatibility/2006">
-        <mc:Choice xmlns:a14="http://schemas.microsoft.com/office/drawing/2010/main" Requires="a14">
+      <mc:AlternateContent xmlns:mc="http://schemas.openxmlformats.org/markup-compatibility/2006" xmlns:a14="http://schemas.microsoft.com/office/drawing/2010/main">
+        <mc:Choice Requires="a14">
           <p:sp>
             <p:nvSpPr>
               <p:cNvPr id="12" name="TextBox 11">
@@ -44177,7 +40408,7 @@
             </p:txBody>
           </p:sp>
         </mc:Choice>
-        <mc:Fallback>
+        <mc:Fallback xmlns="">
           <p:sp>
             <p:nvSpPr>
               <p:cNvPr id="12" name="TextBox 11">
@@ -44222,8 +40453,8 @@
           </p:sp>
         </mc:Fallback>
       </mc:AlternateContent>
-      <mc:AlternateContent xmlns:mc="http://schemas.openxmlformats.org/markup-compatibility/2006">
-        <mc:Choice xmlns:a14="http://schemas.microsoft.com/office/drawing/2010/main" Requires="a14">
+      <mc:AlternateContent xmlns:mc="http://schemas.openxmlformats.org/markup-compatibility/2006" xmlns:a14="http://schemas.microsoft.com/office/drawing/2010/main">
+        <mc:Choice Requires="a14">
           <p:sp>
             <p:nvSpPr>
               <p:cNvPr id="13" name="TextBox 12">
@@ -44398,7 +40629,7 @@
             </p:txBody>
           </p:sp>
         </mc:Choice>
-        <mc:Fallback>
+        <mc:Fallback xmlns="">
           <p:sp>
             <p:nvSpPr>
               <p:cNvPr id="13" name="TextBox 12">
@@ -44525,8 +40756,8 @@
           </a:p>
         </p:txBody>
       </p:sp>
-      <mc:AlternateContent xmlns:mc="http://schemas.openxmlformats.org/markup-compatibility/2006" xmlns:a14="http://schemas.microsoft.com/office/drawing/2010/main">
-        <mc:Choice Requires="a14">
+      <mc:AlternateContent xmlns:mc="http://schemas.openxmlformats.org/markup-compatibility/2006">
+        <mc:Choice xmlns:a14="http://schemas.microsoft.com/office/drawing/2010/main" Requires="a14">
           <p:sp>
             <p:nvSpPr>
               <p:cNvPr id="7" name="TextBox 6">
@@ -44542,7 +40773,7 @@
             <p:spPr>
               <a:xfrm>
                 <a:off x="1403287" y="1702048"/>
-                <a:ext cx="9008198" cy="539315"/>
+                <a:ext cx="9008198" cy="560090"/>
               </a:xfrm>
               <a:prstGeom prst="rect">
                 <a:avLst/>
@@ -44651,7 +40882,7 @@
                     <m:sSup>
                       <m:sSupPr>
                         <m:ctrlPr>
-                          <a:rPr lang="en-US" sz="2800" i="1">
+                          <a:rPr lang="en-US" sz="2800" b="0" i="1" smtClean="0">
                             <a:solidFill>
                               <a:schemeClr val="bg1"/>
                             </a:solidFill>
@@ -44661,18 +40892,43 @@
                       </m:sSupPr>
                       <m:e>
                         <m:r>
-                          <a:rPr lang="en-US" sz="2800" i="1">
+                          <a:rPr lang="en-US" sz="2800" b="0" i="1" smtClean="0">
                             <a:solidFill>
                               <a:schemeClr val="bg1"/>
                             </a:solidFill>
                             <a:latin typeface="Cambria Math" panose="02040503050406030204" pitchFamily="18" charset="0"/>
                           </a:rPr>
-                          <m:t>2</m:t>
+                          <m:t>|</m:t>
                         </m:r>
+                        <m:d>
+                          <m:dPr>
+                            <m:begChr m:val="{"/>
+                            <m:endChr m:val="}"/>
+                            <m:ctrlPr>
+                              <a:rPr lang="en-US" sz="2800" b="0" i="1" smtClean="0">
+                                <a:solidFill>
+                                  <a:schemeClr val="bg1"/>
+                                </a:solidFill>
+                                <a:latin typeface="Cambria Math" panose="02040503050406030204" pitchFamily="18" charset="0"/>
+                              </a:rPr>
+                            </m:ctrlPr>
+                          </m:dPr>
+                          <m:e>
+                            <m:r>
+                              <a:rPr lang="en-US" sz="2800" b="0" i="1" smtClean="0">
+                                <a:solidFill>
+                                  <a:schemeClr val="bg1"/>
+                                </a:solidFill>
+                                <a:latin typeface="Cambria Math" panose="02040503050406030204" pitchFamily="18" charset="0"/>
+                              </a:rPr>
+                              <m:t>0,1</m:t>
+                            </m:r>
+                          </m:e>
+                        </m:d>
                       </m:e>
                       <m:sup>
                         <m:r>
-                          <a:rPr lang="en-US" sz="2800" i="1">
+                          <a:rPr lang="en-US" sz="2800" b="0" i="1" smtClean="0">
                             <a:solidFill>
                               <a:schemeClr val="bg1"/>
                             </a:solidFill>
@@ -44681,7 +40937,7 @@
                           <m:t>|</m:t>
                         </m:r>
                         <m:r>
-                          <a:rPr lang="en-US" sz="2800" i="1">
+                          <a:rPr lang="en-US" sz="2800" b="0" i="1" smtClean="0">
                             <a:solidFill>
                               <a:schemeClr val="bg1"/>
                             </a:solidFill>
@@ -44690,7 +40946,7 @@
                           <m:t>𝑆</m:t>
                         </m:r>
                         <m:r>
-                          <a:rPr lang="en-US" sz="2800" i="1">
+                          <a:rPr lang="en-US" sz="2800" b="0" i="1" smtClean="0">
                             <a:solidFill>
                               <a:schemeClr val="bg1"/>
                             </a:solidFill>
@@ -44700,6 +40956,15 @@
                         </m:r>
                       </m:sup>
                     </m:sSup>
+                    <m:r>
+                      <a:rPr lang="en-US" sz="2800" b="0" i="1" smtClean="0">
+                        <a:solidFill>
+                          <a:schemeClr val="bg1"/>
+                        </a:solidFill>
+                        <a:latin typeface="Cambria Math" panose="02040503050406030204" pitchFamily="18" charset="0"/>
+                      </a:rPr>
+                      <m:t>|</m:t>
+                    </m:r>
                   </m:oMath>
                 </a14:m>
                 <a:endParaRPr lang="en-US" sz="2800" dirty="0">
@@ -44711,7 +40976,7 @@
             </p:txBody>
           </p:sp>
         </mc:Choice>
-        <mc:Fallback xmlns="">
+        <mc:Fallback>
           <p:sp>
             <p:nvSpPr>
               <p:cNvPr id="7" name="TextBox 6">
@@ -44729,7 +40994,7 @@
             <p:spPr>
               <a:xfrm>
                 <a:off x="1403287" y="1702048"/>
-                <a:ext cx="9008198" cy="539315"/>
+                <a:ext cx="9008198" cy="560090"/>
               </a:xfrm>
               <a:prstGeom prst="rect">
                 <a:avLst/>
@@ -44737,7 +41002,7 @@
               <a:blipFill>
                 <a:blip r:embed="rId2"/>
                 <a:stretch>
-                  <a:fillRect t="-4651" b="-32558"/>
+                  <a:fillRect t="-4348" b="-26087"/>
                 </a:stretch>
               </a:blipFill>
             </p:spPr>
@@ -44867,8 +41132,8 @@
           <a:chExt cx="0" cy="0"/>
         </a:xfrm>
       </p:grpSpPr>
-      <mc:AlternateContent xmlns:mc="http://schemas.openxmlformats.org/markup-compatibility/2006" xmlns:a14="http://schemas.microsoft.com/office/drawing/2010/main">
-        <mc:Choice Requires="a14">
+      <mc:AlternateContent xmlns:mc="http://schemas.openxmlformats.org/markup-compatibility/2006">
+        <mc:Choice xmlns:a14="http://schemas.microsoft.com/office/drawing/2010/main" Requires="a14">
           <p:sp>
             <p:nvSpPr>
               <p:cNvPr id="2" name="Title 1">
@@ -44969,12 +41234,25 @@
                         </m:ctrlPr>
                       </m:sSupPr>
                       <m:e>
-                        <m:r>
-                          <a:rPr lang="en-US" b="0" i="1" smtClean="0">
-                            <a:latin typeface="Cambria Math" panose="02040503050406030204" pitchFamily="18" charset="0"/>
-                          </a:rPr>
-                          <m:t>2</m:t>
-                        </m:r>
+                        <m:d>
+                          <m:dPr>
+                            <m:begChr m:val="{"/>
+                            <m:endChr m:val="}"/>
+                            <m:ctrlPr>
+                              <a:rPr lang="en-US" b="0" i="1" smtClean="0">
+                                <a:latin typeface="Cambria Math" panose="02040503050406030204" pitchFamily="18" charset="0"/>
+                              </a:rPr>
+                            </m:ctrlPr>
+                          </m:dPr>
+                          <m:e>
+                            <m:r>
+                              <a:rPr lang="en-US" b="0" i="1" smtClean="0">
+                                <a:latin typeface="Cambria Math" panose="02040503050406030204" pitchFamily="18" charset="0"/>
+                              </a:rPr>
+                              <m:t>0,1</m:t>
+                            </m:r>
+                          </m:e>
+                        </m:d>
                       </m:e>
                       <m:sup>
                         <m:r>
@@ -45004,7 +41282,7 @@
             </p:txBody>
           </p:sp>
         </mc:Choice>
-        <mc:Fallback xmlns="">
+        <mc:Fallback>
           <p:sp>
             <p:nvSpPr>
               <p:cNvPr id="2" name="Title 1">
@@ -45029,7 +41307,7 @@
               <a:blipFill>
                 <a:blip r:embed="rId2"/>
                 <a:stretch>
-                  <a:fillRect t="-3125" b="-14063"/>
+                  <a:fillRect t="-3077" b="-13846"/>
                 </a:stretch>
               </a:blipFill>
             </p:spPr>
